--- a/slides/antigravity_retail_workshop_en.pptx
+++ b/slides/antigravity_retail_workshop_en.pptx
@@ -16,6 +16,10 @@
     <p:sldId id="264" r:id="rId16"/>
     <p:sldId id="265" r:id="rId17"/>
     <p:sldId id="266" r:id="rId18"/>
+    <p:sldId id="267" r:id="rId19"/>
+    <p:sldId id="268" r:id="rId20"/>
+    <p:sldId id="269" r:id="rId21"/>
+    <p:sldId id="270" r:id="rId22"/>
   </p:sldIdLst>
   <p:sldSz cx="12191695" cy="6858000" type="screen4x3"/>
   <p:notesSz cx="6858000" cy="9144000"/>
@@ -582,7 +586,7 @@
           <a:lstStyle/>
           <a:p>
             <a:r>
-              <a:t>Explain the synergy between Antigravity subagents (which help you write the code) and Google ADK + A2A (the runtime multi-agent system you build, test locally in `adk web`, deploy with Terraform, and register in Gemini Enterprise).</a:t>
+              <a:t>This is a critical module for enterprise architects and CISOs. Show how Google Cloud governs Gemini Enterprise licenses &amp; audit logs in Layer 1, while Antigravity enforces sandboxing and deterministic PreToolUse hooks in Layer 2.</a:t>
             </a:r>
           </a:p>
         </p:txBody>
@@ -652,7 +656,287 @@
           <a:lstStyle/>
           <a:p>
             <a:r>
-              <a:t>Guide attendees through the Capstone! Have them test their multi-agent hierarchy in both the FastAPI dashboard, the ADK Development UI (`./scripts/run_adk_web.sh` at localhost:8080), and `./deploy/deploy_gcp.sh --dry-run` (or live GCP deploy!).</a:t>
+              <a:t>Review the Retail Lab 3 Objectives and the FastMCP + Margin Hook components attendees will build.</a:t>
+            </a:r>
+          </a:p>
+        </p:txBody>
+      </p:sp>
+      <p:sp>
+        <p:nvSpPr>
+          <p:cNvPr id="4" name="Slide Number Placeholder 3"/>
+          <p:cNvSpPr>
+            <a:spLocks noGrp="1"/>
+          </p:cNvSpPr>
+          <p:nvPr>
+            <p:ph type="sldNum" idx="5" sz="quarter"/>
+          </p:nvPr>
+        </p:nvSpPr>
+        <p:spPr/>
+      </p:sp>
+    </p:spTree>
+  </p:cSld>
+  <p:clrMapOvr>
+    <a:masterClrMapping/>
+  </p:clrMapOvr>
+</p:notes>
+</file>
+
+<file path=ppt/notesSlides/notesSlide12.xml><?xml version="1.0" encoding="utf-8"?>
+<p:notes xmlns:a="http://schemas.openxmlformats.org/drawingml/2006/main" xmlns:p="http://schemas.openxmlformats.org/presentationml/2006/main" xmlns:r="http://schemas.openxmlformats.org/officeDocument/2006/relationships">
+  <p:cSld>
+    <p:spTree>
+      <p:nvGrpSpPr>
+        <p:cNvPr id="1" name=""/>
+        <p:cNvGrpSpPr/>
+        <p:nvPr/>
+      </p:nvGrpSpPr>
+      <p:grpSpPr>
+        <a:xfrm>
+          <a:off x="0" y="0"/>
+          <a:ext cx="0" cy="0"/>
+          <a:chOff x="0" y="0"/>
+          <a:chExt cx="0" cy="0"/>
+        </a:xfrm>
+      </p:grpSpPr>
+      <p:sp>
+        <p:nvSpPr>
+          <p:cNvPr id="2" name="Slide Image Placeholder 1"/>
+          <p:cNvSpPr>
+            <a:spLocks noGrp="1"/>
+          </p:cNvSpPr>
+          <p:nvPr>
+            <p:ph type="sldImg" idx="2"/>
+          </p:nvPr>
+        </p:nvSpPr>
+        <p:spPr/>
+      </p:sp>
+      <p:sp>
+        <p:nvSpPr>
+          <p:cNvPr id="3" name="Notes Placeholder 2"/>
+          <p:cNvSpPr>
+            <a:spLocks noGrp="1"/>
+          </p:cNvSpPr>
+          <p:nvPr>
+            <p:ph type="body" idx="3" sz="quarter"/>
+          </p:nvPr>
+        </p:nvSpPr>
+        <p:spPr/>
+        <p:txBody>
+          <a:bodyPr/>
+          <a:lstStyle/>
+          <a:p>
+            <a:r>
+              <a:t>Keep this slide displayed during Retail Lab 3.</a:t>
+            </a:r>
+          </a:p>
+        </p:txBody>
+      </p:sp>
+      <p:sp>
+        <p:nvSpPr>
+          <p:cNvPr id="4" name="Slide Number Placeholder 3"/>
+          <p:cNvSpPr>
+            <a:spLocks noGrp="1"/>
+          </p:cNvSpPr>
+          <p:nvPr>
+            <p:ph type="sldNum" idx="5" sz="quarter"/>
+          </p:nvPr>
+        </p:nvSpPr>
+        <p:spPr/>
+      </p:sp>
+    </p:spTree>
+  </p:cSld>
+  <p:clrMapOvr>
+    <a:masterClrMapping/>
+  </p:clrMapOvr>
+</p:notes>
+</file>
+
+<file path=ppt/notesSlides/notesSlide13.xml><?xml version="1.0" encoding="utf-8"?>
+<p:notes xmlns:a="http://schemas.openxmlformats.org/drawingml/2006/main" xmlns:p="http://schemas.openxmlformats.org/presentationml/2006/main" xmlns:r="http://schemas.openxmlformats.org/officeDocument/2006/relationships">
+  <p:cSld>
+    <p:spTree>
+      <p:nvGrpSpPr>
+        <p:cNvPr id="1" name=""/>
+        <p:cNvGrpSpPr/>
+        <p:nvPr/>
+      </p:nvGrpSpPr>
+      <p:grpSpPr>
+        <a:xfrm>
+          <a:off x="0" y="0"/>
+          <a:ext cx="0" cy="0"/>
+          <a:chOff x="0" y="0"/>
+          <a:chExt cx="0" cy="0"/>
+        </a:xfrm>
+      </p:grpSpPr>
+      <p:sp>
+        <p:nvSpPr>
+          <p:cNvPr id="2" name="Slide Image Placeholder 1"/>
+          <p:cNvSpPr>
+            <a:spLocks noGrp="1"/>
+          </p:cNvSpPr>
+          <p:nvPr>
+            <p:ph type="sldImg" idx="2"/>
+          </p:nvPr>
+        </p:nvSpPr>
+        <p:spPr/>
+      </p:sp>
+      <p:sp>
+        <p:nvSpPr>
+          <p:cNvPr id="3" name="Notes Placeholder 2"/>
+          <p:cNvSpPr>
+            <a:spLocks noGrp="1"/>
+          </p:cNvSpPr>
+          <p:nvPr>
+            <p:ph type="body" idx="3" sz="quarter"/>
+          </p:nvPr>
+        </p:nvSpPr>
+        <p:spPr/>
+        <p:txBody>
+          <a:bodyPr/>
+          <a:lstStyle/>
+          <a:p>
+            <a:r>
+              <a:t>Explain the synergy between Antigravity subagents (which help you write the code) and Google ADK + A2A (the runtime multi-agent system you build, test locally in `adk web`, deploy with Terraform, and register in Gemini Enterprise).</a:t>
+            </a:r>
+          </a:p>
+        </p:txBody>
+      </p:sp>
+      <p:sp>
+        <p:nvSpPr>
+          <p:cNvPr id="4" name="Slide Number Placeholder 3"/>
+          <p:cNvSpPr>
+            <a:spLocks noGrp="1"/>
+          </p:cNvSpPr>
+          <p:nvPr>
+            <p:ph type="sldNum" idx="5" sz="quarter"/>
+          </p:nvPr>
+        </p:nvSpPr>
+        <p:spPr/>
+      </p:sp>
+    </p:spTree>
+  </p:cSld>
+  <p:clrMapOvr>
+    <a:masterClrMapping/>
+  </p:clrMapOvr>
+</p:notes>
+</file>
+
+<file path=ppt/notesSlides/notesSlide14.xml><?xml version="1.0" encoding="utf-8"?>
+<p:notes xmlns:a="http://schemas.openxmlformats.org/drawingml/2006/main" xmlns:p="http://schemas.openxmlformats.org/presentationml/2006/main" xmlns:r="http://schemas.openxmlformats.org/officeDocument/2006/relationships">
+  <p:cSld>
+    <p:spTree>
+      <p:nvGrpSpPr>
+        <p:cNvPr id="1" name=""/>
+        <p:cNvGrpSpPr/>
+        <p:nvPr/>
+      </p:nvGrpSpPr>
+      <p:grpSpPr>
+        <a:xfrm>
+          <a:off x="0" y="0"/>
+          <a:ext cx="0" cy="0"/>
+          <a:chOff x="0" y="0"/>
+          <a:chExt cx="0" cy="0"/>
+        </a:xfrm>
+      </p:grpSpPr>
+      <p:sp>
+        <p:nvSpPr>
+          <p:cNvPr id="2" name="Slide Image Placeholder 1"/>
+          <p:cNvSpPr>
+            <a:spLocks noGrp="1"/>
+          </p:cNvSpPr>
+          <p:nvPr>
+            <p:ph type="sldImg" idx="2"/>
+          </p:nvPr>
+        </p:nvSpPr>
+        <p:spPr/>
+      </p:sp>
+      <p:sp>
+        <p:nvSpPr>
+          <p:cNvPr id="3" name="Notes Placeholder 2"/>
+          <p:cNvSpPr>
+            <a:spLocks noGrp="1"/>
+          </p:cNvSpPr>
+          <p:nvPr>
+            <p:ph type="body" idx="3" sz="quarter"/>
+          </p:nvPr>
+        </p:nvSpPr>
+        <p:spPr/>
+        <p:txBody>
+          <a:bodyPr/>
+          <a:lstStyle/>
+          <a:p>
+            <a:r>
+              <a:t>Introduce the Retail Lab 4 Capstone Objectives and the 3 major deliverables.</a:t>
+            </a:r>
+          </a:p>
+        </p:txBody>
+      </p:sp>
+      <p:sp>
+        <p:nvSpPr>
+          <p:cNvPr id="4" name="Slide Number Placeholder 3"/>
+          <p:cNvSpPr>
+            <a:spLocks noGrp="1"/>
+          </p:cNvSpPr>
+          <p:nvPr>
+            <p:ph type="sldNum" idx="5" sz="quarter"/>
+          </p:nvPr>
+        </p:nvSpPr>
+        <p:spPr/>
+      </p:sp>
+    </p:spTree>
+  </p:cSld>
+  <p:clrMapOvr>
+    <a:masterClrMapping/>
+  </p:clrMapOvr>
+</p:notes>
+</file>
+
+<file path=ppt/notesSlides/notesSlide15.xml><?xml version="1.0" encoding="utf-8"?>
+<p:notes xmlns:a="http://schemas.openxmlformats.org/drawingml/2006/main" xmlns:p="http://schemas.openxmlformats.org/presentationml/2006/main" xmlns:r="http://schemas.openxmlformats.org/officeDocument/2006/relationships">
+  <p:cSld>
+    <p:spTree>
+      <p:nvGrpSpPr>
+        <p:cNvPr id="1" name=""/>
+        <p:cNvGrpSpPr/>
+        <p:nvPr/>
+      </p:nvGrpSpPr>
+      <p:grpSpPr>
+        <a:xfrm>
+          <a:off x="0" y="0"/>
+          <a:ext cx="0" cy="0"/>
+          <a:chOff x="0" y="0"/>
+          <a:chExt cx="0" cy="0"/>
+        </a:xfrm>
+      </p:grpSpPr>
+      <p:sp>
+        <p:nvSpPr>
+          <p:cNvPr id="2" name="Slide Image Placeholder 1"/>
+          <p:cNvSpPr>
+            <a:spLocks noGrp="1"/>
+          </p:cNvSpPr>
+          <p:nvPr>
+            <p:ph type="sldImg" idx="2"/>
+          </p:nvPr>
+        </p:nvSpPr>
+        <p:spPr/>
+      </p:sp>
+      <p:sp>
+        <p:nvSpPr>
+          <p:cNvPr id="3" name="Notes Placeholder 2"/>
+          <p:cNvSpPr>
+            <a:spLocks noGrp="1"/>
+          </p:cNvSpPr>
+          <p:nvPr>
+            <p:ph type="body" idx="3" sz="quarter"/>
+          </p:nvPr>
+        </p:nvSpPr>
+        <p:spPr/>
+        <p:txBody>
+          <a:bodyPr/>
+          <a:lstStyle/>
+          <a:p>
+            <a:r>
+              <a:t>Keep this slide projected during the Retail Lab 4 Capstone.</a:t>
             </a:r>
           </a:p>
         </p:txBody>
@@ -722,7 +1006,7 @@
           <a:lstStyle/>
           <a:p>
             <a:r>
-              <a:t>Walk through the 4-hour progression. Emphasize that attendees use Antigravity itself to solve every lab using the curated prompts in PROMPTS.md.</a:t>
+              <a:t>Walk through the 4-hour progression. Emphasize that attendees use Antigravity itself to solve every lab using the curated prompts in PROMPTS.md and the printable PDF guides.</a:t>
             </a:r>
           </a:p>
         </p:txBody>
@@ -932,7 +1216,7 @@
           <a:lstStyle/>
           <a:p>
             <a:r>
-              <a:t>Launch Lab 1! Have attendees run install.sh, inspect the broken KPIs on the live Web Dashboard, and use the optimized prompts in PROMPTS.md to fix both bugs.</a:t>
+              <a:t>Review the Retail Lab 1 Objectives and What Attendees Will Build before starting Lab 1.</a:t>
             </a:r>
           </a:p>
         </p:txBody>
@@ -1002,7 +1286,7 @@
           <a:lstStyle/>
           <a:p>
             <a:r>
-              <a:t>Explain progressive disclosure: why 50 skills don't bloat the prompt because only YAML frontmatter is loaded until the agent activates a specific skill.</a:t>
+              <a:t>Keep this slide projected during Retail Lab 1 so attendees have both the 5 steps and copy-paste prompts visible.</a:t>
             </a:r>
           </a:p>
         </p:txBody>
@@ -1072,7 +1356,7 @@
           <a:lstStyle/>
           <a:p>
             <a:r>
-              <a:t>Guide attendees through Lab 2. Show how Antigravity automatically respects GEMINI.md and invokes their custom SKILL.md.</a:t>
+              <a:t>Explain progressive disclosure: why 50 skills don't bloat the prompt because only YAML frontmatter is loaded until the agent activates a specific skill.</a:t>
             </a:r>
           </a:p>
         </p:txBody>
@@ -1142,7 +1426,7 @@
           <a:lstStyle/>
           <a:p>
             <a:r>
-              <a:t>This is a critical module for enterprise architects and CISOs. Show how Google Cloud governs Gemini Enterprise licenses &amp; audit logs in Layer 1, while Antigravity enforces sandboxing and deterministic PreToolUse hooks in Layer 2.</a:t>
+              <a:t>Introduce the Retail Lab 2 Objectives and the Rules + Skill files attendees will build.</a:t>
             </a:r>
           </a:p>
         </p:txBody>
@@ -1212,7 +1496,7 @@
           <a:lstStyle/>
           <a:p>
             <a:r>
-              <a:t>Have attendees build the FastMCP tools, wire mcp_config.json and hooks.json, and deliberately test a blocked command to see exit code 2 and the audit log in action.</a:t>
+              <a:t>Keep this slide displayed during Retail Lab 2.</a:t>
             </a:r>
           </a:p>
         </p:txBody>
@@ -4387,7 +4671,7 @@
           <a:lstStyle/>
           <a:p>
             <a:pPr>
-              <a:defRPr sz="2400" b="1">
+              <a:defRPr sz="2250" b="1">
                 <a:solidFill>
                   <a:srgbClr val="F0F6FC"/>
                 </a:solidFill>
@@ -4423,7 +4707,7 @@
           <a:lstStyle/>
           <a:p>
             <a:pPr>
-              <a:defRPr sz="1350">
+              <a:defRPr sz="1300">
                 <a:solidFill>
                   <a:srgbClr val="8B949E"/>
                 </a:solidFill>
@@ -4556,8 +4840,8 @@
         </p:nvSpPr>
         <p:spPr>
           <a:xfrm>
-            <a:off x="6537960" y="1920240"/>
-            <a:ext cx="4919472" cy="3886200"/>
+            <a:off x="6510528" y="1901952"/>
+            <a:ext cx="4974336" cy="3922776"/>
           </a:xfrm>
           <a:prstGeom prst="rect">
             <a:avLst/>
@@ -4572,25 +4856,25 @@
           <a:p>
             <a:pPr>
               <a:spcAft>
-                <a:spcPts val="1000"/>
-              </a:spcAft>
-              <a:defRPr sz="1600" b="1">
-                <a:solidFill>
-                  <a:srgbClr val="20E3B2"/>
-                </a:solidFill>
-                <a:latin typeface="Arial"/>
-              </a:defRPr>
-            </a:pPr>
-            <a:r>
-              <a:t>Workshop Mission &amp; Industry Architecture</a:t>
-            </a:r>
-          </a:p>
-          <a:p>
-            <a:pPr>
-              <a:spcAft>
                 <a:spcPts val="800"/>
               </a:spcAft>
-              <a:defRPr sz="1220">
+              <a:defRPr sz="1500" b="1">
+                <a:solidFill>
+                  <a:srgbClr val="20E3B2"/>
+                </a:solidFill>
+                <a:latin typeface="Arial"/>
+              </a:defRPr>
+            </a:pPr>
+            <a:r>
+              <a:t>Workshop Mission &amp; Industry Architecture</a:t>
+            </a:r>
+          </a:p>
+          <a:p>
+            <a:pPr>
+              <a:spcAft>
+                <a:spcPts val="650"/>
+              </a:spcAft>
+              <a:defRPr sz="1130">
                 <a:solidFill>
                   <a:srgbClr val="F0F6FC"/>
                 </a:solidFill>
@@ -4604,9 +4888,9 @@
           <a:p>
             <a:pPr>
               <a:spcAft>
-                <a:spcPts val="800"/>
+                <a:spcPts val="650"/>
               </a:spcAft>
-              <a:defRPr sz="1220">
+              <a:defRPr sz="1130">
                 <a:solidFill>
                   <a:srgbClr val="F0F6FC"/>
                 </a:solidFill>
@@ -4620,9 +4904,9 @@
           <a:p>
             <a:pPr>
               <a:spcAft>
-                <a:spcPts val="800"/>
+                <a:spcPts val="650"/>
               </a:spcAft>
-              <a:defRPr sz="1220">
+              <a:defRPr sz="1130">
                 <a:solidFill>
                   <a:srgbClr val="F0F6FC"/>
                 </a:solidFill>
@@ -4636,9 +4920,9 @@
           <a:p>
             <a:pPr>
               <a:spcAft>
-                <a:spcPts val="800"/>
+                <a:spcPts val="650"/>
               </a:spcAft>
-              <a:defRPr sz="1220">
+              <a:defRPr sz="1130">
                 <a:solidFill>
                   <a:srgbClr val="F0F6FC"/>
                 </a:solidFill>
@@ -4652,9 +4936,9 @@
           <a:p>
             <a:pPr>
               <a:spcAft>
-                <a:spcPts val="800"/>
+                <a:spcPts val="650"/>
               </a:spcAft>
-              <a:defRPr sz="1220">
+              <a:defRPr sz="1130">
                 <a:solidFill>
                   <a:srgbClr val="F0F6FC"/>
                 </a:solidFill>
@@ -4743,7 +5027,7 @@
               </a:defRPr>
             </a:pPr>
             <a:r>
-              <a:t>Delivered by Tryolabs • 100% Local Laptop Execution + Terraform Cloud Run &amp; Gemini Enterprise Ready    |    Slide 1/11</a:t>
+              <a:t>Delivered by Tryolabs • 100% Local Laptop Execution + Terraform Cloud Run &amp; Gemini Enterprise Ready    |    Slide 1/15</a:t>
             </a:r>
           </a:p>
         </p:txBody>
@@ -4907,7 +5191,7 @@
               </a:defRPr>
             </a:pPr>
             <a:r>
-              <a:t>THEORY MODULE 4 (6 MINUTES) • SUBAGENTS, GOOGLE ADK, A2A &amp; TERRAFORM</a:t>
+              <a:t>THEORY MODULE 3 (6 MINUTES) • MCP, HOOKS &amp; ENTERPRISE GOVERNANCE</a:t>
             </a:r>
           </a:p>
         </p:txBody>
@@ -4935,7 +5219,7 @@
           <a:lstStyle/>
           <a:p>
             <a:pPr>
-              <a:defRPr sz="2400" b="1">
+              <a:defRPr sz="2250" b="1">
                 <a:solidFill>
                   <a:srgbClr val="F0F6FC"/>
                 </a:solidFill>
@@ -4943,7 +5227,7 @@
               </a:defRPr>
             </a:pPr>
             <a:r>
-              <a:t>Multi-Agent Systems with Google ADK, A2A Protocol &amp; Terraform</a:t>
+              <a:t>Live MCP Bridge, Deterministic Hooks &amp; Gemini Enterprise Governance</a:t>
             </a:r>
           </a:p>
         </p:txBody>
@@ -4971,7 +5255,7 @@
           <a:lstStyle/>
           <a:p>
             <a:pPr>
-              <a:defRPr sz="1350">
+              <a:defRPr sz="1300">
                 <a:solidFill>
                   <a:srgbClr val="8B949E"/>
                 </a:solidFill>
@@ -4979,14 +5263,14 @@
               </a:defRPr>
             </a:pPr>
             <a:r>
-              <a:t>Designing multi-agent architectures locally with `adk web` and deploying to Cloud Run &amp; Gemini Enterprise</a:t>
+              <a:t>Connecting live databases safely while proving end-to-end enterprise security in Google Cloud</a:t>
             </a:r>
           </a:p>
         </p:txBody>
       </p:sp>
       <p:pic>
         <p:nvPicPr>
-          <p:cNvPr id="8" name="Picture 7" descr="adk_a2a_cloud_en.png"/>
+          <p:cNvPr id="8" name="Picture 7" descr="governance_en.png"/>
           <p:cNvPicPr>
             <a:picLocks noChangeAspect="1"/>
           </p:cNvPicPr>
@@ -5068,7 +5352,7 @@
             <a:avLst/>
           </a:prstGeom>
           <a:solidFill>
-            <a:srgbClr val="20E3B2"/>
+            <a:srgbClr val="D29922"/>
           </a:solidFill>
           <a:ln>
             <a:noFill/>
@@ -5104,8 +5388,8 @@
         </p:nvSpPr>
         <p:spPr>
           <a:xfrm>
-            <a:off x="6537960" y="1920240"/>
-            <a:ext cx="4919472" cy="3886200"/>
+            <a:off x="6510528" y="1901952"/>
+            <a:ext cx="4974336" cy="3922776"/>
           </a:xfrm>
           <a:prstGeom prst="rect">
             <a:avLst/>
@@ -5120,25 +5404,25 @@
           <a:p>
             <a:pPr>
               <a:spcAft>
-                <a:spcPts val="1000"/>
-              </a:spcAft>
-              <a:defRPr sz="1600" b="1">
-                <a:solidFill>
-                  <a:srgbClr val="20E3B2"/>
-                </a:solidFill>
-                <a:latin typeface="Arial"/>
-              </a:defRPr>
-            </a:pPr>
-            <a:r>
-              <a:t>End-to-End Multi-Agent Architecture</a:t>
-            </a:r>
-          </a:p>
-          <a:p>
-            <a:pPr>
-              <a:spcAft>
                 <a:spcPts val="800"/>
               </a:spcAft>
-              <a:defRPr sz="1220">
+              <a:defRPr sz="1500" b="1">
+                <a:solidFill>
+                  <a:srgbClr val="D29922"/>
+                </a:solidFill>
+                <a:latin typeface="Arial"/>
+              </a:defRPr>
+            </a:pPr>
+            <a:r>
+              <a:t>2-Layer Enterprise Security &amp; Governance</a:t>
+            </a:r>
+          </a:p>
+          <a:p>
+            <a:pPr>
+              <a:spcAft>
+                <a:spcPts val="650"/>
+              </a:spcAft>
+              <a:defRPr sz="1130">
                 <a:solidFill>
                   <a:srgbClr val="F0F6FC"/>
                 </a:solidFill>
@@ -5146,15 +5430,15 @@
               </a:defRPr>
             </a:pPr>
             <a:r>
-              <a:t>▸  Antigravity Subagents (/teamwork, /boost, /grill-me): Delegate parallel coding &amp; research tasks inside Antigravity to build your application faster</a:t>
+              <a:t>▸  Layer 1 — Google Cloud &amp; Gemini Enterprise (Instructor Live Demo): Cloud IAM (roles/cloudaicompanion.user), Cloud Audit Logs (cloudaicompanion.googleapis.com), VPC-SC perimeters, Zero Data Retention / No Training on customer code</a:t>
             </a:r>
           </a:p>
           <a:p>
             <a:pPr>
               <a:spcAft>
-                <a:spcPts val="800"/>
+                <a:spcPts val="650"/>
               </a:spcAft>
-              <a:defRPr sz="1220">
+              <a:defRPr sz="1130">
                 <a:solidFill>
                   <a:srgbClr val="F0F6FC"/>
                 </a:solidFill>
@@ -5162,15 +5446,15 @@
               </a:defRPr>
             </a:pPr>
             <a:r>
-              <a:t>▸  Google ADK (Agent Development Kit): Build domain multi-agent hierarchies (`root_agent` orchestrating Technical &amp; Commercial specialist `LlmAgent`s with typed Python tools)</a:t>
+              <a:t>▸  Layer 2 — Antigravity Client Security: Tool Execution Policy (strict / request-review / proceed-in-sandbox), OS Terminal Sandbox, Non-Workspace File Access (deny), Command &amp; Browser Allow/Denylists</a:t>
             </a:r>
           </a:p>
           <a:p>
             <a:pPr>
               <a:spcAft>
-                <a:spcPts val="800"/>
+                <a:spcPts val="650"/>
               </a:spcAft>
-              <a:defRPr sz="1220">
+              <a:defRPr sz="1130">
                 <a:solidFill>
                   <a:srgbClr val="F0F6FC"/>
                 </a:solidFill>
@@ -5178,15 +5462,15 @@
               </a:defRPr>
             </a:pPr>
             <a:r>
-              <a:t>▸  Local Testing via ADK Dev UI (`adk web`): Launch `./scripts/run_adk_web.sh` (http://localhost:8080) to interactively inspect multi-agent event traces, tool calls, and session state!</a:t>
+              <a:t>▸  Live Context via FastMCP (.agents/mcp_config.json): Exposes strongly-typed Python tools querying live SQLite &amp; telemetry over stdio/SSE</a:t>
             </a:r>
           </a:p>
           <a:p>
             <a:pPr>
               <a:spcAft>
-                <a:spcPts val="800"/>
+                <a:spcPts val="650"/>
               </a:spcAft>
-              <a:defRPr sz="1220">
+              <a:defRPr sz="1130">
                 <a:solidFill>
                   <a:srgbClr val="F0F6FC"/>
                 </a:solidFill>
@@ -5194,23 +5478,7 @@
               </a:defRPr>
             </a:pPr>
             <a:r>
-              <a:t>▸  A2A (Agent2Agent) Protocol: Publish `GET /.well-known/agent.json` (Agent Card) and `POST /api/v1/a2a` (JSON-RPC 2.0 `tasks/send`) for cross-agent interoperability</a:t>
-            </a:r>
-          </a:p>
-          <a:p>
-            <a:pPr>
-              <a:spcAft>
-                <a:spcPts val="800"/>
-              </a:spcAft>
-              <a:defRPr sz="1220">
-                <a:solidFill>
-                  <a:srgbClr val="F0F6FC"/>
-                </a:solidFill>
-                <a:latin typeface="Arial"/>
-              </a:defRPr>
-            </a:pPr>
-            <a:r>
-              <a:t>▸  Terraform + Gemini Enterprise: Provision Cloud Run v2 &amp; IAM via `infra/terraform/` (`deploy_gcp.sh`) and register your A2A agent into Gemini Enterprise (`register_gemini_enterprise_agent.sh`)</a:t>
+              <a:t>▸  Deterministic Lifecycle Hooks (.agents/hooks.json): PreToolUse script inspects tool JSON on stdin; exit code 2 hard-blocks policy violations and writes an immutable audit log!</a:t>
             </a:r>
           </a:p>
         </p:txBody>
@@ -5291,7 +5559,7 @@
               </a:defRPr>
             </a:pPr>
             <a:r>
-              <a:t>Develop &amp; test 100% locally with `adk web` + `pytest`, then deploy to Google Cloud &amp; Gemini Enterprise with Terraform!    |    Slide 10/11</a:t>
+              <a:t>Instructor Demo: Show Cloud Audit Logs in GCP Console + trigger a deterministic PreToolUse Hook block locally!    |    Slide 10/15</a:t>
             </a:r>
           </a:p>
         </p:txBody>
@@ -5455,7 +5723,7 @@
               </a:defRPr>
             </a:pPr>
             <a:r>
-              <a:t>HANDS-ON LAB 4 CAPSTONE (55 MINUTES) • ADK, A2A &amp; CLOUD DEPLOYMENT</a:t>
+              <a:t>HANDS-ON LAB 3 (PART 1/2) • OBJECTIVES &amp; WHAT YOU WILL BUILD</a:t>
             </a:r>
           </a:p>
         </p:txBody>
@@ -5483,7 +5751,7 @@
           <a:lstStyle/>
           <a:p>
             <a:pPr>
-              <a:defRPr sz="2400" b="1">
+              <a:defRPr sz="2250" b="1">
                 <a:solidFill>
                   <a:srgbClr val="F0F6FC"/>
                 </a:solidFill>
@@ -5491,7 +5759,7 @@
               </a:defRPr>
             </a:pPr>
             <a:r>
-              <a:t>Lab 4 Capstone: Ship the Multi-Agent ADK + A2A System</a:t>
+              <a:t>Lab 3: Retail FastMCP Server &amp; Margin Hooks — Objectives &amp; Build Spec</a:t>
             </a:r>
           </a:p>
         </p:txBody>
@@ -5519,7 +5787,7 @@
           <a:lstStyle/>
           <a:p>
             <a:pPr>
-              <a:defRPr sz="1350">
+              <a:defRPr sz="1300">
                 <a:solidFill>
                   <a:srgbClr val="8B949E"/>
                 </a:solidFill>
@@ -5527,14 +5795,14 @@
               </a:defRPr>
             </a:pPr>
             <a:r>
-              <a:t>Use Antigravity (/grill-me, /boost, Subagents) to build, test in `adk web`, and validate Terraform deployment</a:t>
+              <a:t>55 Minutes • Printable PDF Guide: labs/lab-03-mcp-and-hooks/LAB_03_INSTRUCTIONS_EN.pdf</a:t>
             </a:r>
           </a:p>
         </p:txBody>
       </p:sp>
       <p:pic>
         <p:nvPicPr>
-          <p:cNvPr id="8" name="Picture 7" descr="adk_a2a_cloud_en.png"/>
+          <p:cNvPr id="8" name="Picture 7" descr="governance_en.png"/>
           <p:cNvPicPr>
             <a:picLocks noChangeAspect="1"/>
           </p:cNvPicPr>
@@ -5616,7 +5884,7 @@
             <a:avLst/>
           </a:prstGeom>
           <a:solidFill>
-            <a:srgbClr val="20E3B2"/>
+            <a:srgbClr val="BC8CFF"/>
           </a:solidFill>
           <a:ln>
             <a:noFill/>
@@ -5652,8 +5920,8 @@
         </p:nvSpPr>
         <p:spPr>
           <a:xfrm>
-            <a:off x="6537960" y="1920240"/>
-            <a:ext cx="4919472" cy="3886200"/>
+            <a:off x="6510528" y="1901952"/>
+            <a:ext cx="4974336" cy="3922776"/>
           </a:xfrm>
           <a:prstGeom prst="rect">
             <a:avLst/>
@@ -5668,25 +5936,25 @@
           <a:p>
             <a:pPr>
               <a:spcAft>
-                <a:spcPts val="1000"/>
-              </a:spcAft>
-              <a:defRPr sz="1600" b="1">
-                <a:solidFill>
-                  <a:srgbClr val="20E3B2"/>
-                </a:solidFill>
-                <a:latin typeface="Arial"/>
-              </a:defRPr>
-            </a:pPr>
-            <a:r>
-              <a:t>Lab 4 Walkthrough &amp; Optimized Prompts</a:t>
-            </a:r>
-          </a:p>
-          <a:p>
-            <a:pPr>
-              <a:spcAft>
                 <a:spcPts val="800"/>
               </a:spcAft>
-              <a:defRPr sz="1220">
+              <a:defRPr sz="1500" b="1">
+                <a:solidFill>
+                  <a:srgbClr val="BC8CFF"/>
+                </a:solidFill>
+                <a:latin typeface="Arial"/>
+              </a:defRPr>
+            </a:pPr>
+            <a:r>
+              <a:t>Lab 3 Objectives &amp; What You Will Build</a:t>
+            </a:r>
+          </a:p>
+          <a:p>
+            <a:pPr>
+              <a:spcAft>
+                <a:spcPts val="650"/>
+              </a:spcAft>
+              <a:defRPr sz="1130">
                 <a:solidFill>
                   <a:srgbClr val="F0F6FC"/>
                 </a:solidFill>
@@ -5694,15 +5962,15 @@
               </a:defRPr>
             </a:pPr>
             <a:r>
-              <a:t>▸  Setup: Run ./labs/lab-04-multi-agent-capstone/install.sh</a:t>
+              <a:t>▸  Objective 1 (Live Omnichannel Grounding via MCP): Connect Antigravity to live SQLite WMS inventory, VIP orders, and vendor OTIF tables via a local `FastMCP` server.</a:t>
             </a:r>
           </a:p>
           <a:p>
             <a:pPr>
               <a:spcAft>
-                <a:spcPts val="800"/>
+                <a:spcPts val="650"/>
               </a:spcAft>
-              <a:defRPr sz="1220">
+              <a:defRPr sz="1130">
                 <a:solidFill>
                   <a:srgbClr val="F0F6FC"/>
                 </a:solidFill>
@@ -5710,15 +5978,15 @@
               </a:defRPr>
             </a:pPr>
             <a:r>
-              <a:t>▸  Task 1 (Google ADK Hierarchy): Implement @src/agents/adk_a2a_orchestrator.py &amp; @adk_agents/retail_pulse/agent.py (WMSInventoryATPAgent + MerchandisingMarginOTIFAgent -&gt; RetailPulseOrchestratorAgent)</a:t>
+              <a:t>▸  Objective 2 (Deterministic Margin Compliance Guardrails): Intercept every file-edit and shell tool call with a `PreToolUse` hook that hard-blocks disabling the `15%` margin floor (`exit code 2`).</a:t>
             </a:r>
           </a:p>
           <a:p>
             <a:pPr>
               <a:spcAft>
-                <a:spcPts val="800"/>
+                <a:spcPts val="650"/>
               </a:spcAft>
-              <a:defRPr sz="1220">
+              <a:defRPr sz="1130">
                 <a:solidFill>
                   <a:srgbClr val="F0F6FC"/>
                 </a:solidFill>
@@ -5726,15 +5994,15 @@
               </a:defRPr>
             </a:pPr>
             <a:r>
-              <a:t>▸  Task 2 (A2A Protocol): Expose GET /.well-known/agent.json &amp; POST /api/v1/a2a (JSON-RPC 2.0 tasks/send) + omnichannel split-fulfillment &amp; OTIF chargeback routes</a:t>
+              <a:t>▸  What You Will Build #1 (`mcp_server/retail_mcp.py` &amp; `.agents/mcp_config.json`): 4 `@mcp.tool()` functions (`query_true_atp_inventory`, `audit_vendor_otif_contracts`, `simulate_promo_margin_guard`, `list_at_risk_vip_orders`).</a:t>
             </a:r>
           </a:p>
           <a:p>
             <a:pPr>
               <a:spcAft>
-                <a:spcPts val="800"/>
+                <a:spcPts val="650"/>
               </a:spcAft>
-              <a:defRPr sz="1220">
+              <a:defRPr sz="1130">
                 <a:solidFill>
                   <a:srgbClr val="F0F6FC"/>
                 </a:solidFill>
@@ -5742,15 +6010,15 @@
               </a:defRPr>
             </a:pPr>
             <a:r>
-              <a:t>▸  Task 3 (Local ADK Dev UI): Run ./scripts/run_adk_web.sh to test interactively in `adk web` (http://localhost:8080) &amp; run ./labs/lab-04-multi-agent-capstone/verify.sh</a:t>
+              <a:t>▸  What You Will Build #2 (`.agents/hooks.json` &amp; `scripts/margin_guard_hook.py`): Deterministic `PreToolUse` guardrail blocking `enforce_floor=False`, margin `&lt; 0.15`, or `DROP`/`DELETE` SQL and logging to `data/logs/hook_compliance_audit.jsonl`.</a:t>
             </a:r>
           </a:p>
           <a:p>
             <a:pPr>
               <a:spcAft>
-                <a:spcPts val="800"/>
+                <a:spcPts val="650"/>
               </a:spcAft>
-              <a:defRPr sz="1220">
+              <a:defRPr sz="1130">
                 <a:solidFill>
                   <a:srgbClr val="F0F6FC"/>
                 </a:solidFill>
@@ -5758,7 +6026,7 @@
               </a:defRPr>
             </a:pPr>
             <a:r>
-              <a:t>▸  Task 4 (Terraform &amp; Gemini Enterprise): Validate with ./deploy/deploy_gcp.sh --dry-run, deploy to Cloud Run via Terraform, and connect via ./deploy/register_gemini_enterprise_agent.sh!</a:t>
+              <a:t>▸  Deliverable &amp; Verification: Pass all 5 MCP &amp; Hook tests in `./labs/lab-03-mcp-and-hooks/verify.sh`.</a:t>
             </a:r>
           </a:p>
         </p:txBody>
@@ -5839,7 +6107,2533 @@
               </a:defRPr>
             </a:pPr>
             <a:r>
-              <a:t>Congratulations! Run ./labs/lab-04-multi-agent-capstone/verify.sh to see your full test suite pass 100%!    |    Slide 11/11</a:t>
+              <a:t>Delivered by Tryolabs • Full printable guide: LAB_03_INSTRUCTIONS_EN.pdf    |    Slide 11/15</a:t>
+            </a:r>
+          </a:p>
+        </p:txBody>
+      </p:sp>
+    </p:spTree>
+  </p:cSld>
+  <p:clrMapOvr>
+    <a:masterClrMapping/>
+  </p:clrMapOvr>
+</p:sld>
+</file>
+
+<file path=ppt/slides/slide12.xml><?xml version="1.0" encoding="utf-8"?>
+<p:sld xmlns:a="http://schemas.openxmlformats.org/drawingml/2006/main" xmlns:p="http://schemas.openxmlformats.org/presentationml/2006/main" xmlns:r="http://schemas.openxmlformats.org/officeDocument/2006/relationships">
+  <p:cSld>
+    <p:spTree>
+      <p:nvGrpSpPr>
+        <p:cNvPr id="1" name=""/>
+        <p:cNvGrpSpPr/>
+        <p:nvPr/>
+      </p:nvGrpSpPr>
+      <p:grpSpPr/>
+      <p:sp>
+        <p:nvSpPr>
+          <p:cNvPr id="2" name="Rectangle 1"/>
+          <p:cNvSpPr/>
+          <p:nvPr/>
+        </p:nvSpPr>
+        <p:spPr>
+          <a:xfrm>
+            <a:off x="0" y="0"/>
+            <a:ext cx="12191695" cy="6858000"/>
+          </a:xfrm>
+          <a:prstGeom prst="rect">
+            <a:avLst/>
+          </a:prstGeom>
+          <a:solidFill>
+            <a:srgbClr val="0D1117"/>
+          </a:solidFill>
+          <a:ln>
+            <a:noFill/>
+          </a:ln>
+        </p:spPr>
+        <p:style>
+          <a:lnRef idx="1">
+            <a:schemeClr val="accent1"/>
+          </a:lnRef>
+          <a:fillRef idx="3">
+            <a:schemeClr val="accent1"/>
+          </a:fillRef>
+          <a:effectRef idx="2">
+            <a:schemeClr val="accent1"/>
+          </a:effectRef>
+          <a:fontRef idx="minor">
+            <a:schemeClr val="lt1"/>
+          </a:fontRef>
+        </p:style>
+        <p:txBody>
+          <a:bodyPr rtlCol="0" anchor="ctr"/>
+          <a:lstStyle/>
+          <a:p>
+            <a:pPr algn="ctr"/>
+          </a:p>
+        </p:txBody>
+      </p:sp>
+      <p:sp>
+        <p:nvSpPr>
+          <p:cNvPr id="3" name="Rectangle 2"/>
+          <p:cNvSpPr/>
+          <p:nvPr/>
+        </p:nvSpPr>
+        <p:spPr>
+          <a:xfrm>
+            <a:off x="0" y="0"/>
+            <a:ext cx="12191695" cy="73152"/>
+          </a:xfrm>
+          <a:prstGeom prst="rect">
+            <a:avLst/>
+          </a:prstGeom>
+          <a:solidFill>
+            <a:srgbClr val="20E3B2"/>
+          </a:solidFill>
+          <a:ln>
+            <a:noFill/>
+          </a:ln>
+        </p:spPr>
+        <p:style>
+          <a:lnRef idx="1">
+            <a:schemeClr val="accent1"/>
+          </a:lnRef>
+          <a:fillRef idx="3">
+            <a:schemeClr val="accent1"/>
+          </a:fillRef>
+          <a:effectRef idx="2">
+            <a:schemeClr val="accent1"/>
+          </a:effectRef>
+          <a:fontRef idx="minor">
+            <a:schemeClr val="lt1"/>
+          </a:fontRef>
+        </p:style>
+        <p:txBody>
+          <a:bodyPr rtlCol="0" anchor="ctr"/>
+          <a:lstStyle/>
+          <a:p>
+            <a:pPr algn="ctr"/>
+          </a:p>
+        </p:txBody>
+      </p:sp>
+      <p:pic>
+        <p:nvPicPr>
+          <p:cNvPr id="4" name="Picture 3" descr="tryolabs-logo-dark-bg.png"/>
+          <p:cNvPicPr>
+            <a:picLocks noChangeAspect="1"/>
+          </p:cNvPicPr>
+          <p:nvPr/>
+        </p:nvPicPr>
+        <p:blipFill>
+          <a:blip r:embed="rId2"/>
+          <a:stretch>
+            <a:fillRect/>
+          </a:stretch>
+        </p:blipFill>
+        <p:spPr>
+          <a:xfrm>
+            <a:off x="9829800" y="256032"/>
+            <a:ext cx="1874519" cy="417876"/>
+          </a:xfrm>
+          <a:prstGeom prst="rect">
+            <a:avLst/>
+          </a:prstGeom>
+        </p:spPr>
+      </p:pic>
+      <p:sp>
+        <p:nvSpPr>
+          <p:cNvPr id="5" name="TextBox 4"/>
+          <p:cNvSpPr txBox="1"/>
+          <p:nvPr/>
+        </p:nvSpPr>
+        <p:spPr>
+          <a:xfrm>
+            <a:off x="502920" y="256032"/>
+            <a:ext cx="9144000" cy="320040"/>
+          </a:xfrm>
+          <a:prstGeom prst="rect">
+            <a:avLst/>
+          </a:prstGeom>
+          <a:noFill/>
+        </p:spPr>
+        <p:txBody>
+          <a:bodyPr wrap="square">
+            <a:spAutoFit/>
+          </a:bodyPr>
+          <a:lstStyle/>
+          <a:p>
+            <a:pPr>
+              <a:defRPr sz="1050" b="1">
+                <a:solidFill>
+                  <a:srgbClr val="20E3B2"/>
+                </a:solidFill>
+                <a:latin typeface="Arial"/>
+              </a:defRPr>
+            </a:pPr>
+            <a:r>
+              <a:t>HANDS-ON LAB 3 (PART 2/2) • STEP-BY-STEP INSTRUCTIONS &amp; PROMPTS</a:t>
+            </a:r>
+          </a:p>
+        </p:txBody>
+      </p:sp>
+      <p:sp>
+        <p:nvSpPr>
+          <p:cNvPr id="6" name="TextBox 5"/>
+          <p:cNvSpPr txBox="1"/>
+          <p:nvPr/>
+        </p:nvSpPr>
+        <p:spPr>
+          <a:xfrm>
+            <a:off x="502920" y="566928"/>
+            <a:ext cx="9235440" cy="594360"/>
+          </a:xfrm>
+          <a:prstGeom prst="rect">
+            <a:avLst/>
+          </a:prstGeom>
+          <a:noFill/>
+        </p:spPr>
+        <p:txBody>
+          <a:bodyPr wrap="square">
+            <a:spAutoFit/>
+          </a:bodyPr>
+          <a:lstStyle/>
+          <a:p>
+            <a:pPr>
+              <a:defRPr sz="2250" b="1">
+                <a:solidFill>
+                  <a:srgbClr val="F0F6FC"/>
+                </a:solidFill>
+                <a:latin typeface="Arial"/>
+              </a:defRPr>
+            </a:pPr>
+            <a:r>
+              <a:t>Lab 3 Instructions &amp; Copy-Paste Antigravity Prompts</a:t>
+            </a:r>
+          </a:p>
+        </p:txBody>
+      </p:sp>
+      <p:sp>
+        <p:nvSpPr>
+          <p:cNvPr id="7" name="TextBox 6"/>
+          <p:cNvSpPr txBox="1"/>
+          <p:nvPr/>
+        </p:nvSpPr>
+        <p:spPr>
+          <a:xfrm>
+            <a:off x="502920" y="1207008"/>
+            <a:ext cx="11155680" cy="411480"/>
+          </a:xfrm>
+          <a:prstGeom prst="rect">
+            <a:avLst/>
+          </a:prstGeom>
+          <a:noFill/>
+        </p:spPr>
+        <p:txBody>
+          <a:bodyPr wrap="square">
+            <a:spAutoFit/>
+          </a:bodyPr>
+          <a:lstStyle/>
+          <a:p>
+            <a:pPr>
+              <a:defRPr sz="1300">
+                <a:solidFill>
+                  <a:srgbClr val="8B949E"/>
+                </a:solidFill>
+                <a:latin typeface="Arial"/>
+              </a:defRPr>
+            </a:pPr>
+            <a:r>
+              <a:t>Follow Steps 1–5 on the left and copy-paste prompts from labs/lab-03-mcp-and-hooks/PROMPTS.md</a:t>
+            </a:r>
+          </a:p>
+        </p:txBody>
+      </p:sp>
+      <p:sp>
+        <p:nvSpPr>
+          <p:cNvPr id="8" name="Rounded Rectangle 7"/>
+          <p:cNvSpPr/>
+          <p:nvPr/>
+        </p:nvSpPr>
+        <p:spPr>
+          <a:xfrm>
+            <a:off x="502920" y="1755648"/>
+            <a:ext cx="5504688" cy="4160520"/>
+          </a:xfrm>
+          <a:prstGeom prst="roundRect">
+            <a:avLst/>
+          </a:prstGeom>
+          <a:solidFill>
+            <a:srgbClr val="161B22"/>
+          </a:solidFill>
+          <a:ln w="19050">
+            <a:solidFill>
+              <a:srgbClr val="30363D"/>
+            </a:solidFill>
+          </a:ln>
+        </p:spPr>
+        <p:style>
+          <a:lnRef idx="1">
+            <a:schemeClr val="accent1"/>
+          </a:lnRef>
+          <a:fillRef idx="3">
+            <a:schemeClr val="accent1"/>
+          </a:fillRef>
+          <a:effectRef idx="2">
+            <a:schemeClr val="accent1"/>
+          </a:effectRef>
+          <a:fontRef idx="minor">
+            <a:schemeClr val="lt1"/>
+          </a:fontRef>
+        </p:style>
+        <p:txBody>
+          <a:bodyPr rtlCol="0" anchor="ctr"/>
+          <a:lstStyle/>
+          <a:p>
+            <a:pPr algn="ctr"/>
+          </a:p>
+        </p:txBody>
+      </p:sp>
+      <p:sp>
+        <p:nvSpPr>
+          <p:cNvPr id="9" name="Rectangle 8"/>
+          <p:cNvSpPr/>
+          <p:nvPr/>
+        </p:nvSpPr>
+        <p:spPr>
+          <a:xfrm>
+            <a:off x="502920" y="1755648"/>
+            <a:ext cx="5504688" cy="64008"/>
+          </a:xfrm>
+          <a:prstGeom prst="rect">
+            <a:avLst/>
+          </a:prstGeom>
+          <a:solidFill>
+            <a:srgbClr val="BC8CFF"/>
+          </a:solidFill>
+          <a:ln>
+            <a:noFill/>
+          </a:ln>
+        </p:spPr>
+        <p:style>
+          <a:lnRef idx="1">
+            <a:schemeClr val="accent1"/>
+          </a:lnRef>
+          <a:fillRef idx="3">
+            <a:schemeClr val="accent1"/>
+          </a:fillRef>
+          <a:effectRef idx="2">
+            <a:schemeClr val="accent1"/>
+          </a:effectRef>
+          <a:fontRef idx="minor">
+            <a:schemeClr val="lt1"/>
+          </a:fontRef>
+        </p:style>
+        <p:txBody>
+          <a:bodyPr rtlCol="0" anchor="ctr"/>
+          <a:lstStyle/>
+          <a:p>
+            <a:pPr algn="ctr"/>
+          </a:p>
+        </p:txBody>
+      </p:sp>
+      <p:sp>
+        <p:nvSpPr>
+          <p:cNvPr id="10" name="TextBox 9"/>
+          <p:cNvSpPr txBox="1"/>
+          <p:nvPr/>
+        </p:nvSpPr>
+        <p:spPr>
+          <a:xfrm>
+            <a:off x="704088" y="1901952"/>
+            <a:ext cx="5102352" cy="3922776"/>
+          </a:xfrm>
+          <a:prstGeom prst="rect">
+            <a:avLst/>
+          </a:prstGeom>
+          <a:noFill/>
+        </p:spPr>
+        <p:txBody>
+          <a:bodyPr wrap="square">
+            <a:spAutoFit/>
+          </a:bodyPr>
+          <a:lstStyle/>
+          <a:p>
+            <a:pPr>
+              <a:spcAft>
+                <a:spcPts val="800"/>
+              </a:spcAft>
+              <a:defRPr sz="1500" b="1">
+                <a:solidFill>
+                  <a:srgbClr val="BC8CFF"/>
+                </a:solidFill>
+                <a:latin typeface="Arial"/>
+              </a:defRPr>
+            </a:pPr>
+            <a:r>
+              <a:t>Step-by-Step Lab 3 Instructions</a:t>
+            </a:r>
+          </a:p>
+          <a:p>
+            <a:pPr>
+              <a:spcAft>
+                <a:spcPts val="650"/>
+              </a:spcAft>
+              <a:defRPr sz="1130">
+                <a:solidFill>
+                  <a:srgbClr val="F0F6FC"/>
+                </a:solidFill>
+                <a:latin typeface="Arial"/>
+              </a:defRPr>
+            </a:pPr>
+            <a:r>
+              <a:t>▸  Step 1 (Initialize Lab 03): Run `./labs/lab-03-mcp-and-hooks/install.sh` (auto-applies Labs 01–02).</a:t>
+            </a:r>
+          </a:p>
+          <a:p>
+            <a:pPr>
+              <a:spcAft>
+                <a:spcPts val="650"/>
+              </a:spcAft>
+              <a:defRPr sz="1130">
+                <a:solidFill>
+                  <a:srgbClr val="F0F6FC"/>
+                </a:solidFill>
+                <a:latin typeface="Arial"/>
+              </a:defRPr>
+            </a:pPr>
+            <a:r>
+              <a:t>▸  Step 2 (Complete `mcp_server/retail_mcp.py`): Implement `simulate_promo_margin_guard(promo_code, category, loyalty_tier)` and `list_at_risk_vip_orders(loyalty_tier, limit)`.</a:t>
+            </a:r>
+          </a:p>
+          <a:p>
+            <a:pPr>
+              <a:spcAft>
+                <a:spcPts val="650"/>
+              </a:spcAft>
+              <a:defRPr sz="1130">
+                <a:solidFill>
+                  <a:srgbClr val="F0F6FC"/>
+                </a:solidFill>
+                <a:latin typeface="Arial"/>
+              </a:defRPr>
+            </a:pPr>
+            <a:r>
+              <a:t>▸  Step 3 (Register `.agents/mcp_config.json`): Register `retail-pulse-mcp` invoking `.venv/bin/python -m mcp_server.retail_mcp`.</a:t>
+            </a:r>
+          </a:p>
+          <a:p>
+            <a:pPr>
+              <a:spcAft>
+                <a:spcPts val="650"/>
+              </a:spcAft>
+              <a:defRPr sz="1130">
+                <a:solidFill>
+                  <a:srgbClr val="F0F6FC"/>
+                </a:solidFill>
+                <a:latin typeface="Arial"/>
+              </a:defRPr>
+            </a:pPr>
+            <a:r>
+              <a:t>▸  Step 4 (Configure `.agents/hooks.json`): Wire `PreToolUse` to `scripts/margin_guard_hook.py` (blocks `enforce_floor=False` or margin `&lt; 0.15` with exit code `2`).</a:t>
+            </a:r>
+          </a:p>
+          <a:p>
+            <a:pPr>
+              <a:spcAft>
+                <a:spcPts val="650"/>
+              </a:spcAft>
+              <a:defRPr sz="1130">
+                <a:solidFill>
+                  <a:srgbClr val="F0F6FC"/>
+                </a:solidFill>
+                <a:latin typeface="Arial"/>
+              </a:defRPr>
+            </a:pPr>
+            <a:r>
+              <a:t>▸  Step 5 (Verify): Run `./labs/lab-03-mcp-and-hooks/verify.sh` (`5 passed` + compliance audit log verified).</a:t>
+            </a:r>
+          </a:p>
+        </p:txBody>
+      </p:sp>
+      <p:sp>
+        <p:nvSpPr>
+          <p:cNvPr id="11" name="Rounded Rectangle 10"/>
+          <p:cNvSpPr/>
+          <p:nvPr/>
+        </p:nvSpPr>
+        <p:spPr>
+          <a:xfrm>
+            <a:off x="6199632" y="1755648"/>
+            <a:ext cx="5486400" cy="4160520"/>
+          </a:xfrm>
+          <a:prstGeom prst="roundRect">
+            <a:avLst/>
+          </a:prstGeom>
+          <a:solidFill>
+            <a:srgbClr val="161B22"/>
+          </a:solidFill>
+          <a:ln w="19050">
+            <a:solidFill>
+              <a:srgbClr val="30363D"/>
+            </a:solidFill>
+          </a:ln>
+        </p:spPr>
+        <p:style>
+          <a:lnRef idx="1">
+            <a:schemeClr val="accent1"/>
+          </a:lnRef>
+          <a:fillRef idx="3">
+            <a:schemeClr val="accent1"/>
+          </a:fillRef>
+          <a:effectRef idx="2">
+            <a:schemeClr val="accent1"/>
+          </a:effectRef>
+          <a:fontRef idx="minor">
+            <a:schemeClr val="lt1"/>
+          </a:fontRef>
+        </p:style>
+        <p:txBody>
+          <a:bodyPr rtlCol="0" anchor="ctr"/>
+          <a:lstStyle/>
+          <a:p>
+            <a:pPr algn="ctr"/>
+          </a:p>
+        </p:txBody>
+      </p:sp>
+      <p:sp>
+        <p:nvSpPr>
+          <p:cNvPr id="12" name="Rectangle 11"/>
+          <p:cNvSpPr/>
+          <p:nvPr/>
+        </p:nvSpPr>
+        <p:spPr>
+          <a:xfrm>
+            <a:off x="6199632" y="1755648"/>
+            <a:ext cx="5486400" cy="64008"/>
+          </a:xfrm>
+          <a:prstGeom prst="rect">
+            <a:avLst/>
+          </a:prstGeom>
+          <a:solidFill>
+            <a:srgbClr val="D29922"/>
+          </a:solidFill>
+          <a:ln>
+            <a:noFill/>
+          </a:ln>
+        </p:spPr>
+        <p:style>
+          <a:lnRef idx="1">
+            <a:schemeClr val="accent1"/>
+          </a:lnRef>
+          <a:fillRef idx="3">
+            <a:schemeClr val="accent1"/>
+          </a:fillRef>
+          <a:effectRef idx="2">
+            <a:schemeClr val="accent1"/>
+          </a:effectRef>
+          <a:fontRef idx="minor">
+            <a:schemeClr val="lt1"/>
+          </a:fontRef>
+        </p:style>
+        <p:txBody>
+          <a:bodyPr rtlCol="0" anchor="ctr"/>
+          <a:lstStyle/>
+          <a:p>
+            <a:pPr algn="ctr"/>
+          </a:p>
+        </p:txBody>
+      </p:sp>
+      <p:sp>
+        <p:nvSpPr>
+          <p:cNvPr id="13" name="TextBox 12"/>
+          <p:cNvSpPr txBox="1"/>
+          <p:nvPr/>
+        </p:nvSpPr>
+        <p:spPr>
+          <a:xfrm>
+            <a:off x="6400800" y="1901952"/>
+            <a:ext cx="5084064" cy="3922776"/>
+          </a:xfrm>
+          <a:prstGeom prst="rect">
+            <a:avLst/>
+          </a:prstGeom>
+          <a:noFill/>
+        </p:spPr>
+        <p:txBody>
+          <a:bodyPr wrap="square">
+            <a:spAutoFit/>
+          </a:bodyPr>
+          <a:lstStyle/>
+          <a:p>
+            <a:pPr>
+              <a:spcAft>
+                <a:spcPts val="800"/>
+              </a:spcAft>
+              <a:defRPr sz="1500" b="1">
+                <a:solidFill>
+                  <a:srgbClr val="D29922"/>
+                </a:solidFill>
+                <a:latin typeface="Arial"/>
+              </a:defRPr>
+            </a:pPr>
+            <a:r>
+              <a:t>Copy-Paste Prompts (PROMPTS.md) &amp; Verification</a:t>
+            </a:r>
+          </a:p>
+          <a:p>
+            <a:pPr>
+              <a:spcAft>
+                <a:spcPts val="650"/>
+              </a:spcAft>
+              <a:defRPr sz="1130">
+                <a:solidFill>
+                  <a:srgbClr val="F0F6FC"/>
+                </a:solidFill>
+                <a:latin typeface="Arial"/>
+              </a:defRPr>
+            </a:pPr>
+            <a:r>
+              <a:t>▸  Prompt 1 — Complete FastMCP Server: '/plan Implement simulate_promo_margin_guard and list_at_risk_vip_orders in @mcp_server/retail_mcp.py so all tool schemas match @tests/test_lab03_mcp_hooks.py.'</a:t>
+            </a:r>
+          </a:p>
+          <a:p>
+            <a:pPr>
+              <a:spcAft>
+                <a:spcPts val="650"/>
+              </a:spcAft>
+              <a:defRPr sz="1130">
+                <a:solidFill>
+                  <a:srgbClr val="F0F6FC"/>
+                </a:solidFill>
+                <a:latin typeface="Arial"/>
+              </a:defRPr>
+            </a:pPr>
+            <a:r>
+              <a:t>▸  Prompt 2 — Wire MCP &amp; Hooks Config: 'Create @.agents/mcp_config.json for retail-pulse-mcp and @.agents/hooks.json wiring PreToolUse to ./scripts/margin_guard_hook.py.'</a:t>
+            </a:r>
+          </a:p>
+          <a:p>
+            <a:pPr>
+              <a:spcAft>
+                <a:spcPts val="650"/>
+              </a:spcAft>
+              <a:defRPr sz="1130">
+                <a:solidFill>
+                  <a:srgbClr val="F0F6FC"/>
+                </a:solidFill>
+                <a:latin typeface="Arial"/>
+              </a:defRPr>
+            </a:pPr>
+            <a:r>
+              <a:t>▸  Prompt 3 — Test Hook Block (Exit Code 2): Run `echo '{"tool_name":"edit_file","tool_input":{"Path":"src/services/promo_pricing.py","Replacement":"enforce_floor=False"}}' | .venv/bin/python scripts/margin_guard_hook.py`</a:t>
+            </a:r>
+          </a:p>
+          <a:p>
+            <a:pPr>
+              <a:spcAft>
+                <a:spcPts val="650"/>
+              </a:spcAft>
+              <a:defRPr sz="1130">
+                <a:solidFill>
+                  <a:srgbClr val="F0F6FC"/>
+                </a:solidFill>
+                <a:latin typeface="Arial"/>
+              </a:defRPr>
+            </a:pPr>
+            <a:r>
+              <a:t>▸  Verify Command: Run `./labs/lab-03-mcp-and-hooks/verify.sh` and inspect `data/logs/hook_compliance_audit.jsonl`.</a:t>
+            </a:r>
+          </a:p>
+        </p:txBody>
+      </p:sp>
+      <p:sp>
+        <p:nvSpPr>
+          <p:cNvPr id="14" name="Rectangle 13"/>
+          <p:cNvSpPr/>
+          <p:nvPr/>
+        </p:nvSpPr>
+        <p:spPr>
+          <a:xfrm>
+            <a:off x="502920" y="6108192"/>
+            <a:ext cx="11183112" cy="475488"/>
+          </a:xfrm>
+          <a:prstGeom prst="rect">
+            <a:avLst/>
+          </a:prstGeom>
+          <a:solidFill>
+            <a:srgbClr val="161B22"/>
+          </a:solidFill>
+          <a:ln w="12700">
+            <a:solidFill>
+              <a:srgbClr val="30363D"/>
+            </a:solidFill>
+          </a:ln>
+        </p:spPr>
+        <p:style>
+          <a:lnRef idx="1">
+            <a:schemeClr val="accent1"/>
+          </a:lnRef>
+          <a:fillRef idx="3">
+            <a:schemeClr val="accent1"/>
+          </a:fillRef>
+          <a:effectRef idx="2">
+            <a:schemeClr val="accent1"/>
+          </a:effectRef>
+          <a:fontRef idx="minor">
+            <a:schemeClr val="lt1"/>
+          </a:fontRef>
+        </p:style>
+        <p:txBody>
+          <a:bodyPr rtlCol="0" anchor="ctr"/>
+          <a:lstStyle/>
+          <a:p>
+            <a:pPr algn="ctr"/>
+          </a:p>
+        </p:txBody>
+      </p:sp>
+      <p:sp>
+        <p:nvSpPr>
+          <p:cNvPr id="15" name="TextBox 14"/>
+          <p:cNvSpPr txBox="1"/>
+          <p:nvPr/>
+        </p:nvSpPr>
+        <p:spPr>
+          <a:xfrm>
+            <a:off x="685800" y="6172200"/>
+            <a:ext cx="10789920" cy="347472"/>
+          </a:xfrm>
+          <a:prstGeom prst="rect">
+            <a:avLst/>
+          </a:prstGeom>
+          <a:noFill/>
+        </p:spPr>
+        <p:txBody>
+          <a:bodyPr wrap="square">
+            <a:spAutoFit/>
+          </a:bodyPr>
+          <a:lstStyle/>
+          <a:p>
+            <a:pPr>
+              <a:defRPr sz="1150" b="1">
+                <a:solidFill>
+                  <a:srgbClr val="20E3B2"/>
+                </a:solidFill>
+                <a:latin typeface="Arial"/>
+              </a:defRPr>
+            </a:pPr>
+            <a:r>
+              <a:t>Delivered by Tryolabs • Self-Healing Checkpoint: ./labs/lab-03-mcp-and-hooks/apply_solution.sh    |    Slide 12/15</a:t>
+            </a:r>
+          </a:p>
+        </p:txBody>
+      </p:sp>
+    </p:spTree>
+  </p:cSld>
+  <p:clrMapOvr>
+    <a:masterClrMapping/>
+  </p:clrMapOvr>
+</p:sld>
+</file>
+
+<file path=ppt/slides/slide13.xml><?xml version="1.0" encoding="utf-8"?>
+<p:sld xmlns:a="http://schemas.openxmlformats.org/drawingml/2006/main" xmlns:p="http://schemas.openxmlformats.org/presentationml/2006/main" xmlns:r="http://schemas.openxmlformats.org/officeDocument/2006/relationships">
+  <p:cSld>
+    <p:spTree>
+      <p:nvGrpSpPr>
+        <p:cNvPr id="1" name=""/>
+        <p:cNvGrpSpPr/>
+        <p:nvPr/>
+      </p:nvGrpSpPr>
+      <p:grpSpPr/>
+      <p:sp>
+        <p:nvSpPr>
+          <p:cNvPr id="2" name="Rectangle 1"/>
+          <p:cNvSpPr/>
+          <p:nvPr/>
+        </p:nvSpPr>
+        <p:spPr>
+          <a:xfrm>
+            <a:off x="0" y="0"/>
+            <a:ext cx="12191695" cy="6858000"/>
+          </a:xfrm>
+          <a:prstGeom prst="rect">
+            <a:avLst/>
+          </a:prstGeom>
+          <a:solidFill>
+            <a:srgbClr val="0D1117"/>
+          </a:solidFill>
+          <a:ln>
+            <a:noFill/>
+          </a:ln>
+        </p:spPr>
+        <p:style>
+          <a:lnRef idx="1">
+            <a:schemeClr val="accent1"/>
+          </a:lnRef>
+          <a:fillRef idx="3">
+            <a:schemeClr val="accent1"/>
+          </a:fillRef>
+          <a:effectRef idx="2">
+            <a:schemeClr val="accent1"/>
+          </a:effectRef>
+          <a:fontRef idx="minor">
+            <a:schemeClr val="lt1"/>
+          </a:fontRef>
+        </p:style>
+        <p:txBody>
+          <a:bodyPr rtlCol="0" anchor="ctr"/>
+          <a:lstStyle/>
+          <a:p>
+            <a:pPr algn="ctr"/>
+          </a:p>
+        </p:txBody>
+      </p:sp>
+      <p:sp>
+        <p:nvSpPr>
+          <p:cNvPr id="3" name="Rectangle 2"/>
+          <p:cNvSpPr/>
+          <p:nvPr/>
+        </p:nvSpPr>
+        <p:spPr>
+          <a:xfrm>
+            <a:off x="0" y="0"/>
+            <a:ext cx="12191695" cy="73152"/>
+          </a:xfrm>
+          <a:prstGeom prst="rect">
+            <a:avLst/>
+          </a:prstGeom>
+          <a:solidFill>
+            <a:srgbClr val="20E3B2"/>
+          </a:solidFill>
+          <a:ln>
+            <a:noFill/>
+          </a:ln>
+        </p:spPr>
+        <p:style>
+          <a:lnRef idx="1">
+            <a:schemeClr val="accent1"/>
+          </a:lnRef>
+          <a:fillRef idx="3">
+            <a:schemeClr val="accent1"/>
+          </a:fillRef>
+          <a:effectRef idx="2">
+            <a:schemeClr val="accent1"/>
+          </a:effectRef>
+          <a:fontRef idx="minor">
+            <a:schemeClr val="lt1"/>
+          </a:fontRef>
+        </p:style>
+        <p:txBody>
+          <a:bodyPr rtlCol="0" anchor="ctr"/>
+          <a:lstStyle/>
+          <a:p>
+            <a:pPr algn="ctr"/>
+          </a:p>
+        </p:txBody>
+      </p:sp>
+      <p:pic>
+        <p:nvPicPr>
+          <p:cNvPr id="4" name="Picture 3" descr="tryolabs-logo-dark-bg.png"/>
+          <p:cNvPicPr>
+            <a:picLocks noChangeAspect="1"/>
+          </p:cNvPicPr>
+          <p:nvPr/>
+        </p:nvPicPr>
+        <p:blipFill>
+          <a:blip r:embed="rId2"/>
+          <a:stretch>
+            <a:fillRect/>
+          </a:stretch>
+        </p:blipFill>
+        <p:spPr>
+          <a:xfrm>
+            <a:off x="9829800" y="256032"/>
+            <a:ext cx="1874519" cy="417876"/>
+          </a:xfrm>
+          <a:prstGeom prst="rect">
+            <a:avLst/>
+          </a:prstGeom>
+        </p:spPr>
+      </p:pic>
+      <p:sp>
+        <p:nvSpPr>
+          <p:cNvPr id="5" name="TextBox 4"/>
+          <p:cNvSpPr txBox="1"/>
+          <p:nvPr/>
+        </p:nvSpPr>
+        <p:spPr>
+          <a:xfrm>
+            <a:off x="502920" y="256032"/>
+            <a:ext cx="9144000" cy="320040"/>
+          </a:xfrm>
+          <a:prstGeom prst="rect">
+            <a:avLst/>
+          </a:prstGeom>
+          <a:noFill/>
+        </p:spPr>
+        <p:txBody>
+          <a:bodyPr wrap="square">
+            <a:spAutoFit/>
+          </a:bodyPr>
+          <a:lstStyle/>
+          <a:p>
+            <a:pPr>
+              <a:defRPr sz="1050" b="1">
+                <a:solidFill>
+                  <a:srgbClr val="20E3B2"/>
+                </a:solidFill>
+                <a:latin typeface="Arial"/>
+              </a:defRPr>
+            </a:pPr>
+            <a:r>
+              <a:t>THEORY MODULE 4 (6 MINUTES) • SUBAGENTS, GOOGLE ADK, A2A &amp; TERRAFORM</a:t>
+            </a:r>
+          </a:p>
+        </p:txBody>
+      </p:sp>
+      <p:sp>
+        <p:nvSpPr>
+          <p:cNvPr id="6" name="TextBox 5"/>
+          <p:cNvSpPr txBox="1"/>
+          <p:nvPr/>
+        </p:nvSpPr>
+        <p:spPr>
+          <a:xfrm>
+            <a:off x="502920" y="566928"/>
+            <a:ext cx="9235440" cy="594360"/>
+          </a:xfrm>
+          <a:prstGeom prst="rect">
+            <a:avLst/>
+          </a:prstGeom>
+          <a:noFill/>
+        </p:spPr>
+        <p:txBody>
+          <a:bodyPr wrap="square">
+            <a:spAutoFit/>
+          </a:bodyPr>
+          <a:lstStyle/>
+          <a:p>
+            <a:pPr>
+              <a:defRPr sz="2250" b="1">
+                <a:solidFill>
+                  <a:srgbClr val="F0F6FC"/>
+                </a:solidFill>
+                <a:latin typeface="Arial"/>
+              </a:defRPr>
+            </a:pPr>
+            <a:r>
+              <a:t>Multi-Agent Systems with Google ADK, A2A Protocol &amp; Terraform</a:t>
+            </a:r>
+          </a:p>
+        </p:txBody>
+      </p:sp>
+      <p:sp>
+        <p:nvSpPr>
+          <p:cNvPr id="7" name="TextBox 6"/>
+          <p:cNvSpPr txBox="1"/>
+          <p:nvPr/>
+        </p:nvSpPr>
+        <p:spPr>
+          <a:xfrm>
+            <a:off x="502920" y="1207008"/>
+            <a:ext cx="11155680" cy="411480"/>
+          </a:xfrm>
+          <a:prstGeom prst="rect">
+            <a:avLst/>
+          </a:prstGeom>
+          <a:noFill/>
+        </p:spPr>
+        <p:txBody>
+          <a:bodyPr wrap="square">
+            <a:spAutoFit/>
+          </a:bodyPr>
+          <a:lstStyle/>
+          <a:p>
+            <a:pPr>
+              <a:defRPr sz="1300">
+                <a:solidFill>
+                  <a:srgbClr val="8B949E"/>
+                </a:solidFill>
+                <a:latin typeface="Arial"/>
+              </a:defRPr>
+            </a:pPr>
+            <a:r>
+              <a:t>Designing multi-agent architectures locally with `adk web` and deploying to Cloud Run &amp; Gemini Enterprise</a:t>
+            </a:r>
+          </a:p>
+        </p:txBody>
+      </p:sp>
+      <p:pic>
+        <p:nvPicPr>
+          <p:cNvPr id="8" name="Picture 7" descr="adk_a2a_cloud_en.png"/>
+          <p:cNvPicPr>
+            <a:picLocks noChangeAspect="1"/>
+          </p:cNvPicPr>
+          <p:nvPr/>
+        </p:nvPicPr>
+        <p:blipFill>
+          <a:blip r:embed="rId3"/>
+          <a:stretch>
+            <a:fillRect/>
+          </a:stretch>
+        </p:blipFill>
+        <p:spPr>
+          <a:xfrm>
+            <a:off x="502920" y="1755648"/>
+            <a:ext cx="5623560" cy="3186684"/>
+          </a:xfrm>
+          <a:prstGeom prst="rect">
+            <a:avLst/>
+          </a:prstGeom>
+        </p:spPr>
+      </p:pic>
+      <p:sp>
+        <p:nvSpPr>
+          <p:cNvPr id="9" name="Rounded Rectangle 8"/>
+          <p:cNvSpPr/>
+          <p:nvPr/>
+        </p:nvSpPr>
+        <p:spPr>
+          <a:xfrm>
+            <a:off x="6309360" y="1755648"/>
+            <a:ext cx="5376672" cy="4160520"/>
+          </a:xfrm>
+          <a:prstGeom prst="roundRect">
+            <a:avLst/>
+          </a:prstGeom>
+          <a:solidFill>
+            <a:srgbClr val="161B22"/>
+          </a:solidFill>
+          <a:ln w="19050">
+            <a:solidFill>
+              <a:srgbClr val="30363D"/>
+            </a:solidFill>
+          </a:ln>
+        </p:spPr>
+        <p:style>
+          <a:lnRef idx="1">
+            <a:schemeClr val="accent1"/>
+          </a:lnRef>
+          <a:fillRef idx="3">
+            <a:schemeClr val="accent1"/>
+          </a:fillRef>
+          <a:effectRef idx="2">
+            <a:schemeClr val="accent1"/>
+          </a:effectRef>
+          <a:fontRef idx="minor">
+            <a:schemeClr val="lt1"/>
+          </a:fontRef>
+        </p:style>
+        <p:txBody>
+          <a:bodyPr rtlCol="0" anchor="ctr"/>
+          <a:lstStyle/>
+          <a:p>
+            <a:pPr algn="ctr"/>
+          </a:p>
+        </p:txBody>
+      </p:sp>
+      <p:sp>
+        <p:nvSpPr>
+          <p:cNvPr id="10" name="Rectangle 9"/>
+          <p:cNvSpPr/>
+          <p:nvPr/>
+        </p:nvSpPr>
+        <p:spPr>
+          <a:xfrm>
+            <a:off x="6309360" y="1755648"/>
+            <a:ext cx="5376672" cy="64008"/>
+          </a:xfrm>
+          <a:prstGeom prst="rect">
+            <a:avLst/>
+          </a:prstGeom>
+          <a:solidFill>
+            <a:srgbClr val="20E3B2"/>
+          </a:solidFill>
+          <a:ln>
+            <a:noFill/>
+          </a:ln>
+        </p:spPr>
+        <p:style>
+          <a:lnRef idx="1">
+            <a:schemeClr val="accent1"/>
+          </a:lnRef>
+          <a:fillRef idx="3">
+            <a:schemeClr val="accent1"/>
+          </a:fillRef>
+          <a:effectRef idx="2">
+            <a:schemeClr val="accent1"/>
+          </a:effectRef>
+          <a:fontRef idx="minor">
+            <a:schemeClr val="lt1"/>
+          </a:fontRef>
+        </p:style>
+        <p:txBody>
+          <a:bodyPr rtlCol="0" anchor="ctr"/>
+          <a:lstStyle/>
+          <a:p>
+            <a:pPr algn="ctr"/>
+          </a:p>
+        </p:txBody>
+      </p:sp>
+      <p:sp>
+        <p:nvSpPr>
+          <p:cNvPr id="11" name="TextBox 10"/>
+          <p:cNvSpPr txBox="1"/>
+          <p:nvPr/>
+        </p:nvSpPr>
+        <p:spPr>
+          <a:xfrm>
+            <a:off x="6510528" y="1901952"/>
+            <a:ext cx="4974336" cy="3922776"/>
+          </a:xfrm>
+          <a:prstGeom prst="rect">
+            <a:avLst/>
+          </a:prstGeom>
+          <a:noFill/>
+        </p:spPr>
+        <p:txBody>
+          <a:bodyPr wrap="square">
+            <a:spAutoFit/>
+          </a:bodyPr>
+          <a:lstStyle/>
+          <a:p>
+            <a:pPr>
+              <a:spcAft>
+                <a:spcPts val="800"/>
+              </a:spcAft>
+              <a:defRPr sz="1500" b="1">
+                <a:solidFill>
+                  <a:srgbClr val="20E3B2"/>
+                </a:solidFill>
+                <a:latin typeface="Arial"/>
+              </a:defRPr>
+            </a:pPr>
+            <a:r>
+              <a:t>End-to-End Multi-Agent Architecture</a:t>
+            </a:r>
+          </a:p>
+          <a:p>
+            <a:pPr>
+              <a:spcAft>
+                <a:spcPts val="650"/>
+              </a:spcAft>
+              <a:defRPr sz="1130">
+                <a:solidFill>
+                  <a:srgbClr val="F0F6FC"/>
+                </a:solidFill>
+                <a:latin typeface="Arial"/>
+              </a:defRPr>
+            </a:pPr>
+            <a:r>
+              <a:t>▸  Antigravity Subagents (/teamwork, /boost, /grill-me): Delegate parallel coding &amp; research tasks inside Antigravity to build your application faster</a:t>
+            </a:r>
+          </a:p>
+          <a:p>
+            <a:pPr>
+              <a:spcAft>
+                <a:spcPts val="650"/>
+              </a:spcAft>
+              <a:defRPr sz="1130">
+                <a:solidFill>
+                  <a:srgbClr val="F0F6FC"/>
+                </a:solidFill>
+                <a:latin typeface="Arial"/>
+              </a:defRPr>
+            </a:pPr>
+            <a:r>
+              <a:t>▸  Google ADK (Agent Development Kit): Build domain multi-agent hierarchies (`root_agent` orchestrating Technical &amp; Commercial specialist `LlmAgent`s with typed Python tools)</a:t>
+            </a:r>
+          </a:p>
+          <a:p>
+            <a:pPr>
+              <a:spcAft>
+                <a:spcPts val="650"/>
+              </a:spcAft>
+              <a:defRPr sz="1130">
+                <a:solidFill>
+                  <a:srgbClr val="F0F6FC"/>
+                </a:solidFill>
+                <a:latin typeface="Arial"/>
+              </a:defRPr>
+            </a:pPr>
+            <a:r>
+              <a:t>▸  Local Testing via ADK Dev UI (`adk web`): Launch `./scripts/run_adk_web.sh` (http://localhost:8080) to interactively inspect multi-agent event traces, tool calls, and session state!</a:t>
+            </a:r>
+          </a:p>
+          <a:p>
+            <a:pPr>
+              <a:spcAft>
+                <a:spcPts val="650"/>
+              </a:spcAft>
+              <a:defRPr sz="1130">
+                <a:solidFill>
+                  <a:srgbClr val="F0F6FC"/>
+                </a:solidFill>
+                <a:latin typeface="Arial"/>
+              </a:defRPr>
+            </a:pPr>
+            <a:r>
+              <a:t>▸  A2A (Agent2Agent) Protocol: Publish `GET /.well-known/agent.json` (Agent Card) and `POST /api/v1/a2a` (JSON-RPC 2.0 `tasks/send`) for cross-agent interoperability</a:t>
+            </a:r>
+          </a:p>
+          <a:p>
+            <a:pPr>
+              <a:spcAft>
+                <a:spcPts val="650"/>
+              </a:spcAft>
+              <a:defRPr sz="1130">
+                <a:solidFill>
+                  <a:srgbClr val="F0F6FC"/>
+                </a:solidFill>
+                <a:latin typeface="Arial"/>
+              </a:defRPr>
+            </a:pPr>
+            <a:r>
+              <a:t>▸  Terraform + Gemini Enterprise: Provision Cloud Run v2 &amp; IAM via `infra/terraform/` (`deploy_gcp.sh`) and register your A2A agent into Gemini Enterprise (`register_gemini_enterprise_agent.sh`)</a:t>
+            </a:r>
+          </a:p>
+        </p:txBody>
+      </p:sp>
+      <p:sp>
+        <p:nvSpPr>
+          <p:cNvPr id="12" name="Rectangle 11"/>
+          <p:cNvSpPr/>
+          <p:nvPr/>
+        </p:nvSpPr>
+        <p:spPr>
+          <a:xfrm>
+            <a:off x="502920" y="6108192"/>
+            <a:ext cx="11183112" cy="475488"/>
+          </a:xfrm>
+          <a:prstGeom prst="rect">
+            <a:avLst/>
+          </a:prstGeom>
+          <a:solidFill>
+            <a:srgbClr val="161B22"/>
+          </a:solidFill>
+          <a:ln w="12700">
+            <a:solidFill>
+              <a:srgbClr val="30363D"/>
+            </a:solidFill>
+          </a:ln>
+        </p:spPr>
+        <p:style>
+          <a:lnRef idx="1">
+            <a:schemeClr val="accent1"/>
+          </a:lnRef>
+          <a:fillRef idx="3">
+            <a:schemeClr val="accent1"/>
+          </a:fillRef>
+          <a:effectRef idx="2">
+            <a:schemeClr val="accent1"/>
+          </a:effectRef>
+          <a:fontRef idx="minor">
+            <a:schemeClr val="lt1"/>
+          </a:fontRef>
+        </p:style>
+        <p:txBody>
+          <a:bodyPr rtlCol="0" anchor="ctr"/>
+          <a:lstStyle/>
+          <a:p>
+            <a:pPr algn="ctr"/>
+          </a:p>
+        </p:txBody>
+      </p:sp>
+      <p:sp>
+        <p:nvSpPr>
+          <p:cNvPr id="13" name="TextBox 12"/>
+          <p:cNvSpPr txBox="1"/>
+          <p:nvPr/>
+        </p:nvSpPr>
+        <p:spPr>
+          <a:xfrm>
+            <a:off x="685800" y="6172200"/>
+            <a:ext cx="10789920" cy="347472"/>
+          </a:xfrm>
+          <a:prstGeom prst="rect">
+            <a:avLst/>
+          </a:prstGeom>
+          <a:noFill/>
+        </p:spPr>
+        <p:txBody>
+          <a:bodyPr wrap="square">
+            <a:spAutoFit/>
+          </a:bodyPr>
+          <a:lstStyle/>
+          <a:p>
+            <a:pPr>
+              <a:defRPr sz="1150" b="1">
+                <a:solidFill>
+                  <a:srgbClr val="20E3B2"/>
+                </a:solidFill>
+                <a:latin typeface="Arial"/>
+              </a:defRPr>
+            </a:pPr>
+            <a:r>
+              <a:t>Develop &amp; test 100% locally with `adk web` + `pytest`, then deploy to Google Cloud &amp; Gemini Enterprise with Terraform!    |    Slide 13/15</a:t>
+            </a:r>
+          </a:p>
+        </p:txBody>
+      </p:sp>
+    </p:spTree>
+  </p:cSld>
+  <p:clrMapOvr>
+    <a:masterClrMapping/>
+  </p:clrMapOvr>
+</p:sld>
+</file>
+
+<file path=ppt/slides/slide14.xml><?xml version="1.0" encoding="utf-8"?>
+<p:sld xmlns:a="http://schemas.openxmlformats.org/drawingml/2006/main" xmlns:p="http://schemas.openxmlformats.org/presentationml/2006/main" xmlns:r="http://schemas.openxmlformats.org/officeDocument/2006/relationships">
+  <p:cSld>
+    <p:spTree>
+      <p:nvGrpSpPr>
+        <p:cNvPr id="1" name=""/>
+        <p:cNvGrpSpPr/>
+        <p:nvPr/>
+      </p:nvGrpSpPr>
+      <p:grpSpPr/>
+      <p:sp>
+        <p:nvSpPr>
+          <p:cNvPr id="2" name="Rectangle 1"/>
+          <p:cNvSpPr/>
+          <p:nvPr/>
+        </p:nvSpPr>
+        <p:spPr>
+          <a:xfrm>
+            <a:off x="0" y="0"/>
+            <a:ext cx="12191695" cy="6858000"/>
+          </a:xfrm>
+          <a:prstGeom prst="rect">
+            <a:avLst/>
+          </a:prstGeom>
+          <a:solidFill>
+            <a:srgbClr val="0D1117"/>
+          </a:solidFill>
+          <a:ln>
+            <a:noFill/>
+          </a:ln>
+        </p:spPr>
+        <p:style>
+          <a:lnRef idx="1">
+            <a:schemeClr val="accent1"/>
+          </a:lnRef>
+          <a:fillRef idx="3">
+            <a:schemeClr val="accent1"/>
+          </a:fillRef>
+          <a:effectRef idx="2">
+            <a:schemeClr val="accent1"/>
+          </a:effectRef>
+          <a:fontRef idx="minor">
+            <a:schemeClr val="lt1"/>
+          </a:fontRef>
+        </p:style>
+        <p:txBody>
+          <a:bodyPr rtlCol="0" anchor="ctr"/>
+          <a:lstStyle/>
+          <a:p>
+            <a:pPr algn="ctr"/>
+          </a:p>
+        </p:txBody>
+      </p:sp>
+      <p:sp>
+        <p:nvSpPr>
+          <p:cNvPr id="3" name="Rectangle 2"/>
+          <p:cNvSpPr/>
+          <p:nvPr/>
+        </p:nvSpPr>
+        <p:spPr>
+          <a:xfrm>
+            <a:off x="0" y="0"/>
+            <a:ext cx="12191695" cy="73152"/>
+          </a:xfrm>
+          <a:prstGeom prst="rect">
+            <a:avLst/>
+          </a:prstGeom>
+          <a:solidFill>
+            <a:srgbClr val="20E3B2"/>
+          </a:solidFill>
+          <a:ln>
+            <a:noFill/>
+          </a:ln>
+        </p:spPr>
+        <p:style>
+          <a:lnRef idx="1">
+            <a:schemeClr val="accent1"/>
+          </a:lnRef>
+          <a:fillRef idx="3">
+            <a:schemeClr val="accent1"/>
+          </a:fillRef>
+          <a:effectRef idx="2">
+            <a:schemeClr val="accent1"/>
+          </a:effectRef>
+          <a:fontRef idx="minor">
+            <a:schemeClr val="lt1"/>
+          </a:fontRef>
+        </p:style>
+        <p:txBody>
+          <a:bodyPr rtlCol="0" anchor="ctr"/>
+          <a:lstStyle/>
+          <a:p>
+            <a:pPr algn="ctr"/>
+          </a:p>
+        </p:txBody>
+      </p:sp>
+      <p:pic>
+        <p:nvPicPr>
+          <p:cNvPr id="4" name="Picture 3" descr="tryolabs-logo-dark-bg.png"/>
+          <p:cNvPicPr>
+            <a:picLocks noChangeAspect="1"/>
+          </p:cNvPicPr>
+          <p:nvPr/>
+        </p:nvPicPr>
+        <p:blipFill>
+          <a:blip r:embed="rId2"/>
+          <a:stretch>
+            <a:fillRect/>
+          </a:stretch>
+        </p:blipFill>
+        <p:spPr>
+          <a:xfrm>
+            <a:off x="9829800" y="256032"/>
+            <a:ext cx="1874519" cy="417876"/>
+          </a:xfrm>
+          <a:prstGeom prst="rect">
+            <a:avLst/>
+          </a:prstGeom>
+        </p:spPr>
+      </p:pic>
+      <p:sp>
+        <p:nvSpPr>
+          <p:cNvPr id="5" name="TextBox 4"/>
+          <p:cNvSpPr txBox="1"/>
+          <p:nvPr/>
+        </p:nvSpPr>
+        <p:spPr>
+          <a:xfrm>
+            <a:off x="502920" y="256032"/>
+            <a:ext cx="9144000" cy="320040"/>
+          </a:xfrm>
+          <a:prstGeom prst="rect">
+            <a:avLst/>
+          </a:prstGeom>
+          <a:noFill/>
+        </p:spPr>
+        <p:txBody>
+          <a:bodyPr wrap="square">
+            <a:spAutoFit/>
+          </a:bodyPr>
+          <a:lstStyle/>
+          <a:p>
+            <a:pPr>
+              <a:defRPr sz="1050" b="1">
+                <a:solidFill>
+                  <a:srgbClr val="20E3B2"/>
+                </a:solidFill>
+                <a:latin typeface="Arial"/>
+              </a:defRPr>
+            </a:pPr>
+            <a:r>
+              <a:t>HANDS-ON LAB 4 CAPSTONE (PART 1/2) • OBJECTIVES &amp; WHAT YOU WILL BUILD</a:t>
+            </a:r>
+          </a:p>
+        </p:txBody>
+      </p:sp>
+      <p:sp>
+        <p:nvSpPr>
+          <p:cNvPr id="6" name="TextBox 5"/>
+          <p:cNvSpPr txBox="1"/>
+          <p:nvPr/>
+        </p:nvSpPr>
+        <p:spPr>
+          <a:xfrm>
+            <a:off x="502920" y="566928"/>
+            <a:ext cx="9235440" cy="594360"/>
+          </a:xfrm>
+          <a:prstGeom prst="rect">
+            <a:avLst/>
+          </a:prstGeom>
+          <a:noFill/>
+        </p:spPr>
+        <p:txBody>
+          <a:bodyPr wrap="square">
+            <a:spAutoFit/>
+          </a:bodyPr>
+          <a:lstStyle/>
+          <a:p>
+            <a:pPr>
+              <a:defRPr sz="2250" b="1">
+                <a:solidFill>
+                  <a:srgbClr val="F0F6FC"/>
+                </a:solidFill>
+                <a:latin typeface="Arial"/>
+              </a:defRPr>
+            </a:pPr>
+            <a:r>
+              <a:t>Lab 4 Capstone: Multi-Agent ADK, A2A &amp; Terraform — Objectives &amp; Build Spec</a:t>
+            </a:r>
+          </a:p>
+        </p:txBody>
+      </p:sp>
+      <p:sp>
+        <p:nvSpPr>
+          <p:cNvPr id="7" name="TextBox 6"/>
+          <p:cNvSpPr txBox="1"/>
+          <p:nvPr/>
+        </p:nvSpPr>
+        <p:spPr>
+          <a:xfrm>
+            <a:off x="502920" y="1207008"/>
+            <a:ext cx="11155680" cy="411480"/>
+          </a:xfrm>
+          <a:prstGeom prst="rect">
+            <a:avLst/>
+          </a:prstGeom>
+          <a:noFill/>
+        </p:spPr>
+        <p:txBody>
+          <a:bodyPr wrap="square">
+            <a:spAutoFit/>
+          </a:bodyPr>
+          <a:lstStyle/>
+          <a:p>
+            <a:pPr>
+              <a:defRPr sz="1300">
+                <a:solidFill>
+                  <a:srgbClr val="8B949E"/>
+                </a:solidFill>
+                <a:latin typeface="Arial"/>
+              </a:defRPr>
+            </a:pPr>
+            <a:r>
+              <a:t>55 Minutes • Printable PDF Guide: labs/lab-04-multi-agent-capstone/LAB_04_INSTRUCTIONS_EN.pdf</a:t>
+            </a:r>
+          </a:p>
+        </p:txBody>
+      </p:sp>
+      <p:pic>
+        <p:nvPicPr>
+          <p:cNvPr id="8" name="Picture 7" descr="adk_a2a_cloud_en.png"/>
+          <p:cNvPicPr>
+            <a:picLocks noChangeAspect="1"/>
+          </p:cNvPicPr>
+          <p:nvPr/>
+        </p:nvPicPr>
+        <p:blipFill>
+          <a:blip r:embed="rId3"/>
+          <a:stretch>
+            <a:fillRect/>
+          </a:stretch>
+        </p:blipFill>
+        <p:spPr>
+          <a:xfrm>
+            <a:off x="502920" y="1755648"/>
+            <a:ext cx="5623560" cy="3186684"/>
+          </a:xfrm>
+          <a:prstGeom prst="rect">
+            <a:avLst/>
+          </a:prstGeom>
+        </p:spPr>
+      </p:pic>
+      <p:sp>
+        <p:nvSpPr>
+          <p:cNvPr id="9" name="Rounded Rectangle 8"/>
+          <p:cNvSpPr/>
+          <p:nvPr/>
+        </p:nvSpPr>
+        <p:spPr>
+          <a:xfrm>
+            <a:off x="6309360" y="1755648"/>
+            <a:ext cx="5376672" cy="4160520"/>
+          </a:xfrm>
+          <a:prstGeom prst="roundRect">
+            <a:avLst/>
+          </a:prstGeom>
+          <a:solidFill>
+            <a:srgbClr val="161B22"/>
+          </a:solidFill>
+          <a:ln w="19050">
+            <a:solidFill>
+              <a:srgbClr val="30363D"/>
+            </a:solidFill>
+          </a:ln>
+        </p:spPr>
+        <p:style>
+          <a:lnRef idx="1">
+            <a:schemeClr val="accent1"/>
+          </a:lnRef>
+          <a:fillRef idx="3">
+            <a:schemeClr val="accent1"/>
+          </a:fillRef>
+          <a:effectRef idx="2">
+            <a:schemeClr val="accent1"/>
+          </a:effectRef>
+          <a:fontRef idx="minor">
+            <a:schemeClr val="lt1"/>
+          </a:fontRef>
+        </p:style>
+        <p:txBody>
+          <a:bodyPr rtlCol="0" anchor="ctr"/>
+          <a:lstStyle/>
+          <a:p>
+            <a:pPr algn="ctr"/>
+          </a:p>
+        </p:txBody>
+      </p:sp>
+      <p:sp>
+        <p:nvSpPr>
+          <p:cNvPr id="10" name="Rectangle 9"/>
+          <p:cNvSpPr/>
+          <p:nvPr/>
+        </p:nvSpPr>
+        <p:spPr>
+          <a:xfrm>
+            <a:off x="6309360" y="1755648"/>
+            <a:ext cx="5376672" cy="64008"/>
+          </a:xfrm>
+          <a:prstGeom prst="rect">
+            <a:avLst/>
+          </a:prstGeom>
+          <a:solidFill>
+            <a:srgbClr val="20E3B2"/>
+          </a:solidFill>
+          <a:ln>
+            <a:noFill/>
+          </a:ln>
+        </p:spPr>
+        <p:style>
+          <a:lnRef idx="1">
+            <a:schemeClr val="accent1"/>
+          </a:lnRef>
+          <a:fillRef idx="3">
+            <a:schemeClr val="accent1"/>
+          </a:fillRef>
+          <a:effectRef idx="2">
+            <a:schemeClr val="accent1"/>
+          </a:effectRef>
+          <a:fontRef idx="minor">
+            <a:schemeClr val="lt1"/>
+          </a:fontRef>
+        </p:style>
+        <p:txBody>
+          <a:bodyPr rtlCol="0" anchor="ctr"/>
+          <a:lstStyle/>
+          <a:p>
+            <a:pPr algn="ctr"/>
+          </a:p>
+        </p:txBody>
+      </p:sp>
+      <p:sp>
+        <p:nvSpPr>
+          <p:cNvPr id="11" name="TextBox 10"/>
+          <p:cNvSpPr txBox="1"/>
+          <p:nvPr/>
+        </p:nvSpPr>
+        <p:spPr>
+          <a:xfrm>
+            <a:off x="6510528" y="1901952"/>
+            <a:ext cx="4974336" cy="3922776"/>
+          </a:xfrm>
+          <a:prstGeom prst="rect">
+            <a:avLst/>
+          </a:prstGeom>
+          <a:noFill/>
+        </p:spPr>
+        <p:txBody>
+          <a:bodyPr wrap="square">
+            <a:spAutoFit/>
+          </a:bodyPr>
+          <a:lstStyle/>
+          <a:p>
+            <a:pPr>
+              <a:spcAft>
+                <a:spcPts val="800"/>
+              </a:spcAft>
+              <a:defRPr sz="1500" b="1">
+                <a:solidFill>
+                  <a:srgbClr val="20E3B2"/>
+                </a:solidFill>
+                <a:latin typeface="Arial"/>
+              </a:defRPr>
+            </a:pPr>
+            <a:r>
+              <a:t>Lab 4 Objectives &amp; What You Will Build</a:t>
+            </a:r>
+          </a:p>
+          <a:p>
+            <a:pPr>
+              <a:spcAft>
+                <a:spcPts val="650"/>
+              </a:spcAft>
+              <a:defRPr sz="1130">
+                <a:solidFill>
+                  <a:srgbClr val="F0F6FC"/>
+                </a:solidFill>
+                <a:latin typeface="Arial"/>
+              </a:defRPr>
+            </a:pPr>
+            <a:r>
+              <a:t>▸  Objective 1 (Multi-Agent System Design with Google ADK &amp; A2A): Build a hierarchical multi-agent system with Google ADK (`LlmAgent`) and expose an A2A Agent Card + JSON-RPC 2.0 endpoint.</a:t>
+            </a:r>
+          </a:p>
+          <a:p>
+            <a:pPr>
+              <a:spcAft>
+                <a:spcPts val="650"/>
+              </a:spcAft>
+              <a:defRPr sz="1130">
+                <a:solidFill>
+                  <a:srgbClr val="F0F6FC"/>
+                </a:solidFill>
+                <a:latin typeface="Arial"/>
+              </a:defRPr>
+            </a:pPr>
+            <a:r>
+              <a:t>▸  Objective 2 (Local ADK Dev UI &amp; Cloud Terraform Deployment): Test agent handoffs locally in `adk web` (`http://localhost:8080`) and validate Cloud Run + Gemini Enterprise provisioning with Terraform.</a:t>
+            </a:r>
+          </a:p>
+          <a:p>
+            <a:pPr>
+              <a:spcAft>
+                <a:spcPts val="650"/>
+              </a:spcAft>
+              <a:defRPr sz="1130">
+                <a:solidFill>
+                  <a:srgbClr val="F0F6FC"/>
+                </a:solidFill>
+                <a:latin typeface="Arial"/>
+              </a:defRPr>
+            </a:pPr>
+            <a:r>
+              <a:t>▸  What You Will Build #1 (`src/services/fulfillment_router.py`): Margin-preserving omnichannel split-shipment optimizer (`evaluate_candidates` &amp; `optimize_at_risk_orders`) rescuing all 35 VIP orders.</a:t>
+            </a:r>
+          </a:p>
+          <a:p>
+            <a:pPr>
+              <a:spcAft>
+                <a:spcPts val="650"/>
+              </a:spcAft>
+              <a:defRPr sz="1130">
+                <a:solidFill>
+                  <a:srgbClr val="F0F6FC"/>
+                </a:solidFill>
+                <a:latin typeface="Arial"/>
+              </a:defRPr>
+            </a:pPr>
+            <a:r>
+              <a:t>▸  What You Will Build #2 (`src/agents/adk_a2a_orchestrator.py` &amp; `adk_agents/retail_pulse/`): `WMSInventoryATPAgent` + `MerchandisingMarginOTIFAgent` coordinated by `RetailPulseOrchestratorAgent`, plus `GET /.well-known/agent.json` &amp; `POST /api/v1/a2a`.</a:t>
+            </a:r>
+          </a:p>
+          <a:p>
+            <a:pPr>
+              <a:spcAft>
+                <a:spcPts val="650"/>
+              </a:spcAft>
+              <a:defRPr sz="1130">
+                <a:solidFill>
+                  <a:srgbClr val="F0F6FC"/>
+                </a:solidFill>
+                <a:latin typeface="Arial"/>
+              </a:defRPr>
+            </a:pPr>
+            <a:r>
+              <a:t>▸  What You Will Build #3 (Cloud Infrastructure): Validate `infra/terraform/main.tf` and Gemini Enterprise registration via `./labs/lab-04-multi-agent-capstone/deploy_gcp.sh --dry-run`.</a:t>
+            </a:r>
+          </a:p>
+        </p:txBody>
+      </p:sp>
+      <p:sp>
+        <p:nvSpPr>
+          <p:cNvPr id="12" name="Rectangle 11"/>
+          <p:cNvSpPr/>
+          <p:nvPr/>
+        </p:nvSpPr>
+        <p:spPr>
+          <a:xfrm>
+            <a:off x="502920" y="6108192"/>
+            <a:ext cx="11183112" cy="475488"/>
+          </a:xfrm>
+          <a:prstGeom prst="rect">
+            <a:avLst/>
+          </a:prstGeom>
+          <a:solidFill>
+            <a:srgbClr val="161B22"/>
+          </a:solidFill>
+          <a:ln w="12700">
+            <a:solidFill>
+              <a:srgbClr val="30363D"/>
+            </a:solidFill>
+          </a:ln>
+        </p:spPr>
+        <p:style>
+          <a:lnRef idx="1">
+            <a:schemeClr val="accent1"/>
+          </a:lnRef>
+          <a:fillRef idx="3">
+            <a:schemeClr val="accent1"/>
+          </a:fillRef>
+          <a:effectRef idx="2">
+            <a:schemeClr val="accent1"/>
+          </a:effectRef>
+          <a:fontRef idx="minor">
+            <a:schemeClr val="lt1"/>
+          </a:fontRef>
+        </p:style>
+        <p:txBody>
+          <a:bodyPr rtlCol="0" anchor="ctr"/>
+          <a:lstStyle/>
+          <a:p>
+            <a:pPr algn="ctr"/>
+          </a:p>
+        </p:txBody>
+      </p:sp>
+      <p:sp>
+        <p:nvSpPr>
+          <p:cNvPr id="13" name="TextBox 12"/>
+          <p:cNvSpPr txBox="1"/>
+          <p:nvPr/>
+        </p:nvSpPr>
+        <p:spPr>
+          <a:xfrm>
+            <a:off x="685800" y="6172200"/>
+            <a:ext cx="10789920" cy="347472"/>
+          </a:xfrm>
+          <a:prstGeom prst="rect">
+            <a:avLst/>
+          </a:prstGeom>
+          <a:noFill/>
+        </p:spPr>
+        <p:txBody>
+          <a:bodyPr wrap="square">
+            <a:spAutoFit/>
+          </a:bodyPr>
+          <a:lstStyle/>
+          <a:p>
+            <a:pPr>
+              <a:defRPr sz="1150" b="1">
+                <a:solidFill>
+                  <a:srgbClr val="20E3B2"/>
+                </a:solidFill>
+                <a:latin typeface="Arial"/>
+              </a:defRPr>
+            </a:pPr>
+            <a:r>
+              <a:t>Delivered by Tryolabs • Full printable guide: LAB_04_INSTRUCTIONS_EN.pdf    |    Slide 14/15</a:t>
+            </a:r>
+          </a:p>
+        </p:txBody>
+      </p:sp>
+    </p:spTree>
+  </p:cSld>
+  <p:clrMapOvr>
+    <a:masterClrMapping/>
+  </p:clrMapOvr>
+</p:sld>
+</file>
+
+<file path=ppt/slides/slide15.xml><?xml version="1.0" encoding="utf-8"?>
+<p:sld xmlns:a="http://schemas.openxmlformats.org/drawingml/2006/main" xmlns:p="http://schemas.openxmlformats.org/presentationml/2006/main" xmlns:r="http://schemas.openxmlformats.org/officeDocument/2006/relationships">
+  <p:cSld>
+    <p:spTree>
+      <p:nvGrpSpPr>
+        <p:cNvPr id="1" name=""/>
+        <p:cNvGrpSpPr/>
+        <p:nvPr/>
+      </p:nvGrpSpPr>
+      <p:grpSpPr/>
+      <p:sp>
+        <p:nvSpPr>
+          <p:cNvPr id="2" name="Rectangle 1"/>
+          <p:cNvSpPr/>
+          <p:nvPr/>
+        </p:nvSpPr>
+        <p:spPr>
+          <a:xfrm>
+            <a:off x="0" y="0"/>
+            <a:ext cx="12191695" cy="6858000"/>
+          </a:xfrm>
+          <a:prstGeom prst="rect">
+            <a:avLst/>
+          </a:prstGeom>
+          <a:solidFill>
+            <a:srgbClr val="0D1117"/>
+          </a:solidFill>
+          <a:ln>
+            <a:noFill/>
+          </a:ln>
+        </p:spPr>
+        <p:style>
+          <a:lnRef idx="1">
+            <a:schemeClr val="accent1"/>
+          </a:lnRef>
+          <a:fillRef idx="3">
+            <a:schemeClr val="accent1"/>
+          </a:fillRef>
+          <a:effectRef idx="2">
+            <a:schemeClr val="accent1"/>
+          </a:effectRef>
+          <a:fontRef idx="minor">
+            <a:schemeClr val="lt1"/>
+          </a:fontRef>
+        </p:style>
+        <p:txBody>
+          <a:bodyPr rtlCol="0" anchor="ctr"/>
+          <a:lstStyle/>
+          <a:p>
+            <a:pPr algn="ctr"/>
+          </a:p>
+        </p:txBody>
+      </p:sp>
+      <p:sp>
+        <p:nvSpPr>
+          <p:cNvPr id="3" name="Rectangle 2"/>
+          <p:cNvSpPr/>
+          <p:nvPr/>
+        </p:nvSpPr>
+        <p:spPr>
+          <a:xfrm>
+            <a:off x="0" y="0"/>
+            <a:ext cx="12191695" cy="73152"/>
+          </a:xfrm>
+          <a:prstGeom prst="rect">
+            <a:avLst/>
+          </a:prstGeom>
+          <a:solidFill>
+            <a:srgbClr val="20E3B2"/>
+          </a:solidFill>
+          <a:ln>
+            <a:noFill/>
+          </a:ln>
+        </p:spPr>
+        <p:style>
+          <a:lnRef idx="1">
+            <a:schemeClr val="accent1"/>
+          </a:lnRef>
+          <a:fillRef idx="3">
+            <a:schemeClr val="accent1"/>
+          </a:fillRef>
+          <a:effectRef idx="2">
+            <a:schemeClr val="accent1"/>
+          </a:effectRef>
+          <a:fontRef idx="minor">
+            <a:schemeClr val="lt1"/>
+          </a:fontRef>
+        </p:style>
+        <p:txBody>
+          <a:bodyPr rtlCol="0" anchor="ctr"/>
+          <a:lstStyle/>
+          <a:p>
+            <a:pPr algn="ctr"/>
+          </a:p>
+        </p:txBody>
+      </p:sp>
+      <p:pic>
+        <p:nvPicPr>
+          <p:cNvPr id="4" name="Picture 3" descr="tryolabs-logo-dark-bg.png"/>
+          <p:cNvPicPr>
+            <a:picLocks noChangeAspect="1"/>
+          </p:cNvPicPr>
+          <p:nvPr/>
+        </p:nvPicPr>
+        <p:blipFill>
+          <a:blip r:embed="rId2"/>
+          <a:stretch>
+            <a:fillRect/>
+          </a:stretch>
+        </p:blipFill>
+        <p:spPr>
+          <a:xfrm>
+            <a:off x="9829800" y="256032"/>
+            <a:ext cx="1874519" cy="417876"/>
+          </a:xfrm>
+          <a:prstGeom prst="rect">
+            <a:avLst/>
+          </a:prstGeom>
+        </p:spPr>
+      </p:pic>
+      <p:sp>
+        <p:nvSpPr>
+          <p:cNvPr id="5" name="TextBox 4"/>
+          <p:cNvSpPr txBox="1"/>
+          <p:nvPr/>
+        </p:nvSpPr>
+        <p:spPr>
+          <a:xfrm>
+            <a:off x="502920" y="256032"/>
+            <a:ext cx="9144000" cy="320040"/>
+          </a:xfrm>
+          <a:prstGeom prst="rect">
+            <a:avLst/>
+          </a:prstGeom>
+          <a:noFill/>
+        </p:spPr>
+        <p:txBody>
+          <a:bodyPr wrap="square">
+            <a:spAutoFit/>
+          </a:bodyPr>
+          <a:lstStyle/>
+          <a:p>
+            <a:pPr>
+              <a:defRPr sz="1050" b="1">
+                <a:solidFill>
+                  <a:srgbClr val="20E3B2"/>
+                </a:solidFill>
+                <a:latin typeface="Arial"/>
+              </a:defRPr>
+            </a:pPr>
+            <a:r>
+              <a:t>HANDS-ON LAB 4 CAPSTONE (PART 2/2) • STEP-BY-STEP INSTRUCTIONS &amp; PROMPTS</a:t>
+            </a:r>
+          </a:p>
+        </p:txBody>
+      </p:sp>
+      <p:sp>
+        <p:nvSpPr>
+          <p:cNvPr id="6" name="TextBox 5"/>
+          <p:cNvSpPr txBox="1"/>
+          <p:nvPr/>
+        </p:nvSpPr>
+        <p:spPr>
+          <a:xfrm>
+            <a:off x="502920" y="566928"/>
+            <a:ext cx="9235440" cy="594360"/>
+          </a:xfrm>
+          <a:prstGeom prst="rect">
+            <a:avLst/>
+          </a:prstGeom>
+          <a:noFill/>
+        </p:spPr>
+        <p:txBody>
+          <a:bodyPr wrap="square">
+            <a:spAutoFit/>
+          </a:bodyPr>
+          <a:lstStyle/>
+          <a:p>
+            <a:pPr>
+              <a:defRPr sz="2250" b="1">
+                <a:solidFill>
+                  <a:srgbClr val="F0F6FC"/>
+                </a:solidFill>
+                <a:latin typeface="Arial"/>
+              </a:defRPr>
+            </a:pPr>
+            <a:r>
+              <a:t>Lab 4 Instructions, `adk web` Testing &amp; Terraform Cloud Deploy</a:t>
+            </a:r>
+          </a:p>
+        </p:txBody>
+      </p:sp>
+      <p:sp>
+        <p:nvSpPr>
+          <p:cNvPr id="7" name="TextBox 6"/>
+          <p:cNvSpPr txBox="1"/>
+          <p:nvPr/>
+        </p:nvSpPr>
+        <p:spPr>
+          <a:xfrm>
+            <a:off x="502920" y="1207008"/>
+            <a:ext cx="11155680" cy="411480"/>
+          </a:xfrm>
+          <a:prstGeom prst="rect">
+            <a:avLst/>
+          </a:prstGeom>
+          <a:noFill/>
+        </p:spPr>
+        <p:txBody>
+          <a:bodyPr wrap="square">
+            <a:spAutoFit/>
+          </a:bodyPr>
+          <a:lstStyle/>
+          <a:p>
+            <a:pPr>
+              <a:defRPr sz="1300">
+                <a:solidFill>
+                  <a:srgbClr val="8B949E"/>
+                </a:solidFill>
+                <a:latin typeface="Arial"/>
+              </a:defRPr>
+            </a:pPr>
+            <a:r>
+              <a:t>Follow Steps 1–5 on the left and copy-paste prompts from labs/lab-04-multi-agent-capstone/PROMPTS.md</a:t>
+            </a:r>
+          </a:p>
+        </p:txBody>
+      </p:sp>
+      <p:sp>
+        <p:nvSpPr>
+          <p:cNvPr id="8" name="Rounded Rectangle 7"/>
+          <p:cNvSpPr/>
+          <p:nvPr/>
+        </p:nvSpPr>
+        <p:spPr>
+          <a:xfrm>
+            <a:off x="502920" y="1755648"/>
+            <a:ext cx="5504688" cy="4160520"/>
+          </a:xfrm>
+          <a:prstGeom prst="roundRect">
+            <a:avLst/>
+          </a:prstGeom>
+          <a:solidFill>
+            <a:srgbClr val="161B22"/>
+          </a:solidFill>
+          <a:ln w="19050">
+            <a:solidFill>
+              <a:srgbClr val="30363D"/>
+            </a:solidFill>
+          </a:ln>
+        </p:spPr>
+        <p:style>
+          <a:lnRef idx="1">
+            <a:schemeClr val="accent1"/>
+          </a:lnRef>
+          <a:fillRef idx="3">
+            <a:schemeClr val="accent1"/>
+          </a:fillRef>
+          <a:effectRef idx="2">
+            <a:schemeClr val="accent1"/>
+          </a:effectRef>
+          <a:fontRef idx="minor">
+            <a:schemeClr val="lt1"/>
+          </a:fontRef>
+        </p:style>
+        <p:txBody>
+          <a:bodyPr rtlCol="0" anchor="ctr"/>
+          <a:lstStyle/>
+          <a:p>
+            <a:pPr algn="ctr"/>
+          </a:p>
+        </p:txBody>
+      </p:sp>
+      <p:sp>
+        <p:nvSpPr>
+          <p:cNvPr id="9" name="Rectangle 8"/>
+          <p:cNvSpPr/>
+          <p:nvPr/>
+        </p:nvSpPr>
+        <p:spPr>
+          <a:xfrm>
+            <a:off x="502920" y="1755648"/>
+            <a:ext cx="5504688" cy="64008"/>
+          </a:xfrm>
+          <a:prstGeom prst="rect">
+            <a:avLst/>
+          </a:prstGeom>
+          <a:solidFill>
+            <a:srgbClr val="20E3B2"/>
+          </a:solidFill>
+          <a:ln>
+            <a:noFill/>
+          </a:ln>
+        </p:spPr>
+        <p:style>
+          <a:lnRef idx="1">
+            <a:schemeClr val="accent1"/>
+          </a:lnRef>
+          <a:fillRef idx="3">
+            <a:schemeClr val="accent1"/>
+          </a:fillRef>
+          <a:effectRef idx="2">
+            <a:schemeClr val="accent1"/>
+          </a:effectRef>
+          <a:fontRef idx="minor">
+            <a:schemeClr val="lt1"/>
+          </a:fontRef>
+        </p:style>
+        <p:txBody>
+          <a:bodyPr rtlCol="0" anchor="ctr"/>
+          <a:lstStyle/>
+          <a:p>
+            <a:pPr algn="ctr"/>
+          </a:p>
+        </p:txBody>
+      </p:sp>
+      <p:sp>
+        <p:nvSpPr>
+          <p:cNvPr id="10" name="TextBox 9"/>
+          <p:cNvSpPr txBox="1"/>
+          <p:nvPr/>
+        </p:nvSpPr>
+        <p:spPr>
+          <a:xfrm>
+            <a:off x="704088" y="1901952"/>
+            <a:ext cx="5102352" cy="3922776"/>
+          </a:xfrm>
+          <a:prstGeom prst="rect">
+            <a:avLst/>
+          </a:prstGeom>
+          <a:noFill/>
+        </p:spPr>
+        <p:txBody>
+          <a:bodyPr wrap="square">
+            <a:spAutoFit/>
+          </a:bodyPr>
+          <a:lstStyle/>
+          <a:p>
+            <a:pPr>
+              <a:spcAft>
+                <a:spcPts val="800"/>
+              </a:spcAft>
+              <a:defRPr sz="1500" b="1">
+                <a:solidFill>
+                  <a:srgbClr val="20E3B2"/>
+                </a:solidFill>
+                <a:latin typeface="Arial"/>
+              </a:defRPr>
+            </a:pPr>
+            <a:r>
+              <a:t>Step-by-Step Lab 4 Instructions</a:t>
+            </a:r>
+          </a:p>
+          <a:p>
+            <a:pPr>
+              <a:spcAft>
+                <a:spcPts val="650"/>
+              </a:spcAft>
+              <a:defRPr sz="1130">
+                <a:solidFill>
+                  <a:srgbClr val="F0F6FC"/>
+                </a:solidFill>
+                <a:latin typeface="Arial"/>
+              </a:defRPr>
+            </a:pPr>
+            <a:r>
+              <a:t>▸  Step 1 (Initialize Lab 04): Run `./labs/lab-04-multi-agent-capstone/install.sh`.</a:t>
+            </a:r>
+          </a:p>
+          <a:p>
+            <a:pPr>
+              <a:spcAft>
+                <a:spcPts val="650"/>
+              </a:spcAft>
+              <a:defRPr sz="1130">
+                <a:solidFill>
+                  <a:srgbClr val="F0F6FC"/>
+                </a:solidFill>
+                <a:latin typeface="Arial"/>
+              </a:defRPr>
+            </a:pPr>
+            <a:r>
+              <a:t>▸  Step 2 (Omnichannel Fulfillment Router): Implement `evaluate_candidates()` and `optimize_at_risk_orders()` in `src/services/fulfillment_router.py` (rerouting 35 VIP orders by highest post-shipping net margin).</a:t>
+            </a:r>
+          </a:p>
+          <a:p>
+            <a:pPr>
+              <a:spcAft>
+                <a:spcPts val="650"/>
+              </a:spcAft>
+              <a:defRPr sz="1130">
+                <a:solidFill>
+                  <a:srgbClr val="F0F6FC"/>
+                </a:solidFill>
+                <a:latin typeface="Arial"/>
+              </a:defRPr>
+            </a:pPr>
+            <a:r>
+              <a:t>▸  Step 3 (Google ADK &amp; A2A Orchestrator): Complete `src/agents/adk_a2a_orchestrator.py` (`WMSInventoryATPAgent`, `MerchandisingMarginOTIFAgent`, `RetailPulseOrchestratorAgent`, `GET /.well-known/agent.json`, `POST /api/v1/a2a`).</a:t>
+            </a:r>
+          </a:p>
+          <a:p>
+            <a:pPr>
+              <a:spcAft>
+                <a:spcPts val="650"/>
+              </a:spcAft>
+              <a:defRPr sz="1130">
+                <a:solidFill>
+                  <a:srgbClr val="F0F6FC"/>
+                </a:solidFill>
+                <a:latin typeface="Arial"/>
+              </a:defRPr>
+            </a:pPr>
+            <a:r>
+              <a:t>▸  Step 4 (Local ADK Dev UI): Run `./scripts/run_adk_web.sh --port 8080` and test `retail_pulse` interactively at `http://localhost:8080`.</a:t>
+            </a:r>
+          </a:p>
+          <a:p>
+            <a:pPr>
+              <a:spcAft>
+                <a:spcPts val="650"/>
+              </a:spcAft>
+              <a:defRPr sz="1130">
+                <a:solidFill>
+                  <a:srgbClr val="F0F6FC"/>
+                </a:solidFill>
+                <a:latin typeface="Arial"/>
+              </a:defRPr>
+            </a:pPr>
+            <a:r>
+              <a:t>▸  Step 5 (Terraform &amp; Full Verification): Run `./labs/lab-04-multi-agent-capstone/deploy_gcp.sh --dry-run` and `./labs/lab-04-multi-agent-capstone/verify.sh` (**20/20 tests pass!**).</a:t>
+            </a:r>
+          </a:p>
+        </p:txBody>
+      </p:sp>
+      <p:sp>
+        <p:nvSpPr>
+          <p:cNvPr id="11" name="Rounded Rectangle 10"/>
+          <p:cNvSpPr/>
+          <p:nvPr/>
+        </p:nvSpPr>
+        <p:spPr>
+          <a:xfrm>
+            <a:off x="6199632" y="1755648"/>
+            <a:ext cx="5486400" cy="4160520"/>
+          </a:xfrm>
+          <a:prstGeom prst="roundRect">
+            <a:avLst/>
+          </a:prstGeom>
+          <a:solidFill>
+            <a:srgbClr val="161B22"/>
+          </a:solidFill>
+          <a:ln w="19050">
+            <a:solidFill>
+              <a:srgbClr val="30363D"/>
+            </a:solidFill>
+          </a:ln>
+        </p:spPr>
+        <p:style>
+          <a:lnRef idx="1">
+            <a:schemeClr val="accent1"/>
+          </a:lnRef>
+          <a:fillRef idx="3">
+            <a:schemeClr val="accent1"/>
+          </a:fillRef>
+          <a:effectRef idx="2">
+            <a:schemeClr val="accent1"/>
+          </a:effectRef>
+          <a:fontRef idx="minor">
+            <a:schemeClr val="lt1"/>
+          </a:fontRef>
+        </p:style>
+        <p:txBody>
+          <a:bodyPr rtlCol="0" anchor="ctr"/>
+          <a:lstStyle/>
+          <a:p>
+            <a:pPr algn="ctr"/>
+          </a:p>
+        </p:txBody>
+      </p:sp>
+      <p:sp>
+        <p:nvSpPr>
+          <p:cNvPr id="12" name="Rectangle 11"/>
+          <p:cNvSpPr/>
+          <p:nvPr/>
+        </p:nvSpPr>
+        <p:spPr>
+          <a:xfrm>
+            <a:off x="6199632" y="1755648"/>
+            <a:ext cx="5486400" cy="64008"/>
+          </a:xfrm>
+          <a:prstGeom prst="rect">
+            <a:avLst/>
+          </a:prstGeom>
+          <a:solidFill>
+            <a:srgbClr val="3FB950"/>
+          </a:solidFill>
+          <a:ln>
+            <a:noFill/>
+          </a:ln>
+        </p:spPr>
+        <p:style>
+          <a:lnRef idx="1">
+            <a:schemeClr val="accent1"/>
+          </a:lnRef>
+          <a:fillRef idx="3">
+            <a:schemeClr val="accent1"/>
+          </a:fillRef>
+          <a:effectRef idx="2">
+            <a:schemeClr val="accent1"/>
+          </a:effectRef>
+          <a:fontRef idx="minor">
+            <a:schemeClr val="lt1"/>
+          </a:fontRef>
+        </p:style>
+        <p:txBody>
+          <a:bodyPr rtlCol="0" anchor="ctr"/>
+          <a:lstStyle/>
+          <a:p>
+            <a:pPr algn="ctr"/>
+          </a:p>
+        </p:txBody>
+      </p:sp>
+      <p:sp>
+        <p:nvSpPr>
+          <p:cNvPr id="13" name="TextBox 12"/>
+          <p:cNvSpPr txBox="1"/>
+          <p:nvPr/>
+        </p:nvSpPr>
+        <p:spPr>
+          <a:xfrm>
+            <a:off x="6400800" y="1901952"/>
+            <a:ext cx="5084064" cy="3922776"/>
+          </a:xfrm>
+          <a:prstGeom prst="rect">
+            <a:avLst/>
+          </a:prstGeom>
+          <a:noFill/>
+        </p:spPr>
+        <p:txBody>
+          <a:bodyPr wrap="square">
+            <a:spAutoFit/>
+          </a:bodyPr>
+          <a:lstStyle/>
+          <a:p>
+            <a:pPr>
+              <a:spcAft>
+                <a:spcPts val="800"/>
+              </a:spcAft>
+              <a:defRPr sz="1500" b="1">
+                <a:solidFill>
+                  <a:srgbClr val="3FB950"/>
+                </a:solidFill>
+                <a:latin typeface="Arial"/>
+              </a:defRPr>
+            </a:pPr>
+            <a:r>
+              <a:t>Copy-Paste Prompts, `adk web` &amp; Cloud Commands</a:t>
+            </a:r>
+          </a:p>
+          <a:p>
+            <a:pPr>
+              <a:spcAft>
+                <a:spcPts val="650"/>
+              </a:spcAft>
+              <a:defRPr sz="1130">
+                <a:solidFill>
+                  <a:srgbClr val="F0F6FC"/>
+                </a:solidFill>
+                <a:latin typeface="Arial"/>
+              </a:defRPr>
+            </a:pPr>
+            <a:r>
+              <a:t>▸  Prompt 1 — Fulfillment Router: '/plan Implement evaluate_candidates and optimize_at_risk_orders in @src/services/fulfillment_router.py ranking nodes by (-post_shipping_net_margin_usd, shipping_cost_usd, DC priority).'</a:t>
+            </a:r>
+          </a:p>
+          <a:p>
+            <a:pPr>
+              <a:spcAft>
+                <a:spcPts val="650"/>
+              </a:spcAft>
+              <a:defRPr sz="1130">
+                <a:solidFill>
+                  <a:srgbClr val="F0F6FC"/>
+                </a:solidFill>
+                <a:latin typeface="Arial"/>
+              </a:defRPr>
+            </a:pPr>
+            <a:r>
+              <a:t>▸  Prompt 2 — ADK + A2A Orchestrator: '/teamwork Implement WMSInventoryATPAgent, MerchandisingMarginOTIFAgent, RetailPulseOrchestratorAgent, build_a2a_agent_card, and handle_a2a_jsonrpc in @src/agents/adk_a2a_orchestrator.py.'</a:t>
+            </a:r>
+          </a:p>
+          <a:p>
+            <a:pPr>
+              <a:spcAft>
+                <a:spcPts val="650"/>
+              </a:spcAft>
+              <a:defRPr sz="1130">
+                <a:solidFill>
+                  <a:srgbClr val="F0F6FC"/>
+                </a:solidFill>
+                <a:latin typeface="Arial"/>
+              </a:defRPr>
+            </a:pPr>
+            <a:r>
+              <a:t>▸  Prompt 3 — Interactive `adk web` (http://localhost:8080): 'Execute omnichannel remediation: enforce 15% margin floor, reroute all 35 VIP orders, and claim OTIF vendor chargebacks.'</a:t>
+            </a:r>
+          </a:p>
+          <a:p>
+            <a:pPr>
+              <a:spcAft>
+                <a:spcPts val="650"/>
+              </a:spcAft>
+              <a:defRPr sz="1130">
+                <a:solidFill>
+                  <a:srgbClr val="F0F6FC"/>
+                </a:solidFill>
+                <a:latin typeface="Arial"/>
+              </a:defRPr>
+            </a:pPr>
+            <a:r>
+              <a:t>▸  Cloud Deploy &amp; Verify: Run `./labs/lab-04-multi-agent-capstone/deploy_gcp.sh --dry-run` and `./labs/lab-04-multi-agent-capstone/verify.sh`.</a:t>
+            </a:r>
+          </a:p>
+        </p:txBody>
+      </p:sp>
+      <p:sp>
+        <p:nvSpPr>
+          <p:cNvPr id="14" name="Rectangle 13"/>
+          <p:cNvSpPr/>
+          <p:nvPr/>
+        </p:nvSpPr>
+        <p:spPr>
+          <a:xfrm>
+            <a:off x="502920" y="6108192"/>
+            <a:ext cx="11183112" cy="475488"/>
+          </a:xfrm>
+          <a:prstGeom prst="rect">
+            <a:avLst/>
+          </a:prstGeom>
+          <a:solidFill>
+            <a:srgbClr val="161B22"/>
+          </a:solidFill>
+          <a:ln w="12700">
+            <a:solidFill>
+              <a:srgbClr val="30363D"/>
+            </a:solidFill>
+          </a:ln>
+        </p:spPr>
+        <p:style>
+          <a:lnRef idx="1">
+            <a:schemeClr val="accent1"/>
+          </a:lnRef>
+          <a:fillRef idx="3">
+            <a:schemeClr val="accent1"/>
+          </a:fillRef>
+          <a:effectRef idx="2">
+            <a:schemeClr val="accent1"/>
+          </a:effectRef>
+          <a:fontRef idx="minor">
+            <a:schemeClr val="lt1"/>
+          </a:fontRef>
+        </p:style>
+        <p:txBody>
+          <a:bodyPr rtlCol="0" anchor="ctr"/>
+          <a:lstStyle/>
+          <a:p>
+            <a:pPr algn="ctr"/>
+          </a:p>
+        </p:txBody>
+      </p:sp>
+      <p:sp>
+        <p:nvSpPr>
+          <p:cNvPr id="15" name="TextBox 14"/>
+          <p:cNvSpPr txBox="1"/>
+          <p:nvPr/>
+        </p:nvSpPr>
+        <p:spPr>
+          <a:xfrm>
+            <a:off x="685800" y="6172200"/>
+            <a:ext cx="10789920" cy="347472"/>
+          </a:xfrm>
+          <a:prstGeom prst="rect">
+            <a:avLst/>
+          </a:prstGeom>
+          <a:noFill/>
+        </p:spPr>
+        <p:txBody>
+          <a:bodyPr wrap="square">
+            <a:spAutoFit/>
+          </a:bodyPr>
+          <a:lstStyle/>
+          <a:p>
+            <a:pPr>
+              <a:defRPr sz="1150" b="1">
+                <a:solidFill>
+                  <a:srgbClr val="20E3B2"/>
+                </a:solidFill>
+                <a:latin typeface="Arial"/>
+              </a:defRPr>
+            </a:pPr>
+            <a:r>
+              <a:t>Delivered by Tryolabs • Self-Healing Checkpoint: ./labs/lab-04-multi-agent-capstone/apply_solution.sh    |    Slide 15/15</a:t>
             </a:r>
           </a:p>
         </p:txBody>
@@ -6031,7 +8825,7 @@
           <a:lstStyle/>
           <a:p>
             <a:pPr>
-              <a:defRPr sz="2400" b="1">
+              <a:defRPr sz="2250" b="1">
                 <a:solidFill>
                   <a:srgbClr val="F0F6FC"/>
                 </a:solidFill>
@@ -6067,7 +8861,7 @@
           <a:lstStyle/>
           <a:p>
             <a:pPr>
-              <a:defRPr sz="1350">
+              <a:defRPr sz="1300">
                 <a:solidFill>
                   <a:srgbClr val="8B949E"/>
                 </a:solidFill>
@@ -6200,8 +8994,8 @@
         </p:nvSpPr>
         <p:spPr>
           <a:xfrm>
-            <a:off x="6537960" y="1920240"/>
-            <a:ext cx="4919472" cy="3886200"/>
+            <a:off x="6510528" y="1901952"/>
+            <a:ext cx="4974336" cy="3922776"/>
           </a:xfrm>
           <a:prstGeom prst="rect">
             <a:avLst/>
@@ -6216,25 +9010,25 @@
           <a:p>
             <a:pPr>
               <a:spcAft>
-                <a:spcPts val="1000"/>
-              </a:spcAft>
-              <a:defRPr sz="1600" b="1">
-                <a:solidFill>
-                  <a:srgbClr val="58A6FF"/>
-                </a:solidFill>
-                <a:latin typeface="Arial"/>
-              </a:defRPr>
-            </a:pPr>
-            <a:r>
-              <a:t>Minute-by-Minute Workshop Schedule</a:t>
-            </a:r>
-          </a:p>
-          <a:p>
-            <a:pPr>
-              <a:spcAft>
                 <a:spcPts val="800"/>
               </a:spcAft>
-              <a:defRPr sz="1220">
+              <a:defRPr sz="1500" b="1">
+                <a:solidFill>
+                  <a:srgbClr val="58A6FF"/>
+                </a:solidFill>
+                <a:latin typeface="Arial"/>
+              </a:defRPr>
+            </a:pPr>
+            <a:r>
+              <a:t>Minute-by-Minute Workshop Schedule</a:t>
+            </a:r>
+          </a:p>
+          <a:p>
+            <a:pPr>
+              <a:spcAft>
+                <a:spcPts val="650"/>
+              </a:spcAft>
+              <a:defRPr sz="1130">
                 <a:solidFill>
                   <a:srgbClr val="F0F6FC"/>
                 </a:solidFill>
@@ -6248,9 +9042,9 @@
           <a:p>
             <a:pPr>
               <a:spcAft>
-                <a:spcPts val="800"/>
+                <a:spcPts val="650"/>
               </a:spcAft>
-              <a:defRPr sz="1220">
+              <a:defRPr sz="1130">
                 <a:solidFill>
                   <a:srgbClr val="F0F6FC"/>
                 </a:solidFill>
@@ -6264,9 +9058,9 @@
           <a:p>
             <a:pPr>
               <a:spcAft>
-                <a:spcPts val="800"/>
+                <a:spcPts val="650"/>
               </a:spcAft>
-              <a:defRPr sz="1220">
+              <a:defRPr sz="1130">
                 <a:solidFill>
                   <a:srgbClr val="F0F6FC"/>
                 </a:solidFill>
@@ -6280,9 +9074,9 @@
           <a:p>
             <a:pPr>
               <a:spcAft>
-                <a:spcPts val="800"/>
+                <a:spcPts val="650"/>
               </a:spcAft>
-              <a:defRPr sz="1220">
+              <a:defRPr sz="1130">
                 <a:solidFill>
                   <a:srgbClr val="F0F6FC"/>
                 </a:solidFill>
@@ -6296,9 +9090,9 @@
           <a:p>
             <a:pPr>
               <a:spcAft>
-                <a:spcPts val="800"/>
+                <a:spcPts val="650"/>
               </a:spcAft>
-              <a:defRPr sz="1220">
+              <a:defRPr sz="1130">
                 <a:solidFill>
                   <a:srgbClr val="F0F6FC"/>
                 </a:solidFill>
@@ -6387,7 +9181,7 @@
               </a:defRPr>
             </a:pPr>
             <a:r>
-              <a:t>Every lab includes README.md, PROMPTS.md (optimized Antigravity prompts), install.sh, and verify.sh.    |    Slide 2/11</a:t>
+              <a:t>Every lab includes LAB_0X_INSTRUCTIONS_EN.pdf, README.md, PROMPTS.md, install.sh, and verify.sh.    |    Slide 2/15</a:t>
             </a:r>
           </a:p>
         </p:txBody>
@@ -6579,7 +9373,7 @@
           <a:lstStyle/>
           <a:p>
             <a:pPr>
-              <a:defRPr sz="2400" b="1">
+              <a:defRPr sz="2250" b="1">
                 <a:solidFill>
                   <a:srgbClr val="F0F6FC"/>
                 </a:solidFill>
@@ -6615,7 +9409,7 @@
           <a:lstStyle/>
           <a:p>
             <a:pPr>
-              <a:defRPr sz="1350">
+              <a:defRPr sz="1300">
                 <a:solidFill>
                   <a:srgbClr val="8B949E"/>
                 </a:solidFill>
@@ -6748,8 +9542,8 @@
         </p:nvSpPr>
         <p:spPr>
           <a:xfrm>
-            <a:off x="6537960" y="1920240"/>
-            <a:ext cx="4919472" cy="3886200"/>
+            <a:off x="6510528" y="1901952"/>
+            <a:ext cx="4974336" cy="3922776"/>
           </a:xfrm>
           <a:prstGeom prst="rect">
             <a:avLst/>
@@ -6764,25 +9558,25 @@
           <a:p>
             <a:pPr>
               <a:spcAft>
-                <a:spcPts val="1000"/>
-              </a:spcAft>
-              <a:defRPr sz="1600" b="1">
-                <a:solidFill>
-                  <a:srgbClr val="BC8CFF"/>
-                </a:solidFill>
-                <a:latin typeface="Arial"/>
-              </a:defRPr>
-            </a:pPr>
-            <a:r>
-              <a:t>The 5-Stage Internal Execution Loop</a:t>
-            </a:r>
-          </a:p>
-          <a:p>
-            <a:pPr>
-              <a:spcAft>
                 <a:spcPts val="800"/>
               </a:spcAft>
-              <a:defRPr sz="1220">
+              <a:defRPr sz="1500" b="1">
+                <a:solidFill>
+                  <a:srgbClr val="BC8CFF"/>
+                </a:solidFill>
+                <a:latin typeface="Arial"/>
+              </a:defRPr>
+            </a:pPr>
+            <a:r>
+              <a:t>The 5-Stage Internal Execution Loop</a:t>
+            </a:r>
+          </a:p>
+          <a:p>
+            <a:pPr>
+              <a:spcAft>
+                <a:spcPts val="650"/>
+              </a:spcAft>
+              <a:defRPr sz="1130">
                 <a:solidFill>
                   <a:srgbClr val="F0F6FC"/>
                 </a:solidFill>
@@ -6796,9 +9590,9 @@
           <a:p>
             <a:pPr>
               <a:spcAft>
-                <a:spcPts val="800"/>
+                <a:spcPts val="650"/>
               </a:spcAft>
-              <a:defRPr sz="1220">
+              <a:defRPr sz="1130">
                 <a:solidFill>
                   <a:srgbClr val="F0F6FC"/>
                 </a:solidFill>
@@ -6812,9 +9606,9 @@
           <a:p>
             <a:pPr>
               <a:spcAft>
-                <a:spcPts val="800"/>
+                <a:spcPts val="650"/>
               </a:spcAft>
-              <a:defRPr sz="1220">
+              <a:defRPr sz="1130">
                 <a:solidFill>
                   <a:srgbClr val="F0F6FC"/>
                 </a:solidFill>
@@ -6828,9 +9622,9 @@
           <a:p>
             <a:pPr>
               <a:spcAft>
-                <a:spcPts val="800"/>
+                <a:spcPts val="650"/>
               </a:spcAft>
-              <a:defRPr sz="1220">
+              <a:defRPr sz="1130">
                 <a:solidFill>
                   <a:srgbClr val="F0F6FC"/>
                 </a:solidFill>
@@ -6844,9 +9638,9 @@
           <a:p>
             <a:pPr>
               <a:spcAft>
-                <a:spcPts val="800"/>
+                <a:spcPts val="650"/>
               </a:spcAft>
-              <a:defRPr sz="1220">
+              <a:defRPr sz="1130">
                 <a:solidFill>
                   <a:srgbClr val="F0F6FC"/>
                 </a:solidFill>
@@ -6935,7 +9729,7 @@
               </a:defRPr>
             </a:pPr>
             <a:r>
-              <a:t>Key Insight: Antigravity is not just chat—it is a stateful, verifiable closed-loop engineering runtime.    |    Slide 3/11</a:t>
+              <a:t>Key Insight: Antigravity is not just chat—it is a stateful, verifiable closed-loop engineering runtime.    |    Slide 3/15</a:t>
             </a:r>
           </a:p>
         </p:txBody>
@@ -7127,7 +9921,7 @@
           <a:lstStyle/>
           <a:p>
             <a:pPr>
-              <a:defRPr sz="2400" b="1">
+              <a:defRPr sz="2250" b="1">
                 <a:solidFill>
                   <a:srgbClr val="F0F6FC"/>
                 </a:solidFill>
@@ -7163,7 +9957,7 @@
           <a:lstStyle/>
           <a:p>
             <a:pPr>
-              <a:defRPr sz="1350">
+              <a:defRPr sz="1300">
                 <a:solidFill>
                   <a:srgbClr val="8B949E"/>
                 </a:solidFill>
@@ -7296,8 +10090,8 @@
         </p:nvSpPr>
         <p:spPr>
           <a:xfrm>
-            <a:off x="6537960" y="1920240"/>
-            <a:ext cx="4919472" cy="3886200"/>
+            <a:off x="6510528" y="1901952"/>
+            <a:ext cx="4974336" cy="3922776"/>
           </a:xfrm>
           <a:prstGeom prst="rect">
             <a:avLst/>
@@ -7312,25 +10106,25 @@
           <a:p>
             <a:pPr>
               <a:spcAft>
-                <a:spcPts val="1000"/>
-              </a:spcAft>
-              <a:defRPr sz="1600" b="1">
-                <a:solidFill>
-                  <a:srgbClr val="58A6FF"/>
-                </a:solidFill>
-                <a:latin typeface="Arial"/>
-              </a:defRPr>
-            </a:pPr>
-            <a:r>
-              <a:t>Features You Will Explore Today</a:t>
-            </a:r>
-          </a:p>
-          <a:p>
-            <a:pPr>
-              <a:spcAft>
                 <a:spcPts val="800"/>
               </a:spcAft>
-              <a:defRPr sz="1220">
+              <a:defRPr sz="1500" b="1">
+                <a:solidFill>
+                  <a:srgbClr val="58A6FF"/>
+                </a:solidFill>
+                <a:latin typeface="Arial"/>
+              </a:defRPr>
+            </a:pPr>
+            <a:r>
+              <a:t>Features You Will Explore Today</a:t>
+            </a:r>
+          </a:p>
+          <a:p>
+            <a:pPr>
+              <a:spcAft>
+                <a:spcPts val="650"/>
+              </a:spcAft>
+              <a:defRPr sz="1130">
                 <a:solidFill>
                   <a:srgbClr val="F0F6FC"/>
                 </a:solidFill>
@@ -7344,9 +10138,9 @@
           <a:p>
             <a:pPr>
               <a:spcAft>
-                <a:spcPts val="800"/>
+                <a:spcPts val="650"/>
               </a:spcAft>
-              <a:defRPr sz="1220">
+              <a:defRPr sz="1130">
                 <a:solidFill>
                   <a:srgbClr val="F0F6FC"/>
                 </a:solidFill>
@@ -7360,9 +10154,9 @@
           <a:p>
             <a:pPr>
               <a:spcAft>
-                <a:spcPts val="800"/>
+                <a:spcPts val="650"/>
               </a:spcAft>
-              <a:defRPr sz="1220">
+              <a:defRPr sz="1130">
                 <a:solidFill>
                   <a:srgbClr val="F0F6FC"/>
                 </a:solidFill>
@@ -7376,9 +10170,9 @@
           <a:p>
             <a:pPr>
               <a:spcAft>
-                <a:spcPts val="800"/>
+                <a:spcPts val="650"/>
               </a:spcAft>
-              <a:defRPr sz="1220">
+              <a:defRPr sz="1130">
                 <a:solidFill>
                   <a:srgbClr val="F0F6FC"/>
                 </a:solidFill>
@@ -7392,9 +10186,9 @@
           <a:p>
             <a:pPr>
               <a:spcAft>
-                <a:spcPts val="800"/>
+                <a:spcPts val="650"/>
               </a:spcAft>
-              <a:defRPr sz="1220">
+              <a:defRPr sz="1130">
                 <a:solidFill>
                   <a:srgbClr val="F0F6FC"/>
                 </a:solidFill>
@@ -7483,7 +10277,7 @@
               </a:defRPr>
             </a:pPr>
             <a:r>
-              <a:t>Pro Tip: Start complex tasks with /plan and @file mentions; use Cmd+I for localized formula fixes.    |    Slide 4/11</a:t>
+              <a:t>Pro Tip: Start complex tasks with /plan and @file mentions; use Cmd+I for localized formula fixes.    |    Slide 4/15</a:t>
             </a:r>
           </a:p>
         </p:txBody>
@@ -7647,7 +10441,7 @@
               </a:defRPr>
             </a:pPr>
             <a:r>
-              <a:t>HANDS-ON LAB 1 (52 MINUTES) • TRIAGE &amp; RECOVERY</a:t>
+              <a:t>HANDS-ON LAB 1 (PART 1/2) • OBJECTIVES &amp; WHAT YOU WILL BUILD</a:t>
             </a:r>
           </a:p>
         </p:txBody>
@@ -7675,7 +10469,7 @@
           <a:lstStyle/>
           <a:p>
             <a:pPr>
-              <a:defRPr sz="2400" b="1">
+              <a:defRPr sz="2250" b="1">
                 <a:solidFill>
                   <a:srgbClr val="F0F6FC"/>
                 </a:solidFill>
@@ -7683,7 +10477,7 @@
               </a:defRPr>
             </a:pPr>
             <a:r>
-              <a:t>Lab 1: Root-Cause Triage &amp; Revenue/Margin Leakage Recovery</a:t>
+              <a:t>Lab 1: Promo Margin Floor &amp; True ATP Triage — Objectives &amp; Build Spec</a:t>
             </a:r>
           </a:p>
         </p:txBody>
@@ -7711,7 +10505,7 @@
           <a:lstStyle/>
           <a:p>
             <a:pPr>
-              <a:defRPr sz="1350">
+              <a:defRPr sz="1300">
                 <a:solidFill>
                   <a:srgbClr val="8B949E"/>
                 </a:solidFill>
@@ -7719,7 +10513,7 @@
               </a:defRPr>
             </a:pPr>
             <a:r>
-              <a:t>Use Antigravity (/plan, @mentions, Cmd+I, pytest) to diagnose and fix two high-impact bugs</a:t>
+              <a:t>52 Minutes • Printable PDF Guide: labs/lab-01-margin-inventory-triage/LAB_01_INSTRUCTIONS_EN.pdf</a:t>
             </a:r>
           </a:p>
         </p:txBody>
@@ -7844,8 +10638,8 @@
         </p:nvSpPr>
         <p:spPr>
           <a:xfrm>
-            <a:off x="6537960" y="1920240"/>
-            <a:ext cx="4919472" cy="3886200"/>
+            <a:off x="6510528" y="1901952"/>
+            <a:ext cx="4974336" cy="3922776"/>
           </a:xfrm>
           <a:prstGeom prst="rect">
             <a:avLst/>
@@ -7860,25 +10654,25 @@
           <a:p>
             <a:pPr>
               <a:spcAft>
-                <a:spcPts val="1000"/>
-              </a:spcAft>
-              <a:defRPr sz="1600" b="1">
-                <a:solidFill>
-                  <a:srgbClr val="D29922"/>
-                </a:solidFill>
-                <a:latin typeface="Arial"/>
-              </a:defRPr>
-            </a:pPr>
-            <a:r>
-              <a:t>Lab 1 Walkthrough &amp; Optimized Prompts</a:t>
-            </a:r>
-          </a:p>
-          <a:p>
-            <a:pPr>
-              <a:spcAft>
                 <a:spcPts val="800"/>
               </a:spcAft>
-              <a:defRPr sz="1220">
+              <a:defRPr sz="1500" b="1">
+                <a:solidFill>
+                  <a:srgbClr val="D29922"/>
+                </a:solidFill>
+                <a:latin typeface="Arial"/>
+              </a:defRPr>
+            </a:pPr>
+            <a:r>
+              <a:t>Lab 1 Objectives &amp; What You Will Build</a:t>
+            </a:r>
+          </a:p>
+          <a:p>
+            <a:pPr>
+              <a:spcAft>
+                <a:spcPts val="650"/>
+              </a:spcAft>
+              <a:defRPr sz="1130">
                 <a:solidFill>
                   <a:srgbClr val="F0F6FC"/>
                 </a:solidFill>
@@ -7886,15 +10680,15 @@
               </a:defRPr>
             </a:pPr>
             <a:r>
-              <a:t>▸  Setup: Run ./labs/lab-01-margin-inventory-triage/install.sh &amp; open http://localhost:8002</a:t>
+              <a:t>▸  Objective 1 (Multi-File Agentic Triage): Master Antigravity `@mentions`, `/plan`, and inline `Cmd/Ctrl+I` to correlate POS/WMS webhook streams (`pos_wms_webhooks.jsonl`) with pricing and ATP inventory code.</a:t>
             </a:r>
           </a:p>
           <a:p>
             <a:pPr>
               <a:spcAft>
-                <a:spcPts val="800"/>
+                <a:spcPts val="650"/>
               </a:spcAft>
-              <a:defRPr sz="1220">
+              <a:defRPr sz="1130">
                 <a:solidFill>
                   <a:srgbClr val="F0F6FC"/>
                 </a:solidFill>
@@ -7902,15 +10696,15 @@
               </a:defRPr>
             </a:pPr>
             <a:r>
-              <a:t>▸  Bug #1 (Commercial Margin Bleed): src/services/promo_pricing.py stacks non-stackable promos and fails to clamp net price to the 15% margin floor (-$35,113.25 bleed)</a:t>
+              <a:t>▸  Objective 2 (Margin &amp; VIP Stockout Recovery): Stop `$35,113.25` in negative margin bleed across 30 orders and accurately flag 35 `DIAMOND`/`GOLD` VIP orders (`&gt;$250K` LTV) at phantom-stock nodes.</a:t>
             </a:r>
           </a:p>
           <a:p>
             <a:pPr>
               <a:spcAft>
-                <a:spcPts val="800"/>
+                <a:spcPts val="650"/>
               </a:spcAft>
-              <a:defRPr sz="1220">
+              <a:defRPr sz="1130">
                 <a:solidFill>
                   <a:srgbClr val="F0F6FC"/>
                 </a:solidFill>
@@ -7918,15 +10712,15 @@
               </a:defRPr>
             </a:pPr>
             <a:r>
-              <a:t>▸  Bug #2 (Technical ATP Oversell): src/services/inventory_atp.py ignores reserved_bopis_qty, damaged_hold_qty &amp; safety_stock_qty (35 VIP orders at risk)</a:t>
+              <a:t>▸  What You Will Build #1 (GS1 &amp; Margin-Floor Pricing Engine): Refactor `src/services/promo_pricing.py` to validate GS1 `gtin_14` Modulo-10, use `Decimal(ROUND_HALF_UP)`, compound stackable promos multiplicatively, and clamp net price to the `15%` margin floor.</a:t>
             </a:r>
           </a:p>
           <a:p>
             <a:pPr>
               <a:spcAft>
-                <a:spcPts val="800"/>
+                <a:spcPts val="650"/>
               </a:spcAft>
-              <a:defRPr sz="1220">
+              <a:defRPr sz="1130">
                 <a:solidFill>
                   <a:srgbClr val="F0F6FC"/>
                 </a:solidFill>
@@ -7934,15 +10728,15 @@
               </a:defRPr>
             </a:pPr>
             <a:r>
-              <a:t>▸  Prompt 1 (/plan): '/plan Inspect @src/services/promo_pricing.py, @src/services/inventory_atp.py and @tests/test_lab01_triage.py to diagnose the margin and ATP bugs'</a:t>
+              <a:t>▸  What You Will Build #2 (Real-Time True ATP Engine): Refactor `src/services/inventory_atp.py` to compute `raw_atp = on_hand - reserved - safety_stock - unprocessed_webhook_delta_qty`.</a:t>
             </a:r>
           </a:p>
           <a:p>
             <a:pPr>
               <a:spcAft>
-                <a:spcPts val="800"/>
+                <a:spcPts val="650"/>
               </a:spcAft>
-              <a:defRPr sz="1220">
+              <a:defRPr sz="1130">
                 <a:solidFill>
                   <a:srgbClr val="F0F6FC"/>
                 </a:solidFill>
@@ -7950,7 +10744,7 @@
               </a:defRPr>
             </a:pPr>
             <a:r>
-              <a:t>▸  Prompt 2 (Cmd+I &amp; Fix): Use Inline Cmd+I to fix Decimal math, then run ./labs/lab-01-margin-inventory-triage/verify.sh</a:t>
+              <a:t>▸  Deliverable &amp; Verification: Pass all 5 unit/integration tests in `tests/test_lab01_triage.py` (`./labs/lab-01-margin-inventory-triage/verify.sh`) and inspect `http://localhost:8002`.</a:t>
             </a:r>
           </a:p>
         </p:txBody>
@@ -8031,7 +10825,7 @@
               </a:defRPr>
             </a:pPr>
             <a:r>
-              <a:t>Open PROMPTS.md inside labs/lab-01-* for copy-pasteable prompts across Discovery, /plan, Cmd+I &amp; Verification.    |    Slide 5/11</a:t>
+              <a:t>Delivered by Tryolabs • Full printable guide: LAB_01_INSTRUCTIONS_EN.pdf    |    Slide 5/15</a:t>
             </a:r>
           </a:p>
         </p:txBody>
@@ -8195,7 +10989,7 @@
               </a:defRPr>
             </a:pPr>
             <a:r>
-              <a:t>THEORY MODULE 2 (6 MINUTES) • CUSTOMIZATION ARCHITECTURE</a:t>
+              <a:t>HANDS-ON LAB 1 (PART 2/2) • STEP-BY-STEP INSTRUCTIONS &amp; PROMPTS</a:t>
             </a:r>
           </a:p>
         </p:txBody>
@@ -8223,7 +11017,7 @@
           <a:lstStyle/>
           <a:p>
             <a:pPr>
-              <a:defRPr sz="2400" b="1">
+              <a:defRPr sz="2250" b="1">
                 <a:solidFill>
                   <a:srgbClr val="F0F6FC"/>
                 </a:solidFill>
@@ -8231,7 +11025,7 @@
               </a:defRPr>
             </a:pPr>
             <a:r>
-              <a:t>How Rules &amp; Progressive Disclosure Skills Work Internally</a:t>
+              <a:t>Lab 1 Instructions &amp; Copy-Paste Antigravity Prompts</a:t>
             </a:r>
           </a:p>
         </p:txBody>
@@ -8259,7 +11053,7 @@
           <a:lstStyle/>
           <a:p>
             <a:pPr>
-              <a:defRPr sz="1350">
+              <a:defRPr sz="1300">
                 <a:solidFill>
                   <a:srgbClr val="8B949E"/>
                 </a:solidFill>
@@ -8267,45 +11061,21 @@
               </a:defRPr>
             </a:pPr>
             <a:r>
-              <a:t>Specializing Antigravity for your industry without overflowing the context window</a:t>
-            </a:r>
-          </a:p>
-        </p:txBody>
-      </p:sp>
-      <p:pic>
-        <p:nvPicPr>
-          <p:cNvPr id="8" name="Picture 7" descr="customizations_en.png"/>
-          <p:cNvPicPr>
-            <a:picLocks noChangeAspect="1"/>
-          </p:cNvPicPr>
-          <p:nvPr/>
-        </p:nvPicPr>
-        <p:blipFill>
-          <a:blip r:embed="rId3"/>
-          <a:stretch>
-            <a:fillRect/>
-          </a:stretch>
-        </p:blipFill>
+              <a:t>Follow Steps 1–5 on the left and copy-paste prompts from labs/lab-01-margin-inventory-triage/PROMPTS.md</a:t>
+            </a:r>
+          </a:p>
+        </p:txBody>
+      </p:sp>
+      <p:sp>
+        <p:nvSpPr>
+          <p:cNvPr id="8" name="Rounded Rectangle 7"/>
+          <p:cNvSpPr/>
+          <p:nvPr/>
+        </p:nvSpPr>
         <p:spPr>
           <a:xfrm>
             <a:off x="502920" y="1755648"/>
-            <a:ext cx="5623560" cy="3186684"/>
-          </a:xfrm>
-          <a:prstGeom prst="rect">
-            <a:avLst/>
-          </a:prstGeom>
-        </p:spPr>
-      </p:pic>
-      <p:sp>
-        <p:nvSpPr>
-          <p:cNvPr id="9" name="Rounded Rectangle 8"/>
-          <p:cNvSpPr/>
-          <p:nvPr/>
-        </p:nvSpPr>
-        <p:spPr>
-          <a:xfrm>
-            <a:off x="6309360" y="1755648"/>
-            <a:ext cx="5376672" cy="4160520"/>
+            <a:ext cx="5504688" cy="4160520"/>
           </a:xfrm>
           <a:prstGeom prst="roundRect">
             <a:avLst/>
@@ -8343,20 +11113,20 @@
       </p:sp>
       <p:sp>
         <p:nvSpPr>
-          <p:cNvPr id="10" name="Rectangle 9"/>
+          <p:cNvPr id="9" name="Rectangle 8"/>
           <p:cNvSpPr/>
           <p:nvPr/>
         </p:nvSpPr>
         <p:spPr>
           <a:xfrm>
-            <a:off x="6309360" y="1755648"/>
-            <a:ext cx="5376672" cy="64008"/>
+            <a:off x="502920" y="1755648"/>
+            <a:ext cx="5504688" cy="64008"/>
           </a:xfrm>
           <a:prstGeom prst="rect">
             <a:avLst/>
           </a:prstGeom>
           <a:solidFill>
-            <a:srgbClr val="3FB950"/>
+            <a:srgbClr val="D29922"/>
           </a:solidFill>
           <a:ln>
             <a:noFill/>
@@ -8386,14 +11156,14 @@
       </p:sp>
       <p:sp>
         <p:nvSpPr>
-          <p:cNvPr id="11" name="TextBox 10"/>
+          <p:cNvPr id="10" name="TextBox 9"/>
           <p:cNvSpPr txBox="1"/>
           <p:nvPr/>
         </p:nvSpPr>
         <p:spPr>
           <a:xfrm>
-            <a:off x="6537960" y="1920240"/>
-            <a:ext cx="4919472" cy="3886200"/>
+            <a:off x="704088" y="1901952"/>
+            <a:ext cx="5102352" cy="3922776"/>
           </a:xfrm>
           <a:prstGeom prst="rect">
             <a:avLst/>
@@ -8408,25 +11178,232 @@
           <a:p>
             <a:pPr>
               <a:spcAft>
-                <a:spcPts val="1000"/>
+                <a:spcPts val="800"/>
               </a:spcAft>
-              <a:defRPr sz="1600" b="1">
-                <a:solidFill>
-                  <a:srgbClr val="3FB950"/>
-                </a:solidFill>
-                <a:latin typeface="Arial"/>
-              </a:defRPr>
-            </a:pPr>
-            <a:r>
-              <a:t>Rules vs. Skills vs. /learn</a:t>
-            </a:r>
-          </a:p>
+              <a:defRPr sz="1500" b="1">
+                <a:solidFill>
+                  <a:srgbClr val="D29922"/>
+                </a:solidFill>
+                <a:latin typeface="Arial"/>
+              </a:defRPr>
+            </a:pPr>
+            <a:r>
+              <a:t>Step-by-Step Lab 1 Instructions</a:t>
+            </a:r>
+          </a:p>
+          <a:p>
+            <a:pPr>
+              <a:spcAft>
+                <a:spcPts val="650"/>
+              </a:spcAft>
+              <a:defRPr sz="1130">
+                <a:solidFill>
+                  <a:srgbClr val="F0F6FC"/>
+                </a:solidFill>
+                <a:latin typeface="Arial"/>
+              </a:defRPr>
+            </a:pPr>
+            <a:r>
+              <a:t>▸  Step 1 (Initialize Lab 01): Run `./labs/lab-01-margin-inventory-triage/install.sh` to seed `data/retail_pulse.db` and starter bugs.</a:t>
+            </a:r>
+          </a:p>
+          <a:p>
+            <a:pPr>
+              <a:spcAft>
+                <a:spcPts val="650"/>
+              </a:spcAft>
+              <a:defRPr sz="1130">
+                <a:solidFill>
+                  <a:srgbClr val="F0F6FC"/>
+                </a:solidFill>
+                <a:latin typeface="Arial"/>
+              </a:defRPr>
+            </a:pPr>
+            <a:r>
+              <a:t>▸  Step 2 (Reproduce Failing Tests): Run `./.venv/bin/pytest tests/test_lab01_triage.py` to observe the margin bleed and phantom ATP failures.</a:t>
+            </a:r>
+          </a:p>
+          <a:p>
+            <a:pPr>
+              <a:spcAft>
+                <a:spcPts val="650"/>
+              </a:spcAft>
+              <a:defRPr sz="1130">
+                <a:solidFill>
+                  <a:srgbClr val="F0F6FC"/>
+                </a:solidFill>
+                <a:latin typeface="Arial"/>
+              </a:defRPr>
+            </a:pPr>
+            <a:r>
+              <a:t>▸  Step 3 (Fix `src/services/promo_pricing.py`): Validate GS1 `gtin_14` Modulo-10, use `Decimal(ROUND_HALF_UP)`, never stack `EXCLUSIVE` promos, apply stackable promos multiplicatively, and clamp price to `contract_min_margin_floor_pct`.</a:t>
+            </a:r>
+          </a:p>
+          <a:p>
+            <a:pPr>
+              <a:spcAft>
+                <a:spcPts val="650"/>
+              </a:spcAft>
+              <a:defRPr sz="1130">
+                <a:solidFill>
+                  <a:srgbClr val="F0F6FC"/>
+                </a:solidFill>
+                <a:latin typeface="Arial"/>
+              </a:defRPr>
+            </a:pPr>
+            <a:r>
+              <a:t>▸  Step 4 (Fix `src/services/inventory_atp.py`): Compute `raw_atp = on_hand - reserved - safety_stock - unprocessed_webhook_delta_qty` and `true_atp = max(0, raw_atp)`.</a:t>
+            </a:r>
+          </a:p>
+          <a:p>
+            <a:pPr>
+              <a:spcAft>
+                <a:spcPts val="650"/>
+              </a:spcAft>
+              <a:defRPr sz="1130">
+                <a:solidFill>
+                  <a:srgbClr val="F0F6FC"/>
+                </a:solidFill>
+                <a:latin typeface="Arial"/>
+              </a:defRPr>
+            </a:pPr>
+            <a:r>
+              <a:t>▸  Step 5 (Verify): Run `./labs/lab-01-margin-inventory-triage/verify.sh` (`5 passed`: `$35,113.25` bleed stopped; 35 VIP orders flagged).</a:t>
+            </a:r>
+          </a:p>
+        </p:txBody>
+      </p:sp>
+      <p:sp>
+        <p:nvSpPr>
+          <p:cNvPr id="11" name="Rounded Rectangle 10"/>
+          <p:cNvSpPr/>
+          <p:nvPr/>
+        </p:nvSpPr>
+        <p:spPr>
+          <a:xfrm>
+            <a:off x="6199632" y="1755648"/>
+            <a:ext cx="5486400" cy="4160520"/>
+          </a:xfrm>
+          <a:prstGeom prst="roundRect">
+            <a:avLst/>
+          </a:prstGeom>
+          <a:solidFill>
+            <a:srgbClr val="161B22"/>
+          </a:solidFill>
+          <a:ln w="19050">
+            <a:solidFill>
+              <a:srgbClr val="30363D"/>
+            </a:solidFill>
+          </a:ln>
+        </p:spPr>
+        <p:style>
+          <a:lnRef idx="1">
+            <a:schemeClr val="accent1"/>
+          </a:lnRef>
+          <a:fillRef idx="3">
+            <a:schemeClr val="accent1"/>
+          </a:fillRef>
+          <a:effectRef idx="2">
+            <a:schemeClr val="accent1"/>
+          </a:effectRef>
+          <a:fontRef idx="minor">
+            <a:schemeClr val="lt1"/>
+          </a:fontRef>
+        </p:style>
+        <p:txBody>
+          <a:bodyPr rtlCol="0" anchor="ctr"/>
+          <a:lstStyle/>
+          <a:p>
+            <a:pPr algn="ctr"/>
+          </a:p>
+        </p:txBody>
+      </p:sp>
+      <p:sp>
+        <p:nvSpPr>
+          <p:cNvPr id="12" name="Rectangle 11"/>
+          <p:cNvSpPr/>
+          <p:nvPr/>
+        </p:nvSpPr>
+        <p:spPr>
+          <a:xfrm>
+            <a:off x="6199632" y="1755648"/>
+            <a:ext cx="5486400" cy="64008"/>
+          </a:xfrm>
+          <a:prstGeom prst="rect">
+            <a:avLst/>
+          </a:prstGeom>
+          <a:solidFill>
+            <a:srgbClr val="58A6FF"/>
+          </a:solidFill>
+          <a:ln>
+            <a:noFill/>
+          </a:ln>
+        </p:spPr>
+        <p:style>
+          <a:lnRef idx="1">
+            <a:schemeClr val="accent1"/>
+          </a:lnRef>
+          <a:fillRef idx="3">
+            <a:schemeClr val="accent1"/>
+          </a:fillRef>
+          <a:effectRef idx="2">
+            <a:schemeClr val="accent1"/>
+          </a:effectRef>
+          <a:fontRef idx="minor">
+            <a:schemeClr val="lt1"/>
+          </a:fontRef>
+        </p:style>
+        <p:txBody>
+          <a:bodyPr rtlCol="0" anchor="ctr"/>
+          <a:lstStyle/>
+          <a:p>
+            <a:pPr algn="ctr"/>
+          </a:p>
+        </p:txBody>
+      </p:sp>
+      <p:sp>
+        <p:nvSpPr>
+          <p:cNvPr id="13" name="TextBox 12"/>
+          <p:cNvSpPr txBox="1"/>
+          <p:nvPr/>
+        </p:nvSpPr>
+        <p:spPr>
+          <a:xfrm>
+            <a:off x="6400800" y="1901952"/>
+            <a:ext cx="5084064" cy="3922776"/>
+          </a:xfrm>
+          <a:prstGeom prst="rect">
+            <a:avLst/>
+          </a:prstGeom>
+          <a:noFill/>
+        </p:spPr>
+        <p:txBody>
+          <a:bodyPr wrap="square">
+            <a:spAutoFit/>
+          </a:bodyPr>
+          <a:lstStyle/>
           <a:p>
             <a:pPr>
               <a:spcAft>
                 <a:spcPts val="800"/>
               </a:spcAft>
-              <a:defRPr sz="1220">
+              <a:defRPr sz="1500" b="1">
+                <a:solidFill>
+                  <a:srgbClr val="58A6FF"/>
+                </a:solidFill>
+                <a:latin typeface="Arial"/>
+              </a:defRPr>
+            </a:pPr>
+            <a:r>
+              <a:t>Copy-Paste Prompts (PROMPTS.md) &amp; Verification</a:t>
+            </a:r>
+          </a:p>
+          <a:p>
+            <a:pPr>
+              <a:spcAft>
+                <a:spcPts val="650"/>
+              </a:spcAft>
+              <a:defRPr sz="1130">
                 <a:solidFill>
                   <a:srgbClr val="F0F6FC"/>
                 </a:solidFill>
@@ -8434,15 +11411,15 @@
               </a:defRPr>
             </a:pPr>
             <a:r>
-              <a:t>▸  Hierarchical Rules (GEMINI.md &amp; .agents/rules/*.md): Always-on or model-decided domain invariants loaded from workspace root down to target directories (deduplicated automatically)</a:t>
+              <a:t>▸  Prompt 1 — Discovery (@Mentions): '@src/services/promo_pricing.py @src/services/inventory_atp.py @data/logs/pos_wms_webhooks.jsonl @tests/test_lab01_triage.py Run pytest and explain why 30 orders are bleeding margin and 35 VIP orders have phantom ATP.'</a:t>
             </a:r>
           </a:p>
           <a:p>
             <a:pPr>
               <a:spcAft>
-                <a:spcPts val="800"/>
+                <a:spcPts val="650"/>
               </a:spcAft>
-              <a:defRPr sz="1220">
+              <a:defRPr sz="1130">
                 <a:solidFill>
                   <a:srgbClr val="F0F6FC"/>
                 </a:solidFill>
@@ -8450,15 +11427,15 @@
               </a:defRPr>
             </a:pPr>
             <a:r>
-              <a:t>▸  Progressive Disclosure Skills (.agents/skills/&lt;name&gt;/SKILL.md): Only lightweight YAML frontmatter (name, description) sits in system prompt; full markdown runbook &amp; scripts/ load ONLY when triggered!</a:t>
+              <a:t>▸  Prompt 2 — Planning (/plan): '/plan Create a remediation plan for promo_pricing.py (GS1 GTIN-14, Decimal, multiplicative stackable promos, margin floor clamping) and inventory_atp.py (subtract reserved, safety_stock, and webhook delta).'</a:t>
             </a:r>
           </a:p>
           <a:p>
             <a:pPr>
               <a:spcAft>
-                <a:spcPts val="800"/>
+                <a:spcPts val="650"/>
               </a:spcAft>
-              <a:defRPr sz="1220">
+              <a:defRPr sz="1130">
                 <a:solidFill>
                   <a:srgbClr val="F0F6FC"/>
                 </a:solidFill>
@@ -8466,15 +11443,15 @@
               </a:defRPr>
             </a:pPr>
             <a:r>
-              <a:t>▸  Self-Improving Memory (/learn): Ask Antigravity to codify a newly discovered debugging pattern or architectural standard into a reusable workspace customization</a:t>
+              <a:t>▸  Prompt 3 — Inline Edit (Cmd+I): Highlight `calculate_node_atp` in `inventory_atp.py` -&gt; 'Subtract reserved_qty, safety_stock_qty, and unprocessed_webhook_delta_qty from on_hand_qty.'</a:t>
             </a:r>
           </a:p>
           <a:p>
             <a:pPr>
               <a:spcAft>
-                <a:spcPts val="800"/>
+                <a:spcPts val="650"/>
               </a:spcAft>
-              <a:defRPr sz="1220">
+              <a:defRPr sz="1130">
                 <a:solidFill>
                   <a:srgbClr val="F0F6FC"/>
                 </a:solidFill>
@@ -8482,14 +11459,14 @@
               </a:defRPr>
             </a:pPr>
             <a:r>
-              <a:t>▸  Precedence Hierarchy: Workspace (.agents/) &gt; Declared JSON (skills.json) &gt; Global (~/.gemini/config/) &gt; Built-in</a:t>
-            </a:r>
-          </a:p>
-        </p:txBody>
-      </p:sp>
-      <p:sp>
-        <p:nvSpPr>
-          <p:cNvPr id="12" name="Rectangle 11"/>
+              <a:t>▸  Prompt 4 — Autonomous Verify: 'Apply fixes to @src/services/promo_pricing.py and @src/services/inventory_atp.py and run ./labs/lab-01-margin-inventory-triage/verify.sh.'</a:t>
+            </a:r>
+          </a:p>
+        </p:txBody>
+      </p:sp>
+      <p:sp>
+        <p:nvSpPr>
+          <p:cNvPr id="14" name="Rectangle 13"/>
           <p:cNvSpPr/>
           <p:nvPr/>
         </p:nvSpPr>
@@ -8534,7 +11511,7 @@
       </p:sp>
       <p:sp>
         <p:nvSpPr>
-          <p:cNvPr id="13" name="TextBox 12"/>
+          <p:cNvPr id="15" name="TextBox 14"/>
           <p:cNvSpPr txBox="1"/>
           <p:nvPr/>
         </p:nvSpPr>
@@ -8563,7 +11540,7 @@
               </a:defRPr>
             </a:pPr>
             <a:r>
-              <a:t>Rule of Thumb: Put permanent guardrails in GEMINI.md/rules; put multi-step workflows &amp; scripts in SKILL.md.    |    Slide 6/11</a:t>
+              <a:t>Delivered by Tryolabs • Self-Healing Checkpoint: ./labs/lab-01-margin-inventory-triage/apply_solution.sh    |    Slide 6/15</a:t>
             </a:r>
           </a:p>
         </p:txBody>
@@ -8727,7 +11704,7 @@
               </a:defRPr>
             </a:pPr>
             <a:r>
-              <a:t>HANDS-ON LAB 2 (54 MINUTES) • DOMAIN BRAIN</a:t>
+              <a:t>THEORY MODULE 2 (6 MINUTES) • CUSTOMIZATION ARCHITECTURE</a:t>
             </a:r>
           </a:p>
         </p:txBody>
@@ -8755,7 +11732,7 @@
           <a:lstStyle/>
           <a:p>
             <a:pPr>
-              <a:defRPr sz="2400" b="1">
+              <a:defRPr sz="2250" b="1">
                 <a:solidFill>
                   <a:srgbClr val="F0F6FC"/>
                 </a:solidFill>
@@ -8763,7 +11740,7 @@
               </a:defRPr>
             </a:pPr>
             <a:r>
-              <a:t>Lab 2: Encoding Industry Rules &amp; Executive Audit Skills</a:t>
+              <a:t>How Rules &amp; Progressive Disclosure Skills Work Internally</a:t>
             </a:r>
           </a:p>
         </p:txBody>
@@ -8791,7 +11768,7 @@
           <a:lstStyle/>
           <a:p>
             <a:pPr>
-              <a:defRPr sz="1350">
+              <a:defRPr sz="1300">
                 <a:solidFill>
                   <a:srgbClr val="8B949E"/>
                 </a:solidFill>
@@ -8799,7 +11776,7 @@
               </a:defRPr>
             </a:pPr>
             <a:r>
-              <a:t>Teach Antigravity your industry standards and build an automated Technical + Commercial Risk Auditor</a:t>
+              <a:t>Specializing Antigravity for your industry without overflowing the context window</a:t>
             </a:r>
           </a:p>
         </p:txBody>
@@ -8924,8 +11901,8 @@
         </p:nvSpPr>
         <p:spPr>
           <a:xfrm>
-            <a:off x="6537960" y="1920240"/>
-            <a:ext cx="4919472" cy="3886200"/>
+            <a:off x="6510528" y="1901952"/>
+            <a:ext cx="4974336" cy="3922776"/>
           </a:xfrm>
           <a:prstGeom prst="rect">
             <a:avLst/>
@@ -8940,25 +11917,25 @@
           <a:p>
             <a:pPr>
               <a:spcAft>
-                <a:spcPts val="1000"/>
-              </a:spcAft>
-              <a:defRPr sz="1600" b="1">
-                <a:solidFill>
-                  <a:srgbClr val="3FB950"/>
-                </a:solidFill>
-                <a:latin typeface="Arial"/>
-              </a:defRPr>
-            </a:pPr>
-            <a:r>
-              <a:t>Lab 2 Walkthrough &amp; Optimized Prompts</a:t>
-            </a:r>
-          </a:p>
-          <a:p>
-            <a:pPr>
-              <a:spcAft>
                 <a:spcPts val="800"/>
               </a:spcAft>
-              <a:defRPr sz="1220">
+              <a:defRPr sz="1500" b="1">
+                <a:solidFill>
+                  <a:srgbClr val="3FB950"/>
+                </a:solidFill>
+                <a:latin typeface="Arial"/>
+              </a:defRPr>
+            </a:pPr>
+            <a:r>
+              <a:t>Rules vs. Skills vs. /learn</a:t>
+            </a:r>
+          </a:p>
+          <a:p>
+            <a:pPr>
+              <a:spcAft>
+                <a:spcPts val="650"/>
+              </a:spcAft>
+              <a:defRPr sz="1130">
                 <a:solidFill>
                   <a:srgbClr val="F0F6FC"/>
                 </a:solidFill>
@@ -8966,15 +11943,15 @@
               </a:defRPr>
             </a:pPr>
             <a:r>
-              <a:t>▸  Setup: Run ./labs/lab-02-rules-and-skills/install.sh (auto-applies Lab 1 solution)</a:t>
+              <a:t>▸  Hierarchical Rules (GEMINI.md &amp; .agents/rules/*.md): Always-on or model-decided domain invariants loaded from workspace root down to target directories (deduplicated automatically)</a:t>
             </a:r>
           </a:p>
           <a:p>
             <a:pPr>
               <a:spcAft>
-                <a:spcPts val="800"/>
+                <a:spcPts val="650"/>
               </a:spcAft>
-              <a:defRPr sz="1220">
+              <a:defRPr sz="1130">
                 <a:solidFill>
                   <a:srgbClr val="F0F6FC"/>
                 </a:solidFill>
@@ -8982,15 +11959,15 @@
               </a:defRPr>
             </a:pPr>
             <a:r>
-              <a:t>▸  Task 1 (Workspace Rules): Create GEMINI.md &amp; .agents/rules/retail-standards.md enforcing Decimal(0.01) math, GS1 Modulo-10 GTIN-14 validation &amp; 15% margin floor</a:t>
+              <a:t>▸  Progressive Disclosure Skills (.agents/skills/&lt;name&gt;/SKILL.md): Only lightweight YAML frontmatter (name, description) sits in system prompt; full markdown runbook &amp; scripts/ load ONLY when triggered!</a:t>
             </a:r>
           </a:p>
           <a:p>
             <a:pPr>
               <a:spcAft>
-                <a:spcPts val="800"/>
+                <a:spcPts val="650"/>
               </a:spcAft>
-              <a:defRPr sz="1220">
+              <a:defRPr sz="1130">
                 <a:solidFill>
                   <a:srgbClr val="F0F6FC"/>
                 </a:solidFill>
@@ -8998,15 +11975,15 @@
               </a:defRPr>
             </a:pPr>
             <a:r>
-              <a:t>▸  Task 2 (Progressive Skill): Create .agents/skills/retail-otif-margin-auditor/SKILL.md correlating EDI 856 delays with vendor OTIF penalty tiers</a:t>
+              <a:t>▸  Self-Improving Memory (/learn): Ask Antigravity to codify a newly discovered debugging pattern or architectural standard into a reusable workspace customization</a:t>
             </a:r>
           </a:p>
           <a:p>
             <a:pPr>
               <a:spcAft>
-                <a:spcPts val="800"/>
+                <a:spcPts val="650"/>
               </a:spcAft>
-              <a:defRPr sz="1220">
+              <a:defRPr sz="1130">
                 <a:solidFill>
                   <a:srgbClr val="F0F6FC"/>
                 </a:solidFill>
@@ -9014,23 +11991,7 @@
               </a:defRPr>
             </a:pPr>
             <a:r>
-              <a:t>▸  Optimized Prompt: 'Create @GEMINI.md, @.agents/rules/retail-standards.md and @.agents/skills/retail-otif-margin-auditor/SKILL.md, then run @scripts/run_otif_margin_audit.py'</a:t>
-            </a:r>
-          </a:p>
-          <a:p>
-            <a:pPr>
-              <a:spcAft>
-                <a:spcPts val="800"/>
-              </a:spcAft>
-              <a:defRPr sz="1220">
-                <a:solidFill>
-                  <a:srgbClr val="F0F6FC"/>
-                </a:solidFill>
-                <a:latin typeface="Arial"/>
-              </a:defRPr>
-            </a:pPr>
-            <a:r>
-              <a:t>▸  Verify: Run ./labs/lab-02-rules-and-skills/verify.sh &amp; try /learn to persist a new rule!</a:t>
+              <a:t>▸  Precedence Hierarchy: Workspace (.agents/) &gt; Declared JSON (skills.json) &gt; Global (~/.gemini/config/) &gt; Built-in</a:t>
             </a:r>
           </a:p>
         </p:txBody>
@@ -9111,7 +12072,7 @@
               </a:defRPr>
             </a:pPr>
             <a:r>
-              <a:t>Open labs/lab-02-rules-and-skills/PROMPTS.md for step-by-step prompts to generate and verify your Rules &amp; Skill.    |    Slide 7/11</a:t>
+              <a:t>Rule of Thumb: Put permanent guardrails in GEMINI.md/rules; put multi-step workflows &amp; scripts in SKILL.md.    |    Slide 7/15</a:t>
             </a:r>
           </a:p>
         </p:txBody>
@@ -9275,7 +12236,7 @@
               </a:defRPr>
             </a:pPr>
             <a:r>
-              <a:t>THEORY MODULE 3 (6 MINUTES) • MCP, HOOKS &amp; ENTERPRISE GOVERNANCE</a:t>
+              <a:t>HANDS-ON LAB 2 (PART 1/2) • OBJECTIVES &amp; WHAT YOU WILL BUILD</a:t>
             </a:r>
           </a:p>
         </p:txBody>
@@ -9303,7 +12264,7 @@
           <a:lstStyle/>
           <a:p>
             <a:pPr>
-              <a:defRPr sz="2400" b="1">
+              <a:defRPr sz="2250" b="1">
                 <a:solidFill>
                   <a:srgbClr val="F0F6FC"/>
                 </a:solidFill>
@@ -9311,7 +12272,7 @@
               </a:defRPr>
             </a:pPr>
             <a:r>
-              <a:t>Live MCP Bridge, Deterministic Hooks &amp; Gemini Enterprise Governance</a:t>
+              <a:t>Lab 2: Workspace Rules &amp; Progressive Skills — Objectives &amp; Build Spec</a:t>
             </a:r>
           </a:p>
         </p:txBody>
@@ -9339,7 +12300,7 @@
           <a:lstStyle/>
           <a:p>
             <a:pPr>
-              <a:defRPr sz="1350">
+              <a:defRPr sz="1300">
                 <a:solidFill>
                   <a:srgbClr val="8B949E"/>
                 </a:solidFill>
@@ -9347,14 +12308,14 @@
               </a:defRPr>
             </a:pPr>
             <a:r>
-              <a:t>Connecting live databases safely while proving end-to-end enterprise security in Google Cloud</a:t>
+              <a:t>54 Minutes • Printable PDF Guide: labs/lab-02-rules-and-skills/LAB_02_INSTRUCTIONS_EN.pdf</a:t>
             </a:r>
           </a:p>
         </p:txBody>
       </p:sp>
       <p:pic>
         <p:nvPicPr>
-          <p:cNvPr id="8" name="Picture 7" descr="governance_en.png"/>
+          <p:cNvPr id="8" name="Picture 7" descr="customizations_en.png"/>
           <p:cNvPicPr>
             <a:picLocks noChangeAspect="1"/>
           </p:cNvPicPr>
@@ -9436,7 +12397,7 @@
             <a:avLst/>
           </a:prstGeom>
           <a:solidFill>
-            <a:srgbClr val="D29922"/>
+            <a:srgbClr val="3FB950"/>
           </a:solidFill>
           <a:ln>
             <a:noFill/>
@@ -9472,8 +12433,8 @@
         </p:nvSpPr>
         <p:spPr>
           <a:xfrm>
-            <a:off x="6537960" y="1920240"/>
-            <a:ext cx="4919472" cy="3886200"/>
+            <a:off x="6510528" y="1901952"/>
+            <a:ext cx="4974336" cy="3922776"/>
           </a:xfrm>
           <a:prstGeom prst="rect">
             <a:avLst/>
@@ -9488,25 +12449,25 @@
           <a:p>
             <a:pPr>
               <a:spcAft>
-                <a:spcPts val="1000"/>
-              </a:spcAft>
-              <a:defRPr sz="1600" b="1">
-                <a:solidFill>
-                  <a:srgbClr val="D29922"/>
-                </a:solidFill>
-                <a:latin typeface="Arial"/>
-              </a:defRPr>
-            </a:pPr>
-            <a:r>
-              <a:t>2-Layer Enterprise Security &amp; Governance</a:t>
-            </a:r>
-          </a:p>
-          <a:p>
-            <a:pPr>
-              <a:spcAft>
                 <a:spcPts val="800"/>
               </a:spcAft>
-              <a:defRPr sz="1220">
+              <a:defRPr sz="1500" b="1">
+                <a:solidFill>
+                  <a:srgbClr val="3FB950"/>
+                </a:solidFill>
+                <a:latin typeface="Arial"/>
+              </a:defRPr>
+            </a:pPr>
+            <a:r>
+              <a:t>Lab 2 Objectives &amp; What You Will Build</a:t>
+            </a:r>
+          </a:p>
+          <a:p>
+            <a:pPr>
+              <a:spcAft>
+                <a:spcPts val="650"/>
+              </a:spcAft>
+              <a:defRPr sz="1130">
                 <a:solidFill>
                   <a:srgbClr val="F0F6FC"/>
                 </a:solidFill>
@@ -9514,15 +12475,15 @@
               </a:defRPr>
             </a:pPr>
             <a:r>
-              <a:t>▸  Layer 1 — Google Cloud &amp; Gemini Enterprise (Instructor Live Demo): Cloud IAM (roles/cloudaicompanion.user), Cloud Audit Logs (cloudaicompanion.googleapis.com), VPC-SC perimeters, Zero Data Retention / No Training on customer code</a:t>
+              <a:t>▸  Objective 1 (Hierarchical Domain Rules): Encode permanent GS1 GTIN-14, True ATP, multiplicative promo, and Supplier OTIF invariants into workspace rules.</a:t>
             </a:r>
           </a:p>
           <a:p>
             <a:pPr>
               <a:spcAft>
-                <a:spcPts val="800"/>
+                <a:spcPts val="650"/>
               </a:spcAft>
-              <a:defRPr sz="1220">
+              <a:defRPr sz="1130">
                 <a:solidFill>
                   <a:srgbClr val="F0F6FC"/>
                 </a:solidFill>
@@ -9530,15 +12491,15 @@
               </a:defRPr>
             </a:pPr>
             <a:r>
-              <a:t>▸  Layer 2 — Antigravity Client Security: Tool Execution Policy (strict / request-review / proceed-in-sandbox), OS Terminal Sandbox, Non-Workspace File Access (deny), Command &amp; Browser Allow/Denylists</a:t>
+              <a:t>▸  Objective 2 (Progressive Disclosure Skills): Build an on-demand executive merchandising &amp; supply-chain audit skill in `.agents/skills/` using lightweight YAML frontmatter.</a:t>
             </a:r>
           </a:p>
           <a:p>
             <a:pPr>
               <a:spcAft>
-                <a:spcPts val="800"/>
+                <a:spcPts val="650"/>
               </a:spcAft>
-              <a:defRPr sz="1220">
+              <a:defRPr sz="1130">
                 <a:solidFill>
                   <a:srgbClr val="F0F6FC"/>
                 </a:solidFill>
@@ -9546,15 +12507,15 @@
               </a:defRPr>
             </a:pPr>
             <a:r>
-              <a:t>▸  Live Context via FastMCP (.agents/mcp_config.json): Exposes strongly-typed Python tools querying live SQLite &amp; telemetry over stdio/SSE</a:t>
+              <a:t>▸  What You Will Build #1 (`GEMINI.md` &amp; `.agents/rules/retail-standards.md`): Workspace context &amp; rule files enforcing `Decimal(ROUND_HALF_UP)`, GS1 Modulo-10 check digits, `15%` margin floor, and OTIF chargeback formulas.</a:t>
             </a:r>
           </a:p>
           <a:p>
             <a:pPr>
               <a:spcAft>
-                <a:spcPts val="800"/>
+                <a:spcPts val="650"/>
               </a:spcAft>
-              <a:defRPr sz="1220">
+              <a:defRPr sz="1130">
                 <a:solidFill>
                   <a:srgbClr val="F0F6FC"/>
                 </a:solidFill>
@@ -9562,7 +12523,23 @@
               </a:defRPr>
             </a:pPr>
             <a:r>
-              <a:t>▸  Deterministic Lifecycle Hooks (.agents/hooks.json): PreToolUse script inspects tool JSON on stdin; exit code 2 hard-blocks policy violations and writes an immutable audit log!</a:t>
+              <a:t>▸  What You Will Build #2 (`.agents/skills/margin-otif-audit/SKILL.md`): Progressive skill (`name: margin-otif-audit`) orchestrating `scripts/run_otif_margin_audit.py`.</a:t>
+            </a:r>
+          </a:p>
+          <a:p>
+            <a:pPr>
+              <a:spcAft>
+                <a:spcPts val="650"/>
+              </a:spcAft>
+              <a:defRPr sz="1130">
+                <a:solidFill>
+                  <a:srgbClr val="F0F6FC"/>
+                </a:solidFill>
+                <a:latin typeface="Arial"/>
+              </a:defRPr>
+            </a:pPr>
+            <a:r>
+              <a:t>▸  Deliverable &amp; Verification: Generate `data/exports/executive_margin_otif_audit.json` &amp; `.md` (`$98,250.00` OTIF chargebacks) and pass `./labs/lab-02-rules-and-skills/verify.sh`.</a:t>
             </a:r>
           </a:p>
         </p:txBody>
@@ -9643,7 +12620,7 @@
               </a:defRPr>
             </a:pPr>
             <a:r>
-              <a:t>Instructor Demo: Show Cloud Audit Logs in GCP Console + trigger a deterministic PreToolUse Hook block locally!    |    Slide 8/11</a:t>
+              <a:t>Delivered by Tryolabs • Full printable guide: LAB_02_INSTRUCTIONS_EN.pdf    |    Slide 8/15</a:t>
             </a:r>
           </a:p>
         </p:txBody>
@@ -9807,7 +12784,7 @@
               </a:defRPr>
             </a:pPr>
             <a:r>
-              <a:t>HANDS-ON LAB 3 (55 MINUTES) • LIVE MCP &amp; COMPLIANCE HOOKS</a:t>
+              <a:t>HANDS-ON LAB 2 (PART 2/2) • STEP-BY-STEP INSTRUCTIONS &amp; PROMPTS</a:t>
             </a:r>
           </a:p>
         </p:txBody>
@@ -9835,7 +12812,7 @@
           <a:lstStyle/>
           <a:p>
             <a:pPr>
-              <a:defRPr sz="2400" b="1">
+              <a:defRPr sz="2250" b="1">
                 <a:solidFill>
                   <a:srgbClr val="F0F6FC"/>
                 </a:solidFill>
@@ -9843,7 +12820,7 @@
               </a:defRPr>
             </a:pPr>
             <a:r>
-              <a:t>Lab 3: Building a Local FastMCP Server &amp; Compliance Guardrails</a:t>
+              <a:t>Lab 2 Instructions &amp; Copy-Paste Antigravity Prompts</a:t>
             </a:r>
           </a:p>
         </p:txBody>
@@ -9871,7 +12848,7 @@
           <a:lstStyle/>
           <a:p>
             <a:pPr>
-              <a:defRPr sz="1350">
+              <a:defRPr sz="1300">
                 <a:solidFill>
                   <a:srgbClr val="8B949E"/>
                 </a:solidFill>
@@ -9879,45 +12856,21 @@
               </a:defRPr>
             </a:pPr>
             <a:r>
-              <a:t>Give Antigravity live database/telemetry tools and deterministic PreToolUse protection</a:t>
-            </a:r>
-          </a:p>
-        </p:txBody>
-      </p:sp>
-      <p:pic>
-        <p:nvPicPr>
-          <p:cNvPr id="8" name="Picture 7" descr="governance_en.png"/>
-          <p:cNvPicPr>
-            <a:picLocks noChangeAspect="1"/>
-          </p:cNvPicPr>
-          <p:nvPr/>
-        </p:nvPicPr>
-        <p:blipFill>
-          <a:blip r:embed="rId3"/>
-          <a:stretch>
-            <a:fillRect/>
-          </a:stretch>
-        </p:blipFill>
+              <a:t>Follow Steps 1–5 on the left and copy-paste prompts from labs/lab-02-rules-and-skills/PROMPTS.md</a:t>
+            </a:r>
+          </a:p>
+        </p:txBody>
+      </p:sp>
+      <p:sp>
+        <p:nvSpPr>
+          <p:cNvPr id="8" name="Rounded Rectangle 7"/>
+          <p:cNvSpPr/>
+          <p:nvPr/>
+        </p:nvSpPr>
         <p:spPr>
           <a:xfrm>
             <a:off x="502920" y="1755648"/>
-            <a:ext cx="5623560" cy="3186684"/>
-          </a:xfrm>
-          <a:prstGeom prst="rect">
-            <a:avLst/>
-          </a:prstGeom>
-        </p:spPr>
-      </p:pic>
-      <p:sp>
-        <p:nvSpPr>
-          <p:cNvPr id="9" name="Rounded Rectangle 8"/>
-          <p:cNvSpPr/>
-          <p:nvPr/>
-        </p:nvSpPr>
-        <p:spPr>
-          <a:xfrm>
-            <a:off x="6309360" y="1755648"/>
-            <a:ext cx="5376672" cy="4160520"/>
+            <a:ext cx="5504688" cy="4160520"/>
           </a:xfrm>
           <a:prstGeom prst="roundRect">
             <a:avLst/>
@@ -9955,20 +12908,20 @@
       </p:sp>
       <p:sp>
         <p:nvSpPr>
-          <p:cNvPr id="10" name="Rectangle 9"/>
+          <p:cNvPr id="9" name="Rectangle 8"/>
           <p:cNvSpPr/>
           <p:nvPr/>
         </p:nvSpPr>
         <p:spPr>
           <a:xfrm>
-            <a:off x="6309360" y="1755648"/>
-            <a:ext cx="5376672" cy="64008"/>
+            <a:off x="502920" y="1755648"/>
+            <a:ext cx="5504688" cy="64008"/>
           </a:xfrm>
           <a:prstGeom prst="rect">
             <a:avLst/>
           </a:prstGeom>
           <a:solidFill>
-            <a:srgbClr val="BC8CFF"/>
+            <a:srgbClr val="3FB950"/>
           </a:solidFill>
           <a:ln>
             <a:noFill/>
@@ -9998,14 +12951,14 @@
       </p:sp>
       <p:sp>
         <p:nvSpPr>
-          <p:cNvPr id="11" name="TextBox 10"/>
+          <p:cNvPr id="10" name="TextBox 9"/>
           <p:cNvSpPr txBox="1"/>
           <p:nvPr/>
         </p:nvSpPr>
         <p:spPr>
           <a:xfrm>
-            <a:off x="6537960" y="1920240"/>
-            <a:ext cx="4919472" cy="3886200"/>
+            <a:off x="704088" y="1901952"/>
+            <a:ext cx="5102352" cy="3922776"/>
           </a:xfrm>
           <a:prstGeom prst="rect">
             <a:avLst/>
@@ -10020,25 +12973,232 @@
           <a:p>
             <a:pPr>
               <a:spcAft>
-                <a:spcPts val="1000"/>
+                <a:spcPts val="800"/>
               </a:spcAft>
-              <a:defRPr sz="1600" b="1">
-                <a:solidFill>
-                  <a:srgbClr val="BC8CFF"/>
-                </a:solidFill>
-                <a:latin typeface="Arial"/>
-              </a:defRPr>
-            </a:pPr>
-            <a:r>
-              <a:t>Lab 3 Walkthrough &amp; Optimized Prompts</a:t>
-            </a:r>
-          </a:p>
+              <a:defRPr sz="1500" b="1">
+                <a:solidFill>
+                  <a:srgbClr val="3FB950"/>
+                </a:solidFill>
+                <a:latin typeface="Arial"/>
+              </a:defRPr>
+            </a:pPr>
+            <a:r>
+              <a:t>Step-by-Step Lab 2 Instructions</a:t>
+            </a:r>
+          </a:p>
+          <a:p>
+            <a:pPr>
+              <a:spcAft>
+                <a:spcPts val="650"/>
+              </a:spcAft>
+              <a:defRPr sz="1130">
+                <a:solidFill>
+                  <a:srgbClr val="F0F6FC"/>
+                </a:solidFill>
+                <a:latin typeface="Arial"/>
+              </a:defRPr>
+            </a:pPr>
+            <a:r>
+              <a:t>▸  Step 1 (Initialize Lab 02): Run `./labs/lab-02-rules-and-skills/install.sh` (auto-applies Lab 01 solution).</a:t>
+            </a:r>
+          </a:p>
+          <a:p>
+            <a:pPr>
+              <a:spcAft>
+                <a:spcPts val="650"/>
+              </a:spcAft>
+              <a:defRPr sz="1130">
+                <a:solidFill>
+                  <a:srgbClr val="F0F6FC"/>
+                </a:solidFill>
+                <a:latin typeface="Arial"/>
+              </a:defRPr>
+            </a:pPr>
+            <a:r>
+              <a:t>▸  Step 2 (Author Root `GEMINI.md`): Document `sku_catalog`, `wms_inventory`, `vendor_contracts`, `promo_campaigns`, `omnichannel_orders`, and mandatory `Decimal(ROUND_HALF_UP)` &amp; `gtin_14` rules.</a:t>
+            </a:r>
+          </a:p>
+          <a:p>
+            <a:pPr>
+              <a:spcAft>
+                <a:spcPts val="650"/>
+              </a:spcAft>
+              <a:defRPr sz="1130">
+                <a:solidFill>
+                  <a:srgbClr val="F0F6FC"/>
+                </a:solidFill>
+                <a:latin typeface="Arial"/>
+              </a:defRPr>
+            </a:pPr>
+            <a:r>
+              <a:t>▸  Step 3 (Author `.agents/rules/retail-standards.md`): Codify GS1 GTIN-14 Modulo-10, True ATP (`on_hand - reserved - safety_stock - webhook_delta`), multiplicative promos, margin floor, and Vendor OTIF rules.</a:t>
+            </a:r>
+          </a:p>
+          <a:p>
+            <a:pPr>
+              <a:spcAft>
+                <a:spcPts val="650"/>
+              </a:spcAft>
+              <a:defRPr sz="1130">
+                <a:solidFill>
+                  <a:srgbClr val="F0F6FC"/>
+                </a:solidFill>
+                <a:latin typeface="Arial"/>
+              </a:defRPr>
+            </a:pPr>
+            <a:r>
+              <a:t>▸  Step 4 (Author `.agents/skills/margin-otif-audit/SKILL.md`): Add YAML frontmatter (`name: margin-otif-audit`, `description: ...`) and instructions to run `./.venv/bin/python scripts/run_otif_margin_audit.py`.</a:t>
+            </a:r>
+          </a:p>
+          <a:p>
+            <a:pPr>
+              <a:spcAft>
+                <a:spcPts val="650"/>
+              </a:spcAft>
+              <a:defRPr sz="1130">
+                <a:solidFill>
+                  <a:srgbClr val="F0F6FC"/>
+                </a:solidFill>
+                <a:latin typeface="Arial"/>
+              </a:defRPr>
+            </a:pPr>
+            <a:r>
+              <a:t>▸  Step 5 (Verify): Run `./labs/lab-02-rules-and-skills/verify.sh` (`5 passed` + executive OTIF/margin reports generated).</a:t>
+            </a:r>
+          </a:p>
+        </p:txBody>
+      </p:sp>
+      <p:sp>
+        <p:nvSpPr>
+          <p:cNvPr id="11" name="Rounded Rectangle 10"/>
+          <p:cNvSpPr/>
+          <p:nvPr/>
+        </p:nvSpPr>
+        <p:spPr>
+          <a:xfrm>
+            <a:off x="6199632" y="1755648"/>
+            <a:ext cx="5486400" cy="4160520"/>
+          </a:xfrm>
+          <a:prstGeom prst="roundRect">
+            <a:avLst/>
+          </a:prstGeom>
+          <a:solidFill>
+            <a:srgbClr val="161B22"/>
+          </a:solidFill>
+          <a:ln w="19050">
+            <a:solidFill>
+              <a:srgbClr val="30363D"/>
+            </a:solidFill>
+          </a:ln>
+        </p:spPr>
+        <p:style>
+          <a:lnRef idx="1">
+            <a:schemeClr val="accent1"/>
+          </a:lnRef>
+          <a:fillRef idx="3">
+            <a:schemeClr val="accent1"/>
+          </a:fillRef>
+          <a:effectRef idx="2">
+            <a:schemeClr val="accent1"/>
+          </a:effectRef>
+          <a:fontRef idx="minor">
+            <a:schemeClr val="lt1"/>
+          </a:fontRef>
+        </p:style>
+        <p:txBody>
+          <a:bodyPr rtlCol="0" anchor="ctr"/>
+          <a:lstStyle/>
+          <a:p>
+            <a:pPr algn="ctr"/>
+          </a:p>
+        </p:txBody>
+      </p:sp>
+      <p:sp>
+        <p:nvSpPr>
+          <p:cNvPr id="12" name="Rectangle 11"/>
+          <p:cNvSpPr/>
+          <p:nvPr/>
+        </p:nvSpPr>
+        <p:spPr>
+          <a:xfrm>
+            <a:off x="6199632" y="1755648"/>
+            <a:ext cx="5486400" cy="64008"/>
+          </a:xfrm>
+          <a:prstGeom prst="rect">
+            <a:avLst/>
+          </a:prstGeom>
+          <a:solidFill>
+            <a:srgbClr val="58A6FF"/>
+          </a:solidFill>
+          <a:ln>
+            <a:noFill/>
+          </a:ln>
+        </p:spPr>
+        <p:style>
+          <a:lnRef idx="1">
+            <a:schemeClr val="accent1"/>
+          </a:lnRef>
+          <a:fillRef idx="3">
+            <a:schemeClr val="accent1"/>
+          </a:fillRef>
+          <a:effectRef idx="2">
+            <a:schemeClr val="accent1"/>
+          </a:effectRef>
+          <a:fontRef idx="minor">
+            <a:schemeClr val="lt1"/>
+          </a:fontRef>
+        </p:style>
+        <p:txBody>
+          <a:bodyPr rtlCol="0" anchor="ctr"/>
+          <a:lstStyle/>
+          <a:p>
+            <a:pPr algn="ctr"/>
+          </a:p>
+        </p:txBody>
+      </p:sp>
+      <p:sp>
+        <p:nvSpPr>
+          <p:cNvPr id="13" name="TextBox 12"/>
+          <p:cNvSpPr txBox="1"/>
+          <p:nvPr/>
+        </p:nvSpPr>
+        <p:spPr>
+          <a:xfrm>
+            <a:off x="6400800" y="1901952"/>
+            <a:ext cx="5084064" cy="3922776"/>
+          </a:xfrm>
+          <a:prstGeom prst="rect">
+            <a:avLst/>
+          </a:prstGeom>
+          <a:noFill/>
+        </p:spPr>
+        <p:txBody>
+          <a:bodyPr wrap="square">
+            <a:spAutoFit/>
+          </a:bodyPr>
+          <a:lstStyle/>
           <a:p>
             <a:pPr>
               <a:spcAft>
                 <a:spcPts val="800"/>
               </a:spcAft>
-              <a:defRPr sz="1220">
+              <a:defRPr sz="1500" b="1">
+                <a:solidFill>
+                  <a:srgbClr val="58A6FF"/>
+                </a:solidFill>
+                <a:latin typeface="Arial"/>
+              </a:defRPr>
+            </a:pPr>
+            <a:r>
+              <a:t>Copy-Paste Prompts (PROMPTS.md) &amp; Verification</a:t>
+            </a:r>
+          </a:p>
+          <a:p>
+            <a:pPr>
+              <a:spcAft>
+                <a:spcPts val="650"/>
+              </a:spcAft>
+              <a:defRPr sz="1130">
                 <a:solidFill>
                   <a:srgbClr val="F0F6FC"/>
                 </a:solidFill>
@@ -10046,15 +13206,15 @@
               </a:defRPr>
             </a:pPr>
             <a:r>
-              <a:t>▸  Setup: Run ./labs/lab-03-mcp-and-hooks/install.sh</a:t>
+              <a:t>▸  Prompt 1 — Author Workspace Rules: '/plan Create @GEMINI.md and @.agents/rules/retail-standards.md enforcing Decimal ROUND_HALF_UP, GS1 GTIN-14 Modulo-10 validation, True ATP webhook delta deductions, multiplicative promo stacking, and OTIF chargeback rules.'</a:t>
             </a:r>
           </a:p>
           <a:p>
             <a:pPr>
               <a:spcAft>
-                <a:spcPts val="800"/>
+                <a:spcPts val="650"/>
               </a:spcAft>
-              <a:defRPr sz="1220">
+              <a:defRPr sz="1130">
                 <a:solidFill>
                   <a:srgbClr val="F0F6FC"/>
                 </a:solidFill>
@@ -10062,15 +13222,15 @@
               </a:defRPr>
             </a:pPr>
             <a:r>
-              <a:t>▸  Task 1 (FastMCP Server): Implement live tools in @mcp_server/retail_mcp.py (query_true_atp_inventory, audit_vendor_otif_contracts, simulate_promo_margin_guard, list_at_risk_vip_orders)</a:t>
+              <a:t>▸  Prompt 2 — Build Progressive Skill: 'Create @.agents/skills/margin-otif-audit/SKILL.md with YAML frontmatter (name: margin-otif-audit) that executes ./scripts/run_otif_margin_audit.py and writes data/exports/executive_margin_otif_audit.json and .md.'</a:t>
             </a:r>
           </a:p>
           <a:p>
             <a:pPr>
               <a:spcAft>
-                <a:spcPts val="800"/>
+                <a:spcPts val="650"/>
               </a:spcAft>
-              <a:defRPr sz="1220">
+              <a:defRPr sz="1130">
                 <a:solidFill>
                   <a:srgbClr val="F0F6FC"/>
                 </a:solidFill>
@@ -10078,15 +13238,15 @@
               </a:defRPr>
             </a:pPr>
             <a:r>
-              <a:t>▸  Task 2 (MCP &amp; Deterministic Hook): Wire .agents/mcp_config.json and .agents/hooks.json (runs @scripts/margin_guard_hook.py to block &lt;15% margin floor edits with exit code 2)</a:t>
+              <a:t>▸  Prompt 3 — Trigger Skill On-Demand: 'Run a full executive margin, True ATP, and supplier OTIF chargeback audit using our workspace skill.'</a:t>
             </a:r>
           </a:p>
           <a:p>
             <a:pPr>
               <a:spcAft>
-                <a:spcPts val="800"/>
+                <a:spcPts val="650"/>
               </a:spcAft>
-              <a:defRPr sz="1220">
+              <a:defRPr sz="1130">
                 <a:solidFill>
                   <a:srgbClr val="F0F6FC"/>
                 </a:solidFill>
@@ -10094,30 +13254,14 @@
               </a:defRPr>
             </a:pPr>
             <a:r>
-              <a:t>▸  Optimized Prompt: 'Complete @mcp_server/retail_mcp.py, register @.agents/mcp_config.json and @.agents/hooks.json, then query live VIP stockout risks via MCP'</a:t>
-            </a:r>
-          </a:p>
-          <a:p>
-            <a:pPr>
-              <a:spcAft>
-                <a:spcPts val="800"/>
-              </a:spcAft>
-              <a:defRPr sz="1220">
-                <a:solidFill>
-                  <a:srgbClr val="F0F6FC"/>
-                </a:solidFill>
-                <a:latin typeface="Arial"/>
-              </a:defRPr>
-            </a:pPr>
-            <a:r>
-              <a:t>▸  Verify: Run ./labs/lab-03-mcp-and-hooks/verify.sh &amp; inspect data/logs/hook_compliance_audit.jsonl</a:t>
-            </a:r>
-          </a:p>
-        </p:txBody>
-      </p:sp>
-      <p:sp>
-        <p:nvSpPr>
-          <p:cNvPr id="12" name="Rectangle 11"/>
+              <a:t>▸  Verify Command: Run `./labs/lab-02-rules-and-skills/verify.sh` and test `/learn`!</a:t>
+            </a:r>
+          </a:p>
+        </p:txBody>
+      </p:sp>
+      <p:sp>
+        <p:nvSpPr>
+          <p:cNvPr id="14" name="Rectangle 13"/>
           <p:cNvSpPr/>
           <p:nvPr/>
         </p:nvSpPr>
@@ -10162,7 +13306,7 @@
       </p:sp>
       <p:sp>
         <p:nvSpPr>
-          <p:cNvPr id="13" name="TextBox 12"/>
+          <p:cNvPr id="15" name="TextBox 14"/>
           <p:cNvSpPr txBox="1"/>
           <p:nvPr/>
         </p:nvSpPr>
@@ -10191,7 +13335,7 @@
               </a:defRPr>
             </a:pPr>
             <a:r>
-              <a:t>Open labs/lab-03-mcp-and-hooks/PROMPTS.md for copy-pasteable prompts to build and test your MCP server &amp; Hooks.    |    Slide 9/11</a:t>
+              <a:t>Delivered by Tryolabs • Self-Healing Checkpoint: ./labs/lab-02-rules-and-skills/apply_solution.sh    |    Slide 9/15</a:t>
             </a:r>
           </a:p>
         </p:txBody>

--- a/slides/antigravity_retail_workshop_en.pptx
+++ b/slides/antigravity_retail_workshop_en.pptx
@@ -379,7 +379,7 @@
             <a:pPr indent="0" algn="r">
               <a:buNone/>
             </a:pPr>
-            <a:fld id="{6F602BA6-C7A8-4294-A667-A7389769C6F8}" type="slidenum">
+            <a:fld id="{15328FFE-EEEA-44AD-B2F6-CC90E5D64EE6}" type="slidenum">
               <a:rPr lang="en-US" sz="1400" b="0" u="none" strike="noStrike">
                 <a:solidFill>
                   <a:srgbClr val="000000"/>
@@ -553,7 +553,7 @@
               </a:lnSpc>
               <a:buNone/>
             </a:pPr>
-            <a:fld id="{63254A8F-9A2D-4322-B003-9EDFECEABD81}" type="slidenum">
+            <a:fld id="{37CF31B8-0DD5-41AC-94A2-84D789E039A0}" type="slidenum">
               <a:rPr lang="en-US" sz="1200" b="0" u="none" strike="noStrike">
                 <a:solidFill>
                   <a:srgbClr val="000000"/>
@@ -726,7 +726,7 @@
               </a:lnSpc>
               <a:buNone/>
             </a:pPr>
-            <a:fld id="{C2BC88EA-1845-462B-9A56-A5721537D649}" type="slidenum">
+            <a:fld id="{3404EC13-959E-4020-9AE9-F77A125C739A}" type="slidenum">
               <a:rPr lang="en-US" sz="1200" b="0" u="none" strike="noStrike">
                 <a:solidFill>
                   <a:srgbClr val="000000"/>
@@ -899,7 +899,7 @@
               </a:lnSpc>
               <a:buNone/>
             </a:pPr>
-            <a:fld id="{F58AD630-894A-49B2-89C9-560E3013B75A}" type="slidenum">
+            <a:fld id="{F0B77B7F-F1B9-4EAA-B157-D614EE61E864}" type="slidenum">
               <a:rPr lang="en-US" sz="1200" b="0" u="none" strike="noStrike">
                 <a:solidFill>
                   <a:srgbClr val="000000"/>
@@ -1072,7 +1072,7 @@
               </a:lnSpc>
               <a:buNone/>
             </a:pPr>
-            <a:fld id="{5683ADB8-1F27-49F4-8CD0-52D94B0C4499}" type="slidenum">
+            <a:fld id="{196036FB-5F8E-4935-BE78-3BF616B5E356}" type="slidenum">
               <a:rPr lang="en-US" sz="1200" b="0" u="none" strike="noStrike">
                 <a:solidFill>
                   <a:srgbClr val="000000"/>
@@ -1245,7 +1245,7 @@
               </a:lnSpc>
               <a:buNone/>
             </a:pPr>
-            <a:fld id="{00779C81-264C-42B8-82ED-2136D309CFD9}" type="slidenum">
+            <a:fld id="{6BE13ED7-592B-4700-BEDA-A48A8D9CC214}" type="slidenum">
               <a:rPr lang="en-US" sz="1200" b="0" u="none" strike="noStrike">
                 <a:solidFill>
                   <a:srgbClr val="000000"/>
@@ -1418,7 +1418,7 @@
               </a:lnSpc>
               <a:buNone/>
             </a:pPr>
-            <a:fld id="{DECCC9B5-8960-4271-9713-BF7CC7CD9037}" type="slidenum">
+            <a:fld id="{6037889C-873A-4EF5-BBA7-8D8CEA15CA6B}" type="slidenum">
               <a:rPr lang="en-US" sz="1200" b="0" u="none" strike="noStrike">
                 <a:solidFill>
                   <a:srgbClr val="000000"/>
@@ -1591,7 +1591,7 @@
               </a:lnSpc>
               <a:buNone/>
             </a:pPr>
-            <a:fld id="{445C5600-8191-47E4-B904-B362CC3027C1}" type="slidenum">
+            <a:fld id="{47A24EF5-3209-44B3-B9C7-B4C6D2FA1C94}" type="slidenum">
               <a:rPr lang="en-US" sz="1200" b="0" u="none" strike="noStrike">
                 <a:solidFill>
                   <a:srgbClr val="000000"/>
@@ -1764,7 +1764,7 @@
               </a:lnSpc>
               <a:buNone/>
             </a:pPr>
-            <a:fld id="{5AD48272-6BA1-4396-8B0B-8E8E1B0BB700}" type="slidenum">
+            <a:fld id="{C10D9F06-FAF0-4FE2-BC2C-FE2759FB4D19}" type="slidenum">
               <a:rPr lang="en-US" sz="1200" b="0" u="none" strike="noStrike">
                 <a:solidFill>
                   <a:srgbClr val="000000"/>
@@ -1937,7 +1937,7 @@
               </a:lnSpc>
               <a:buNone/>
             </a:pPr>
-            <a:fld id="{321A1B55-77A9-4A91-BF90-5E633D14B2CE}" type="slidenum">
+            <a:fld id="{21A7C391-8CC7-46DB-AD74-4D237781444F}" type="slidenum">
               <a:rPr lang="en-US" sz="1200" b="0" u="none" strike="noStrike">
                 <a:solidFill>
                   <a:srgbClr val="000000"/>
@@ -2110,7 +2110,7 @@
               </a:lnSpc>
               <a:buNone/>
             </a:pPr>
-            <a:fld id="{6A5ED100-99B4-49C8-B88C-C57A4F2227B0}" type="slidenum">
+            <a:fld id="{B5444DCA-668B-4B72-A6C6-412C5985B2A5}" type="slidenum">
               <a:rPr lang="en-US" sz="1200" b="0" u="none" strike="noStrike">
                 <a:solidFill>
                   <a:srgbClr val="000000"/>
@@ -2283,7 +2283,7 @@
               </a:lnSpc>
               <a:buNone/>
             </a:pPr>
-            <a:fld id="{B4C72247-8FCF-4B93-A372-18677EED811D}" type="slidenum">
+            <a:fld id="{DBC9599B-C7E3-49E3-9D7D-19195899C0F5}" type="slidenum">
               <a:rPr lang="en-US" sz="1200" b="0" u="none" strike="noStrike">
                 <a:solidFill>
                   <a:srgbClr val="000000"/>
@@ -2456,7 +2456,7 @@
               </a:lnSpc>
               <a:buNone/>
             </a:pPr>
-            <a:fld id="{96DEA573-B4B2-4F9A-9D4E-A3313B1C63AB}" type="slidenum">
+            <a:fld id="{15DB5290-DAC6-472A-8DA4-DB6D8EC4194F}" type="slidenum">
               <a:rPr lang="en-US" sz="1200" b="0" u="none" strike="noStrike">
                 <a:solidFill>
                   <a:srgbClr val="000000"/>
@@ -2629,7 +2629,7 @@
               </a:lnSpc>
               <a:buNone/>
             </a:pPr>
-            <a:fld id="{234972C3-21A6-43AD-B715-C94F151D6091}" type="slidenum">
+            <a:fld id="{E55BED00-BB02-4B50-99B3-39041D1BFA95}" type="slidenum">
               <a:rPr lang="en-US" sz="1200" b="0" u="none" strike="noStrike">
                 <a:solidFill>
                   <a:srgbClr val="000000"/>
@@ -2802,7 +2802,7 @@
               </a:lnSpc>
               <a:buNone/>
             </a:pPr>
-            <a:fld id="{44A3A016-5679-44A5-8AB7-0599F99B6179}" type="slidenum">
+            <a:fld id="{4ADBC43C-CBAE-4B33-A5C2-E5205E52835C}" type="slidenum">
               <a:rPr lang="en-US" sz="1200" b="0" u="none" strike="noStrike">
                 <a:solidFill>
                   <a:srgbClr val="000000"/>
@@ -2975,7 +2975,7 @@
               </a:lnSpc>
               <a:buNone/>
             </a:pPr>
-            <a:fld id="{9A609EFB-458B-4402-94EB-04F06A43EF54}" type="slidenum">
+            <a:fld id="{BCBA1EBF-D2AF-46F3-A56A-9DAC25FFFC1A}" type="slidenum">
               <a:rPr lang="en-US" sz="1200" b="0" u="none" strike="noStrike">
                 <a:solidFill>
                   <a:srgbClr val="000000"/>
@@ -3292,7 +3292,7 @@
               </a:lnSpc>
               <a:buNone/>
             </a:pPr>
-            <a:fld id="{60F18F3F-3485-4BAB-AAB9-7E8D04E065FA}" type="slidenum">
+            <a:fld id="{93DEBC8F-BE94-4CCE-80D7-B41474F9230E}" type="slidenum">
               <a:rPr lang="en-US" sz="1200" b="0" u="none" strike="noStrike">
                 <a:solidFill>
                   <a:schemeClr val="dk1">
@@ -4001,7 +4001,7 @@
               </a:lnSpc>
               <a:buNone/>
             </a:pPr>
-            <a:fld id="{20D4E40D-65C9-42D9-B19D-A67F82E87DB6}" type="slidenum">
+            <a:fld id="{9EEDF19D-01A9-4ACF-AF05-ADD01E778AE7}" type="slidenum">
               <a:rPr lang="en-US" sz="1200" b="0" u="none" strike="noStrike">
                 <a:solidFill>
                   <a:schemeClr val="dk1">
@@ -4796,7 +4796,7 @@
               </a:lnSpc>
               <a:buNone/>
             </a:pPr>
-            <a:fld id="{ABB86F56-E462-4CAC-A56E-D76026CC51D3}" type="slidenum">
+            <a:fld id="{FAF64F76-1D31-4B92-94A7-FA935A480D86}" type="slidenum">
               <a:rPr lang="en-US" sz="1200" b="0" u="none" strike="noStrike">
                 <a:solidFill>
                   <a:schemeClr val="dk1">
@@ -5421,7 +5421,7 @@
               </a:lnSpc>
               <a:buNone/>
             </a:pPr>
-            <a:fld id="{13D08329-8A0E-4715-A1E2-1190B535577B}" type="slidenum">
+            <a:fld id="{3AB47CCF-0193-4C18-A344-54B1D8E67B50}" type="slidenum">
               <a:rPr lang="en-US" sz="1200" b="0" u="none" strike="noStrike">
                 <a:solidFill>
                   <a:schemeClr val="dk1">
@@ -6046,7 +6046,7 @@
               </a:lnSpc>
               <a:buNone/>
             </a:pPr>
-            <a:fld id="{88084C63-A118-442F-BB73-F720923B804F}" type="slidenum">
+            <a:fld id="{CB263D13-04A5-4061-A89E-6895FE0BA9EB}" type="slidenum">
               <a:rPr lang="en-US" sz="1200" b="0" u="none" strike="noStrike">
                 <a:solidFill>
                   <a:schemeClr val="dk1">
@@ -6671,7 +6671,7 @@
               </a:lnSpc>
               <a:buNone/>
             </a:pPr>
-            <a:fld id="{24CD723B-5995-49CB-8A89-DD4444C719C1}" type="slidenum">
+            <a:fld id="{A418F534-C854-4C6D-8150-9BA5FB5489E7}" type="slidenum">
               <a:rPr lang="en-US" sz="1200" b="0" u="none" strike="noStrike">
                 <a:solidFill>
                   <a:schemeClr val="dk1">
@@ -7080,7 +7080,7 @@
               </a:lnSpc>
               <a:buNone/>
             </a:pPr>
-            <a:fld id="{2CDB7CA5-2641-4E6F-962F-F1D0F6B00D4C}" type="slidenum">
+            <a:fld id="{2E5E93DA-2E1B-4758-AA4C-DC3D555F5B7E}" type="slidenum">
               <a:rPr lang="en-US" sz="1200" b="0" u="none" strike="noStrike">
                 <a:solidFill>
                   <a:schemeClr val="dk1">
@@ -8011,7 +8011,7 @@
               </a:lnSpc>
               <a:buNone/>
             </a:pPr>
-            <a:fld id="{C5F37162-A87B-492E-AD07-687B27301786}" type="slidenum">
+            <a:fld id="{FD686A77-28ED-4EBF-B6D3-1485D081EA6C}" type="slidenum">
               <a:rPr lang="en-US" sz="1200" b="0" u="none" strike="noStrike">
                 <a:solidFill>
                   <a:schemeClr val="dk1">
@@ -9170,7 +9170,7 @@
               </a:lnSpc>
               <a:buNone/>
             </a:pPr>
-            <a:fld id="{C18D11F7-4503-416A-8363-253B209813C1}" type="slidenum">
+            <a:fld id="{787A8E79-9B99-4A0E-8B93-911E6B96745E}" type="slidenum">
               <a:rPr lang="en-US" sz="1200" b="0" u="none" strike="noStrike">
                 <a:solidFill>
                   <a:schemeClr val="dk1">
@@ -9489,7 +9489,7 @@
               </a:lnSpc>
               <a:buNone/>
             </a:pPr>
-            <a:fld id="{1854F64C-7B35-48B2-82C3-B61586DF55A8}" type="slidenum">
+            <a:fld id="{E89234B3-856B-4563-85DD-7AE99FF20E0E}" type="slidenum">
               <a:rPr lang="en-US" sz="1200" b="0" u="none" strike="noStrike">
                 <a:solidFill>
                   <a:schemeClr val="dk1">
@@ -9736,7 +9736,7 @@
               </a:lnSpc>
               <a:buNone/>
             </a:pPr>
-            <a:fld id="{2D29EA62-7262-4937-AB54-E51C4F810BD5}" type="slidenum">
+            <a:fld id="{9ED855C7-3CA0-407A-9673-BB0DE56F3A60}" type="slidenum">
               <a:rPr lang="en-US" sz="1200" b="0" u="none" strike="noStrike">
                 <a:solidFill>
                   <a:schemeClr val="dk1">
@@ -11027,7 +11027,7 @@
                 <a:uFillTx/>
                 <a:latin typeface="Arial"/>
               </a:rPr>
-              <a:t> Stop $35,113.25 margin bleed, rescue 35 VIP orders &amp; claim $98,250 OTIF penalties</a:t>
+              <a:t> Stop $18,420.50 margin bleed, rescue 35 VIP orders ($749.3K LTV) &amp; claim $98,250 OTIF</a:t>
             </a:r>
             <a:endParaRPr lang="en-US" sz="1100" b="0" u="none" strike="noStrike">
               <a:solidFill>
@@ -12677,7 +12677,7 @@
                 <a:uFillTx/>
                 <a:latin typeface="Arial"/>
               </a:rPr>
-              <a:t> Intercept every file-edit and shell tool call with a </a:t>
+              <a:t> Intercept every file-edit and shell tool call with </a:t>
             </a:r>
             <a:r>
               <a:rPr lang="en-US" sz="1100" b="1" u="none" strike="noStrike">
@@ -12699,7 +12699,7 @@
                 <a:uFillTx/>
                 <a:latin typeface="Arial"/>
               </a:rPr>
-              <a:t> hook that hard-blocks disabling the </a:t>
+              <a:t> &amp; </a:t>
             </a:r>
             <a:r>
               <a:rPr lang="en-US" sz="1100" b="1" u="none" strike="noStrike">
@@ -12710,7 +12710,7 @@
                 <a:uFillTx/>
                 <a:latin typeface="Courier New"/>
               </a:rPr>
-              <a:t>15%</a:t>
+              <a:t>PostToolUse</a:t>
             </a:r>
             <a:r>
               <a:rPr lang="en-US" sz="1100" b="0" u="none" strike="noStrike">
@@ -12721,7 +12721,29 @@
                 <a:uFillTx/>
                 <a:latin typeface="Arial"/>
               </a:rPr>
-              <a:t> margin floor (</a:t>
+              <a:t> hooks that hard-block disabling </a:t>
+            </a:r>
+            <a:r>
+              <a:rPr lang="en-US" sz="1100" b="1" u="none" strike="noStrike">
+                <a:solidFill>
+                  <a:srgbClr val="20E3B2"/>
+                </a:solidFill>
+                <a:effectLst/>
+                <a:uFillTx/>
+                <a:latin typeface="Courier New"/>
+              </a:rPr>
+              <a:t>margin_floor_pct</a:t>
+            </a:r>
+            <a:r>
+              <a:rPr lang="en-US" sz="1100" b="0" u="none" strike="noStrike">
+                <a:solidFill>
+                  <a:srgbClr val="F0F6FC"/>
+                </a:solidFill>
+                <a:effectLst/>
+                <a:uFillTx/>
+                <a:latin typeface="Arial"/>
+              </a:rPr>
+              <a:t> or destructive SQL (</a:t>
             </a:r>
             <a:r>
               <a:rPr lang="en-US" sz="1100" b="1" u="none" strike="noStrike">
@@ -13054,6 +13076,28 @@
                 <a:uFillTx/>
                 <a:latin typeface="Arial"/>
               </a:rPr>
+              <a:t> &amp; </a:t>
+            </a:r>
+            <a:r>
+              <a:rPr lang="en-US" sz="1100" b="1" u="none" strike="noStrike">
+                <a:solidFill>
+                  <a:srgbClr val="20E3B2"/>
+                </a:solidFill>
+                <a:effectLst/>
+                <a:uFillTx/>
+                <a:latin typeface="Courier New"/>
+              </a:rPr>
+              <a:t>PostToolUse</a:t>
+            </a:r>
+            <a:r>
+              <a:rPr lang="en-US" sz="1100" b="0" u="none" strike="noStrike">
+                <a:solidFill>
+                  <a:srgbClr val="F0F6FC"/>
+                </a:solidFill>
+                <a:effectLst/>
+                <a:uFillTx/>
+                <a:latin typeface="Arial"/>
+              </a:rPr>
               <a:t> guardrail blocking </a:t>
             </a:r>
             <a:r>
@@ -13065,7 +13109,7 @@
                 <a:uFillTx/>
                 <a:latin typeface="Courier New"/>
               </a:rPr>
-              <a:t>enforce_floor=False</a:t>
+              <a:t>margin_floor_pct = 0.0</a:t>
             </a:r>
             <a:r>
               <a:rPr lang="en-US" sz="1100" b="0" u="none" strike="noStrike">
@@ -13076,7 +13120,7 @@
                 <a:uFillTx/>
                 <a:latin typeface="Arial"/>
               </a:rPr>
-              <a:t>, margin </a:t>
+              <a:t>, </a:t>
             </a:r>
             <a:r>
               <a:rPr lang="en-US" sz="1100" b="1" u="none" strike="noStrike">
@@ -13087,7 +13131,7 @@
                 <a:uFillTx/>
                 <a:latin typeface="Courier New"/>
               </a:rPr>
-              <a:t>&lt; 0.15</a:t>
+              <a:t>DISABLE_MARGIN_FLOOR</a:t>
             </a:r>
             <a:r>
               <a:rPr lang="en-US" sz="1100" b="0" u="none" strike="noStrike">
@@ -13215,7 +13259,29 @@
                 <a:uFillTx/>
                 <a:latin typeface="Arial"/>
               </a:rPr>
-              <a:t> Pass all 5 MCP &amp; Hook tests in </a:t>
+              <a:t> Pass all 3 Lab 03 MCP &amp; Hook tests (</a:t>
+            </a:r>
+            <a:r>
+              <a:rPr lang="en-US" sz="1100" b="1" u="none" strike="noStrike">
+                <a:solidFill>
+                  <a:srgbClr val="20E3B2"/>
+                </a:solidFill>
+                <a:effectLst/>
+                <a:uFillTx/>
+                <a:latin typeface="Courier New"/>
+              </a:rPr>
+              <a:t>13 passed</a:t>
+            </a:r>
+            <a:r>
+              <a:rPr lang="en-US" sz="1100" b="0" u="none" strike="noStrike">
+                <a:solidFill>
+                  <a:srgbClr val="F0F6FC"/>
+                </a:solidFill>
+                <a:effectLst/>
+                <a:uFillTx/>
+                <a:latin typeface="Arial"/>
+              </a:rPr>
+              <a:t> cumulative) in </a:t>
             </a:r>
             <a:r>
               <a:rPr lang="en-US" sz="1100" b="1" u="none" strike="noStrike">
@@ -14031,7 +14097,7 @@
                 <a:uFillTx/>
                 <a:latin typeface="Courier New"/>
               </a:rPr>
-              <a:t>simulate_promo_margin_guard(promo_code, category, loyalty_tier)</a:t>
+              <a:t>audit_vendor_otif_contracts(only_breaching=True)</a:t>
             </a:r>
             <a:r>
               <a:rPr lang="en-US" sz="1100" b="0" u="none" strike="noStrike">
@@ -14042,7 +14108,7 @@
                 <a:uFillTx/>
                 <a:latin typeface="Arial"/>
               </a:rPr>
-              <a:t> and </a:t>
+              <a:t>, </a:t>
             </a:r>
             <a:r>
               <a:rPr lang="en-US" sz="1100" b="1" u="none" strike="noStrike">
@@ -14053,7 +14119,29 @@
                 <a:uFillTx/>
                 <a:latin typeface="Courier New"/>
               </a:rPr>
-              <a:t>list_at_risk_vip_orders(loyalty_tier, limit)</a:t>
+              <a:t>simulate_promo_margin_guard(sku, qty=1, promo_codes_csv="")</a:t>
+            </a:r>
+            <a:r>
+              <a:rPr lang="en-US" sz="1100" b="0" u="none" strike="noStrike">
+                <a:solidFill>
+                  <a:srgbClr val="F0F6FC"/>
+                </a:solidFill>
+                <a:effectLst/>
+                <a:uFillTx/>
+                <a:latin typeface="Arial"/>
+              </a:rPr>
+              <a:t>, and </a:t>
+            </a:r>
+            <a:r>
+              <a:rPr lang="en-US" sz="1100" b="1" u="none" strike="noStrike">
+                <a:solidFill>
+                  <a:srgbClr val="20E3B2"/>
+                </a:solidFill>
+                <a:effectLst/>
+                <a:uFillTx/>
+                <a:latin typeface="Courier New"/>
+              </a:rPr>
+              <a:t>list_at_risk_vip_orders(loyalty_tier="DIAMOND")</a:t>
             </a:r>
             <a:r>
               <a:rPr lang="en-US" sz="1100" b="0" u="none" strike="noStrike">
@@ -14170,7 +14258,7 @@
                 <a:uFillTx/>
                 <a:latin typeface="Courier New"/>
               </a:rPr>
-              <a:t>.venv/bin/python -m mcp_server.retail_mcp</a:t>
+              <a:t>./.venv/bin/python mcp_server/retail_mcp.py</a:t>
             </a:r>
             <a:r>
               <a:rPr lang="en-US" sz="1100" b="0" u="none" strike="noStrike">
@@ -14181,7 +14269,7 @@
                 <a:uFillTx/>
                 <a:latin typeface="Arial"/>
               </a:rPr>
-              <a:t>.</a:t>
+              <a:t> over stdio.</a:t>
             </a:r>
             <a:endParaRPr lang="en-US" sz="1100" b="0" u="none" strike="noStrike">
               <a:solidFill>
@@ -14276,6 +14364,28 @@
                 <a:uFillTx/>
                 <a:latin typeface="Arial"/>
               </a:rPr>
+              <a:t> and </a:t>
+            </a:r>
+            <a:r>
+              <a:rPr lang="en-US" sz="1100" b="1" u="none" strike="noStrike">
+                <a:solidFill>
+                  <a:srgbClr val="20E3B2"/>
+                </a:solidFill>
+                <a:effectLst/>
+                <a:uFillTx/>
+                <a:latin typeface="Courier New"/>
+              </a:rPr>
+              <a:t>PostToolUse</a:t>
+            </a:r>
+            <a:r>
+              <a:rPr lang="en-US" sz="1100" b="0" u="none" strike="noStrike">
+                <a:solidFill>
+                  <a:srgbClr val="F0F6FC"/>
+                </a:solidFill>
+                <a:effectLst/>
+                <a:uFillTx/>
+                <a:latin typeface="Arial"/>
+              </a:rPr>
               <a:t> to </a:t>
             </a:r>
             <a:r>
@@ -14287,7 +14397,7 @@
                 <a:uFillTx/>
                 <a:latin typeface="Courier New"/>
               </a:rPr>
-              <a:t>scripts/margin_guard_hook.py</a:t>
+              <a:t>./.venv/bin/python scripts/margin_guard_hook.py --phase pre</a:t>
             </a:r>
             <a:r>
               <a:rPr lang="en-US" sz="1100" b="0" u="none" strike="noStrike">
@@ -14298,7 +14408,7 @@
                 <a:uFillTx/>
                 <a:latin typeface="Arial"/>
               </a:rPr>
-              <a:t> (blocks </a:t>
+              <a:t> (and </a:t>
             </a:r>
             <a:r>
               <a:rPr lang="en-US" sz="1100" b="1" u="none" strike="noStrike">
@@ -14309,7 +14419,7 @@
                 <a:uFillTx/>
                 <a:latin typeface="Courier New"/>
               </a:rPr>
-              <a:t>enforce_floor=False</a:t>
+              <a:t>--phase post</a:t>
             </a:r>
             <a:r>
               <a:rPr lang="en-US" sz="1100" b="0" u="none" strike="noStrike">
@@ -14320,29 +14430,7 @@
                 <a:uFillTx/>
                 <a:latin typeface="Arial"/>
               </a:rPr>
-              <a:t> or margin </a:t>
-            </a:r>
-            <a:r>
-              <a:rPr lang="en-US" sz="1100" b="1" u="none" strike="noStrike">
-                <a:solidFill>
-                  <a:srgbClr val="20E3B2"/>
-                </a:solidFill>
-                <a:effectLst/>
-                <a:uFillTx/>
-                <a:latin typeface="Courier New"/>
-              </a:rPr>
-              <a:t>&lt; 0.15</a:t>
-            </a:r>
-            <a:r>
-              <a:rPr lang="en-US" sz="1100" b="0" u="none" strike="noStrike">
-                <a:solidFill>
-                  <a:srgbClr val="F0F6FC"/>
-                </a:solidFill>
-                <a:effectLst/>
-                <a:uFillTx/>
-                <a:latin typeface="Arial"/>
-              </a:rPr>
-              <a:t> with exit code </a:t>
+              <a:t>, blocking policy violations with exit code </a:t>
             </a:r>
             <a:r>
               <a:rPr lang="en-US" sz="1100" b="1" u="none" strike="noStrike">
@@ -14448,7 +14536,7 @@
                 <a:uFillTx/>
                 <a:latin typeface="Courier New"/>
               </a:rPr>
-              <a:t>5 passed</a:t>
+              <a:t>13 passed</a:t>
             </a:r>
             <a:r>
               <a:rPr lang="en-US" sz="1100" b="0" u="none" strike="noStrike">
@@ -14459,7 +14547,7 @@
                 <a:uFillTx/>
                 <a:latin typeface="Arial"/>
               </a:rPr>
-              <a:t> + compliance audit log verified).</a:t>
+              <a:t> cumulative across Labs 01–03 + compliance audit log verified).</a:t>
             </a:r>
             <a:endParaRPr lang="en-US" sz="1100" b="0" u="none" strike="noStrike">
               <a:solidFill>
@@ -14688,7 +14776,7 @@
                 <a:uFillTx/>
                 <a:latin typeface="Arial"/>
               </a:rPr>
-              <a:t> '/plan Implement simulate_promo_margin_guard and list_at_risk_vip_orders in @mcp_server/retail_mcp.py so all tool schemas match @tests/test_lab03_mcp_hooks.py.'</a:t>
+              <a:t> '/plan Implement audit_vendor_otif_contracts, simulate_promo_margin_guard, and list_at_risk_vip_orders in @mcp_server/retail_mcp.py so all tool schemas match @tests/test_lab03_mcp_hooks.py.'</a:t>
             </a:r>
             <a:endParaRPr lang="en-US" sz="1100" b="0" u="none" strike="noStrike">
               <a:solidFill>
@@ -14739,7 +14827,7 @@
                 <a:uFillTx/>
                 <a:latin typeface="Arial"/>
               </a:rPr>
-              <a:t> 'Create @.agents/mcp_config.json for retail-pulse-mcp and @.agents/hooks.json wiring PreToolUse to ./scripts/margin_guard_hook.py.'</a:t>
+              <a:t> 'Create @.agents/mcp_config.json for retail-pulse-mcp and @.agents/hooks.json wiring PreToolUse and PostToolUse to ./scripts/margin_guard_hook.py.'</a:t>
             </a:r>
             <a:endParaRPr lang="en-US" sz="1100" b="0" u="none" strike="noStrike">
               <a:solidFill>
@@ -14801,7 +14889,7 @@
                 <a:uFillTx/>
                 <a:latin typeface="Courier New"/>
               </a:rPr>
-              <a:t>echo '{"tool_name":"edit_file","tool_input":{"Path":"src/services/promo_pricing.py","Replacement":"enforce_floor=False"}}' | .venv/bin/python scripts/margin_guard_hook.py</a:t>
+              <a:t>echo '{"tool_name":"edit_file","tool_input":{"content":"margin_floor_pct = 0.0"}}' | ./.venv/bin/python scripts/margin_guard_hook.py --phase pre</a:t>
             </a:r>
             <a:endParaRPr lang="en-US" sz="1100" b="0" u="none" strike="noStrike">
               <a:solidFill>
@@ -17011,7 +17099,7 @@
                 <a:uFillTx/>
                 <a:latin typeface="Courier New"/>
               </a:rPr>
-              <a:t>evaluate_candidates</a:t>
+              <a:t>optimize_at_risk_order_routing</a:t>
             </a:r>
             <a:r>
               <a:rPr lang="en-US" sz="1100" b="0" u="none" strike="noStrike">
@@ -17033,7 +17121,7 @@
                 <a:uFillTx/>
                 <a:latin typeface="Courier New"/>
               </a:rPr>
-              <a:t>optimize_at_risk_orders</a:t>
+              <a:t>claim_vendor_otif_chargebacks</a:t>
             </a:r>
             <a:r>
               <a:rPr lang="en-US" sz="1100" b="0" u="none" strike="noStrike">
@@ -17044,7 +17132,51 @@
                 <a:uFillTx/>
                 <a:latin typeface="Arial"/>
               </a:rPr>
-              <a:t>) rescuing all 35 VIP orders.</a:t>
+              <a:t>) rescuing all 35 VIP orders (</a:t>
+            </a:r>
+            <a:r>
+              <a:rPr lang="en-US" sz="1100" b="1" u="none" strike="noStrike">
+                <a:solidFill>
+                  <a:srgbClr val="58A6FF"/>
+                </a:solidFill>
+                <a:effectLst/>
+                <a:uFillTx/>
+                <a:latin typeface="Courier New"/>
+              </a:rPr>
+              <a:t>$749,300.00</a:t>
+            </a:r>
+            <a:r>
+              <a:rPr lang="en-US" sz="1100" b="0" u="none" strike="noStrike">
+                <a:solidFill>
+                  <a:srgbClr val="F0F6FC"/>
+                </a:solidFill>
+                <a:effectLst/>
+                <a:uFillTx/>
+                <a:latin typeface="Arial"/>
+              </a:rPr>
+              <a:t> LTV) and claiming </a:t>
+            </a:r>
+            <a:r>
+              <a:rPr lang="en-US" sz="1100" b="1" u="none" strike="noStrike">
+                <a:solidFill>
+                  <a:srgbClr val="58A6FF"/>
+                </a:solidFill>
+                <a:effectLst/>
+                <a:uFillTx/>
+                <a:latin typeface="Courier New"/>
+              </a:rPr>
+              <a:t>$98,250.00</a:t>
+            </a:r>
+            <a:r>
+              <a:rPr lang="en-US" sz="1100" b="0" u="none" strike="noStrike">
+                <a:solidFill>
+                  <a:srgbClr val="F0F6FC"/>
+                </a:solidFill>
+                <a:effectLst/>
+                <a:uFillTx/>
+                <a:latin typeface="Arial"/>
+              </a:rPr>
+              <a:t> OTIF.</a:t>
             </a:r>
             <a:endParaRPr lang="en-US" sz="1100" b="0" u="none" strike="noStrike">
               <a:solidFill>
@@ -18127,7 +18259,7 @@
                 <a:uFillTx/>
                 <a:latin typeface="Courier New"/>
               </a:rPr>
-              <a:t>evaluate_candidates()</a:t>
+              <a:t>optimize_at_risk_order_routing()</a:t>
             </a:r>
             <a:r>
               <a:rPr lang="en-US" sz="1100" b="0" u="none" strike="noStrike">
@@ -18149,7 +18281,7 @@
                 <a:uFillTx/>
                 <a:latin typeface="Courier New"/>
               </a:rPr>
-              <a:t>optimize_at_risk_orders()</a:t>
+              <a:t>claim_vendor_otif_chargebacks()</a:t>
             </a:r>
             <a:r>
               <a:rPr lang="en-US" sz="1100" b="0" u="none" strike="noStrike">
@@ -18182,7 +18314,51 @@
                 <a:uFillTx/>
                 <a:latin typeface="Arial"/>
               </a:rPr>
-              <a:t> (rerouting 35 VIP orders by highest post-shipping net margin).</a:t>
+              <a:t> (rerouting all 35 VIP orders to </a:t>
+            </a:r>
+            <a:r>
+              <a:rPr lang="en-US" sz="1100" b="1" u="none" strike="noStrike">
+                <a:solidFill>
+                  <a:srgbClr val="58A6FF"/>
+                </a:solidFill>
+                <a:effectLst/>
+                <a:uFillTx/>
+                <a:latin typeface="Courier New"/>
+              </a:rPr>
+              <a:t>REROUTED_SAVED</a:t>
+            </a:r>
+            <a:r>
+              <a:rPr lang="en-US" sz="1100" b="0" u="none" strike="noStrike">
+                <a:solidFill>
+                  <a:srgbClr val="F0F6FC"/>
+                </a:solidFill>
+                <a:effectLst/>
+                <a:uFillTx/>
+                <a:latin typeface="Arial"/>
+              </a:rPr>
+              <a:t> and claiming </a:t>
+            </a:r>
+            <a:r>
+              <a:rPr lang="en-US" sz="1100" b="1" u="none" strike="noStrike">
+                <a:solidFill>
+                  <a:srgbClr val="58A6FF"/>
+                </a:solidFill>
+                <a:effectLst/>
+                <a:uFillTx/>
+                <a:latin typeface="Courier New"/>
+              </a:rPr>
+              <a:t>$98,250.00</a:t>
+            </a:r>
+            <a:r>
+              <a:rPr lang="en-US" sz="1100" b="0" u="none" strike="noStrike">
+                <a:solidFill>
+                  <a:srgbClr val="F0F6FC"/>
+                </a:solidFill>
+                <a:effectLst/>
+                <a:uFillTx/>
+                <a:latin typeface="Arial"/>
+              </a:rPr>
+              <a:t>).</a:t>
             </a:r>
             <a:endParaRPr lang="en-US" sz="1100" b="0" u="none" strike="noStrike">
               <a:solidFill>
@@ -18332,7 +18508,7 @@
                 <a:uFillTx/>
                 <a:latin typeface="Courier New"/>
               </a:rPr>
-              <a:t>GET /.well-known/agent.json</a:t>
+              <a:t>get_a2a_agent_card</a:t>
             </a:r>
             <a:r>
               <a:rPr lang="en-US" sz="1100" b="0" u="none" strike="noStrike">
@@ -18354,7 +18530,7 @@
                 <a:uFillTx/>
                 <a:latin typeface="Courier New"/>
               </a:rPr>
-              <a:t>POST /api/v1/a2a</a:t>
+              <a:t>handle_a2a_jsonrpc</a:t>
             </a:r>
             <a:r>
               <a:rPr lang="en-US" sz="1100" b="0" u="none" strike="noStrike">
@@ -18427,7 +18603,7 @@
                 <a:uFillTx/>
                 <a:latin typeface="Courier New"/>
               </a:rPr>
-              <a:t>./scripts/run_adk_web.sh --port 8080</a:t>
+              <a:t>./scripts/run_adk_web.sh</a:t>
             </a:r>
             <a:r>
               <a:rPr lang="en-US" sz="1100" b="0" u="none" strike="noStrike">
@@ -18850,7 +19026,7 @@
                 <a:uFillTx/>
                 <a:latin typeface="Arial"/>
               </a:rPr>
-              <a:t> '/plan Implement evaluate_candidates and optimize_at_risk_orders in @src/services/fulfillment_router.py ranking nodes by (-post_shipping_net_margin_usd, shipping_cost_usd, DC priority).'</a:t>
+              <a:t> '/plan Implement optimize_at_risk_order_routing and claim_vendor_otif_chargebacks in @src/services/fulfillment_router.py ranking candidate nodes by lowest shipping_cost_per_unit and highest true_atp.'</a:t>
             </a:r>
             <a:endParaRPr lang="en-US" sz="1100" b="0" u="none" strike="noStrike">
               <a:solidFill>
@@ -18901,7 +19077,7 @@
                 <a:uFillTx/>
                 <a:latin typeface="Arial"/>
               </a:rPr>
-              <a:t> '/teamwork Implement WMSInventoryATPAgent, MerchandisingMarginOTIFAgent, RetailPulseOrchestratorAgent, build_a2a_agent_card, and handle_a2a_jsonrpc in @src/agents/adk_a2a_orchestrator.py.'</a:t>
+              <a:t> '/teamwork Implement WMSInventoryATPAgent, MerchandisingMarginOTIFAgent, RetailPulseOrchestratorAgent, get_a2a_agent_card, and handle_a2a_jsonrpc in @src/agents/adk_a2a_orchestrator.py.'</a:t>
             </a:r>
             <a:endParaRPr lang="en-US" sz="1100" b="0" u="none" strike="noStrike">
               <a:solidFill>
@@ -18974,7 +19150,7 @@
                 <a:uFillTx/>
                 <a:latin typeface="Arial"/>
               </a:rPr>
-              <a:t> 'Execute omnichannel remediation: enforce 15% margin floor, reroute all 35 VIP orders, and claim OTIF vendor chargebacks.'</a:t>
+              <a:t> 'Execute omnichannel remediation: enforce margin floor across 28 orders, reroute all 35 VIP orders, and claim OTIF vendor chargebacks.'</a:t>
             </a:r>
             <a:endParaRPr lang="en-US" sz="1100" b="0" u="none" strike="noStrike">
               <a:solidFill>
@@ -22723,7 +22899,7 @@
                 <a:uFillTx/>
                 <a:latin typeface="Courier New"/>
               </a:rPr>
-              <a:t>$35,113.25</a:t>
+              <a:t>$18,420.50</a:t>
             </a:r>
             <a:r>
               <a:rPr lang="en-US" sz="1100" b="0" u="none" strike="noStrike">
@@ -22734,7 +22910,7 @@
                 <a:uFillTx/>
                 <a:latin typeface="Arial"/>
               </a:rPr>
-              <a:t> in negative margin bleed across 30 orders and accurately flag 35 </a:t>
+              <a:t> in negative margin bleed across 28 </a:t>
             </a:r>
             <a:r>
               <a:rPr lang="en-US" sz="1100" b="1" u="none" strike="noStrike">
@@ -22745,6 +22921,28 @@
                 <a:uFillTx/>
                 <a:latin typeface="Courier New"/>
               </a:rPr>
+              <a:t>MARGIN_HOLD</a:t>
+            </a:r>
+            <a:r>
+              <a:rPr lang="en-US" sz="1100" b="0" u="none" strike="noStrike">
+                <a:solidFill>
+                  <a:srgbClr val="F0F6FC"/>
+                </a:solidFill>
+                <a:effectLst/>
+                <a:uFillTx/>
+                <a:latin typeface="Arial"/>
+              </a:rPr>
+              <a:t> orders and accurately flag 35 </a:t>
+            </a:r>
+            <a:r>
+              <a:rPr lang="en-US" sz="1100" b="1" u="none" strike="noStrike">
+                <a:solidFill>
+                  <a:srgbClr val="20E3B2"/>
+                </a:solidFill>
+                <a:effectLst/>
+                <a:uFillTx/>
+                <a:latin typeface="Courier New"/>
+              </a:rPr>
               <a:t>DIAMOND</a:t>
             </a:r>
             <a:r>
@@ -22789,7 +22987,7 @@
                 <a:uFillTx/>
                 <a:latin typeface="Courier New"/>
               </a:rPr>
-              <a:t>&gt;$250K</a:t>
+              <a:t>$749,300.00</a:t>
             </a:r>
             <a:r>
               <a:rPr lang="en-US" sz="1100" b="0" u="none" strike="noStrike">
@@ -22928,7 +23126,7 @@
                 <a:uFillTx/>
                 <a:latin typeface="Courier New"/>
               </a:rPr>
-              <a:t>15%</a:t>
+              <a:t>margin_floor_pct</a:t>
             </a:r>
             <a:r>
               <a:rPr lang="en-US" sz="1100" b="0" u="none" strike="noStrike">
@@ -22939,7 +23137,7 @@
                 <a:uFillTx/>
                 <a:latin typeface="Arial"/>
               </a:rPr>
-              <a:t> margin floor.</a:t>
+              <a:t>.</a:t>
             </a:r>
             <a:endParaRPr lang="en-US" sz="1100" b="0" u="none" strike="noStrike">
               <a:solidFill>
@@ -23012,7 +23210,7 @@
                 <a:uFillTx/>
                 <a:latin typeface="Arial"/>
               </a:rPr>
-              <a:t> to compute </a:t>
+              <a:t> (</a:t>
             </a:r>
             <a:r>
               <a:rPr lang="en-US" sz="1100" b="1" u="none" strike="noStrike">
@@ -23023,7 +23221,51 @@
                 <a:uFillTx/>
                 <a:latin typeface="Courier New"/>
               </a:rPr>
-              <a:t>raw_atp = on_hand - reserved - safety_stock - unprocessed_webhook_delta_qty</a:t>
+              <a:t>calculate_true_atp</a:t>
+            </a:r>
+            <a:r>
+              <a:rPr lang="en-US" sz="1100" b="0" u="none" strike="noStrike">
+                <a:solidFill>
+                  <a:srgbClr val="F0F6FC"/>
+                </a:solidFill>
+                <a:effectLst/>
+                <a:uFillTx/>
+                <a:latin typeface="Arial"/>
+              </a:rPr>
+              <a:t> / </a:t>
+            </a:r>
+            <a:r>
+              <a:rPr lang="en-US" sz="1100" b="1" u="none" strike="noStrike">
+                <a:solidFill>
+                  <a:srgbClr val="20E3B2"/>
+                </a:solidFill>
+                <a:effectLst/>
+                <a:uFillTx/>
+                <a:latin typeface="Courier New"/>
+              </a:rPr>
+              <a:t>evaluate_location_atp</a:t>
+            </a:r>
+            <a:r>
+              <a:rPr lang="en-US" sz="1100" b="0" u="none" strike="noStrike">
+                <a:solidFill>
+                  <a:srgbClr val="F0F6FC"/>
+                </a:solidFill>
+                <a:effectLst/>
+                <a:uFillTx/>
+                <a:latin typeface="Arial"/>
+              </a:rPr>
+              <a:t>) to subtract </a:t>
+            </a:r>
+            <a:r>
+              <a:rPr lang="en-US" sz="1100" b="1" u="none" strike="noStrike">
+                <a:solidFill>
+                  <a:srgbClr val="20E3B2"/>
+                </a:solidFill>
+                <a:effectLst/>
+                <a:uFillTx/>
+                <a:latin typeface="Courier New"/>
+              </a:rPr>
+              <a:t>reserved_qty + damaged_hold_qty + bopis_lock_qty + safety_stock_qty + unprocessed_pos_events</a:t>
             </a:r>
             <a:r>
               <a:rPr lang="en-US" sz="1100" b="0" u="none" strike="noStrike">
@@ -23085,7 +23327,7 @@
                 <a:uFillTx/>
                 <a:latin typeface="Arial"/>
               </a:rPr>
-              <a:t> Pass all 5 unit/integration tests in </a:t>
+              <a:t> Pass all 6 unit/integration tests in </a:t>
             </a:r>
             <a:r>
               <a:rPr lang="en-US" sz="1100" b="1" u="none" strike="noStrike">
@@ -24106,7 +24348,7 @@
                 <a:uFillTx/>
                 <a:latin typeface="Courier New"/>
               </a:rPr>
-              <a:t>contract_min_margin_floor_pct</a:t>
+              <a:t>margin_floor_pct</a:t>
             </a:r>
             <a:r>
               <a:rPr lang="en-US" sz="1100" b="0" u="none" strike="noStrike">
@@ -24190,7 +24432,7 @@
                 <a:uFillTx/>
                 <a:latin typeface="Arial"/>
               </a:rPr>
-              <a:t> Compute </a:t>
+              <a:t> Subtract </a:t>
             </a:r>
             <a:r>
               <a:rPr lang="en-US" sz="1100" b="1" u="none" strike="noStrike">
@@ -24201,7 +24443,7 @@
                 <a:uFillTx/>
                 <a:latin typeface="Courier New"/>
               </a:rPr>
-              <a:t>raw_atp = on_hand - reserved - safety_stock - unprocessed_webhook_delta_qty</a:t>
+              <a:t>reserved_qty + damaged_hold_qty + bopis_lock_qty + safety_stock_qty + unprocessed_pos_events</a:t>
             </a:r>
             <a:r>
               <a:rPr lang="en-US" sz="1100" b="0" u="none" strike="noStrike">
@@ -24212,7 +24454,29 @@
                 <a:uFillTx/>
                 <a:latin typeface="Arial"/>
               </a:rPr>
-              <a:t> and </a:t>
+              <a:t> from </a:t>
+            </a:r>
+            <a:r>
+              <a:rPr lang="en-US" sz="1100" b="1" u="none" strike="noStrike">
+                <a:solidFill>
+                  <a:srgbClr val="20E3B2"/>
+                </a:solidFill>
+                <a:effectLst/>
+                <a:uFillTx/>
+                <a:latin typeface="Courier New"/>
+              </a:rPr>
+              <a:t>on_hand_qty</a:t>
+            </a:r>
+            <a:r>
+              <a:rPr lang="en-US" sz="1100" b="0" u="none" strike="noStrike">
+                <a:solidFill>
+                  <a:srgbClr val="F0F6FC"/>
+                </a:solidFill>
+                <a:effectLst/>
+                <a:uFillTx/>
+                <a:latin typeface="Arial"/>
+              </a:rPr>
+              <a:t> and clamp </a:t>
             </a:r>
             <a:r>
               <a:rPr lang="en-US" sz="1100" b="1" u="none" strike="noStrike">
@@ -24318,7 +24582,7 @@
                 <a:uFillTx/>
                 <a:latin typeface="Courier New"/>
               </a:rPr>
-              <a:t>5 passed</a:t>
+              <a:t>6 passed</a:t>
             </a:r>
             <a:r>
               <a:rPr lang="en-US" sz="1100" b="0" u="none" strike="noStrike">
@@ -24340,7 +24604,7 @@
                 <a:uFillTx/>
                 <a:latin typeface="Courier New"/>
               </a:rPr>
-              <a:t>$35,113.25</a:t>
+              <a:t>$18,420.50</a:t>
             </a:r>
             <a:r>
               <a:rPr lang="en-US" sz="1100" b="0" u="none" strike="noStrike">
@@ -24351,7 +24615,7 @@
                 <a:uFillTx/>
                 <a:latin typeface="Arial"/>
               </a:rPr>
-              <a:t> bleed stopped; 35 VIP orders flagged).</a:t>
+              <a:t> bleed stopped across 28 orders; 35 VIP orders flagged).</a:t>
             </a:r>
             <a:endParaRPr lang="en-US" sz="1100" b="0" u="none" strike="noStrike">
               <a:solidFill>
@@ -24580,7 +24844,7 @@
                 <a:uFillTx/>
                 <a:latin typeface="Arial"/>
               </a:rPr>
-              <a:t> '@src/services/promo_pricing.py @src/services/inventory_atp.py @data/logs/pos_wms_webhooks.jsonl @tests/test_lab01_triage.py Run pytest and explain why 30 orders are bleeding margin and 35 VIP orders have phantom ATP.'</a:t>
+              <a:t> '@src/services/promo_pricing.py @src/services/inventory_atp.py @data/logs/pos_wms_webhooks.jsonl @tests/test_lab01_triage.py Run pytest and explain why 28 orders are bleeding margin and 35 VIP orders have phantom ATP.'</a:t>
             </a:r>
             <a:endParaRPr lang="en-US" sz="1100" b="0" u="none" strike="noStrike">
               <a:solidFill>
@@ -24631,7 +24895,7 @@
                 <a:uFillTx/>
                 <a:latin typeface="Arial"/>
               </a:rPr>
-              <a:t> '/plan Create a remediation plan for promo_pricing.py (GS1 GTIN-14, Decimal, multiplicative stackable promos, margin floor clamping) and inventory_atp.py (subtract reserved, safety_stock, and webhook delta).'</a:t>
+              <a:t> '/plan Create a remediation plan for promo_pricing.py (GS1 GTIN-14, Decimal, multiplicative stackable promos, margin floor clamping) and inventory_atp.py (subtract reserved, damaged_hold, bopis_lock, safety_stock, and unprocessed_pos_events).'</a:t>
             </a:r>
             <a:endParaRPr lang="en-US" sz="1100" b="0" u="none" strike="noStrike">
               <a:solidFill>
@@ -24693,7 +24957,7 @@
                 <a:uFillTx/>
                 <a:latin typeface="Courier New"/>
               </a:rPr>
-              <a:t>calculate_node_atp</a:t>
+              <a:t>calculate_true_atp</a:t>
             </a:r>
             <a:r>
               <a:rPr lang="en-US" sz="1100" b="0" u="none" strike="noStrike">
@@ -24726,7 +24990,7 @@
                 <a:uFillTx/>
                 <a:latin typeface="Arial"/>
               </a:rPr>
-              <a:t> -&gt; 'Subtract reserved_qty, safety_stock_qty, and unprocessed_webhook_delta_qty from on_hand_qty.'</a:t>
+              <a:t> -&gt; 'Subtract reserved_qty, damaged_hold_qty, bopis_lock_qty, safety_stock_qty, and unprocessed_pos_events from on_hand_qty.'</a:t>
             </a:r>
             <a:endParaRPr lang="en-US" sz="1100" b="0" u="none" strike="noStrike">
               <a:solidFill>
@@ -26555,7 +26819,7 @@
                 <a:uFillTx/>
                 <a:latin typeface="Courier New"/>
               </a:rPr>
-              <a:t>15%</a:t>
+              <a:t>margin_floor_pct</a:t>
             </a:r>
             <a:r>
               <a:rPr lang="en-US" sz="1100" b="0" u="none" strike="noStrike">
@@ -26566,7 +26830,7 @@
                 <a:uFillTx/>
                 <a:latin typeface="Arial"/>
               </a:rPr>
-              <a:t> margin floor, and OTIF chargeback formulas.</a:t>
+              <a:t>, and OTIF chargeback formulas.</a:t>
             </a:r>
             <a:endParaRPr lang="en-US" sz="1100" b="0" u="none" strike="noStrike">
               <a:solidFill>
@@ -26617,7 +26881,7 @@
                 <a:uFillTx/>
                 <a:latin typeface="Courier New"/>
               </a:rPr>
-              <a:t>.agents/skills/margin-otif-audit/SKILL.md</a:t>
+              <a:t>.agents/skills/retail-otif-margin-auditor/SKILL.md</a:t>
             </a:r>
             <a:r>
               <a:rPr lang="en-US" sz="1100" b="1" u="none" strike="noStrike">
@@ -26650,7 +26914,7 @@
                 <a:uFillTx/>
                 <a:latin typeface="Courier New"/>
               </a:rPr>
-              <a:t>name: margin-otif-audit</a:t>
+              <a:t>name: retail-otif-margin-auditor</a:t>
             </a:r>
             <a:r>
               <a:rPr lang="en-US" sz="1100" b="0" u="none" strike="noStrike">
@@ -26672,7 +26936,7 @@
                 <a:uFillTx/>
                 <a:latin typeface="Courier New"/>
               </a:rPr>
-              <a:t>scripts/run_otif_margin_audit.py</a:t>
+              <a:t>scripts/audit_vendor_otif.py</a:t>
             </a:r>
             <a:r>
               <a:rPr lang="en-US" sz="1100" b="0" u="none" strike="noStrike">
@@ -26745,7 +27009,7 @@
                 <a:uFillTx/>
                 <a:latin typeface="Courier New"/>
               </a:rPr>
-              <a:t>data/exports/executive_margin_otif_audit.json</a:t>
+              <a:t>data/exports/otif_chargeback_audit_report.json</a:t>
             </a:r>
             <a:r>
               <a:rPr lang="en-US" sz="1100" b="0" u="none" strike="noStrike">
@@ -26756,7 +27020,7 @@
                 <a:uFillTx/>
                 <a:latin typeface="Arial"/>
               </a:rPr>
-              <a:t> &amp; </a:t>
+              <a:t> (</a:t>
             </a:r>
             <a:r>
               <a:rPr lang="en-US" sz="1100" b="1" u="none" strike="noStrike">
@@ -26767,7 +27031,7 @@
                 <a:uFillTx/>
                 <a:latin typeface="Courier New"/>
               </a:rPr>
-              <a:t>.md</a:t>
+              <a:t>$98,250.00</a:t>
             </a:r>
             <a:r>
               <a:rPr lang="en-US" sz="1100" b="0" u="none" strike="noStrike">
@@ -26778,7 +27042,7 @@
                 <a:uFillTx/>
                 <a:latin typeface="Arial"/>
               </a:rPr>
-              <a:t> (</a:t>
+              <a:t> OTIF chargebacks across 6 suppliers) and pass all 4 Lab 02 tests (</a:t>
             </a:r>
             <a:r>
               <a:rPr lang="en-US" sz="1100" b="1" u="none" strike="noStrike">
@@ -26789,7 +27053,7 @@
                 <a:uFillTx/>
                 <a:latin typeface="Courier New"/>
               </a:rPr>
-              <a:t>$98,250.00</a:t>
+              <a:t>10 passed</a:t>
             </a:r>
             <a:r>
               <a:rPr lang="en-US" sz="1100" b="0" u="none" strike="noStrike">
@@ -26800,7 +27064,7 @@
                 <a:uFillTx/>
                 <a:latin typeface="Arial"/>
               </a:rPr>
-              <a:t> OTIF chargebacks) and pass </a:t>
+              <a:t> cumulative) in </a:t>
             </a:r>
             <a:r>
               <a:rPr lang="en-US" sz="1100" b="1" u="none" strike="noStrike">
@@ -27843,7 +28107,7 @@
                 <a:uFillTx/>
                 <a:latin typeface="Courier New"/>
               </a:rPr>
-              <a:t>on_hand - reserved - safety_stock - webhook_delta</a:t>
+              <a:t>on_hand - reserved - damaged_hold - bopis_lock - safety_stock - unprocessed_pos_events</a:t>
             </a:r>
             <a:r>
               <a:rPr lang="en-US" sz="1100" b="0" u="none" strike="noStrike">
@@ -27905,7 +28169,7 @@
                 <a:uFillTx/>
                 <a:latin typeface="Courier New"/>
               </a:rPr>
-              <a:t>.agents/skills/margin-otif-audit/SKILL.md</a:t>
+              <a:t>.agents/skills/retail-otif-margin-auditor/SKILL.md</a:t>
             </a:r>
             <a:r>
               <a:rPr lang="en-US" sz="1100" b="1" u="none" strike="noStrike">
@@ -27938,7 +28202,7 @@
                 <a:uFillTx/>
                 <a:latin typeface="Courier New"/>
               </a:rPr>
-              <a:t>name: margin-otif-audit</a:t>
+              <a:t>name: retail-otif-margin-auditor</a:t>
             </a:r>
             <a:r>
               <a:rPr lang="en-US" sz="1100" b="0" u="none" strike="noStrike">
@@ -27982,7 +28246,7 @@
                 <a:uFillTx/>
                 <a:latin typeface="Courier New"/>
               </a:rPr>
-              <a:t>./.venv/bin/python scripts/run_otif_margin_audit.py</a:t>
+              <a:t>./.venv/bin/python scripts/audit_vendor_otif.py</a:t>
             </a:r>
             <a:r>
               <a:rPr lang="en-US" sz="1100" b="0" u="none" strike="noStrike">
@@ -28077,7 +28341,7 @@
                 <a:uFillTx/>
                 <a:latin typeface="Courier New"/>
               </a:rPr>
-              <a:t>5 passed</a:t>
+              <a:t>10 passed</a:t>
             </a:r>
             <a:r>
               <a:rPr lang="en-US" sz="1100" b="0" u="none" strike="noStrike">
@@ -28088,7 +28352,29 @@
                 <a:uFillTx/>
                 <a:latin typeface="Arial"/>
               </a:rPr>
-              <a:t> + executive OTIF/margin reports generated).</a:t>
+              <a:t> cumulative + </a:t>
+            </a:r>
+            <a:r>
+              <a:rPr lang="en-US" sz="1100" b="1" u="none" strike="noStrike">
+                <a:solidFill>
+                  <a:srgbClr val="20E3B2"/>
+                </a:solidFill>
+                <a:effectLst/>
+                <a:uFillTx/>
+                <a:latin typeface="Courier New"/>
+              </a:rPr>
+              <a:t>data/exports/otif_chargeback_audit_report.json</a:t>
+            </a:r>
+            <a:r>
+              <a:rPr lang="en-US" sz="1100" b="0" u="none" strike="noStrike">
+                <a:solidFill>
+                  <a:srgbClr val="F0F6FC"/>
+                </a:solidFill>
+                <a:effectLst/>
+                <a:uFillTx/>
+                <a:latin typeface="Arial"/>
+              </a:rPr>
+              <a:t> generated).</a:t>
             </a:r>
             <a:endParaRPr lang="en-US" sz="1100" b="0" u="none" strike="noStrike">
               <a:solidFill>
@@ -28317,7 +28603,7 @@
                 <a:uFillTx/>
                 <a:latin typeface="Arial"/>
               </a:rPr>
-              <a:t> '/plan Create @GEMINI.md and @.agents/rules/retail-standards.md enforcing Decimal ROUND_HALF_UP, GS1 GTIN-14 Modulo-10 validation, True ATP webhook delta deductions, multiplicative promo stacking, and OTIF chargeback rules.'</a:t>
+              <a:t> '/plan Create @GEMINI.md and @.agents/rules/retail-standards.md enforcing Decimal ROUND_HALF_UP, GS1 GTIN-14 Modulo-10 validation, True ATP deductions, multiplicative promo stacking, and OTIF chargeback rules.'</a:t>
             </a:r>
             <a:endParaRPr lang="en-US" sz="1100" b="0" u="none" strike="noStrike">
               <a:solidFill>
@@ -28368,7 +28654,7 @@
                 <a:uFillTx/>
                 <a:latin typeface="Arial"/>
               </a:rPr>
-              <a:t> 'Create @.agents/skills/margin-otif-audit/SKILL.md with YAML frontmatter (name: margin-otif-audit) that executes ./scripts/run_otif_margin_audit.py and writes data/exports/executive_margin_otif_audit.json and .md.'</a:t>
+              <a:t> 'Create @.agents/skills/retail-otif-margin-auditor/SKILL.md with YAML frontmatter (name: retail-otif-margin-auditor) that executes ./.venv/bin/python scripts/audit_vendor_otif.py and writes data/exports/otif_chargeback_audit_report.json.'</a:t>
             </a:r>
             <a:endParaRPr lang="en-US" sz="1100" b="0" u="none" strike="noStrike">
               <a:solidFill>
